--- a/docs/onboarding/rig-intro.ja.pptx
+++ b/docs/onboarding/rig-intro.ja.pptx
@@ -532,7 +532,7 @@
           <a:p>
             <a:r>
               <a:rPr lang="en-US" dirty="0"/>
-              <a:t>rig をまったく知らない人向け。前半で安全フローの仕組み、後半で pack による知識層の拡張を扱う。</a:t>
+              <a:t>rig をまったく知らない人向けの資料です。前半で安全フローの仕組み、後半で pack による知識層の拡張を扱います。</a:t>
             </a:r>
             <a:endParaRPr lang="en-US" dirty="0"/>
           </a:p>
@@ -3620,7 +3620,7 @@
                 <a:ea typeface="Calibri" pitchFamily="34" charset="-122"/>
                 <a:cs typeface="Calibri" pitchFamily="34" charset="-120"/>
               </a:rPr>
-              <a:t>AI に仕事を任せるための、隔離と検証の層。</a:t>
+              <a:t>AI に仕事を任せるときの、隔離と検証のしくみ。</a:t>
             </a:r>
             <a:endParaRPr lang="en-US" sz="1700" dirty="0"/>
           </a:p>
@@ -3640,7 +3640,7 @@
                 <a:ea typeface="Calibri" pitchFamily="34" charset="-122"/>
                 <a:cs typeface="Calibri" pitchFamily="34" charset="-120"/>
               </a:rPr>
-              <a:t>ゼロから知り、自分のドメインを教え込むまで。</a:t>
+              <a:t>はじめて触る人から、自分のドメインを教え込む人まで。</a:t>
             </a:r>
             <a:endParaRPr lang="en-US" sz="1700" dirty="0"/>
           </a:p>
@@ -3831,7 +3831,7 @@
                 <a:ea typeface="Calibri" pitchFamily="34" charset="-122"/>
                 <a:cs typeface="Calibri" pitchFamily="34" charset="-120"/>
               </a:rPr>
-              <a:t>ここからは、その仕組みが実際にどう動くか。</a:t>
+              <a:t>ここからは、その仕組みが実際にどう動くかを見ていきます。</a:t>
             </a:r>
             <a:endParaRPr lang="en-US" sz="1700" dirty="0"/>
           </a:p>
@@ -3851,7 +3851,7 @@
                 <a:ea typeface="Calibri" pitchFamily="34" charset="-122"/>
                 <a:cs typeface="Calibri" pitchFamily="34" charset="-120"/>
               </a:rPr>
-              <a:t>分類・隔離・ゲート・受け入れの四つを順に見る。</a:t>
+              <a:t>分類、隔離、ゲート、受け入れの順です。</a:t>
             </a:r>
             <a:endParaRPr lang="en-US" sz="1700" dirty="0"/>
           </a:p>
@@ -4117,7 +4117,7 @@
                 <a:ea typeface="Arial" pitchFamily="34" charset="-122"/>
                 <a:cs typeface="Arial" pitchFamily="34" charset="-120"/>
               </a:rPr>
-              <a:t>危ないのは、AI が間違えることではない。間違えたことに誰も気づかないまま、本体に混ざることだ。</a:t>
+              <a:t>困るのは AI が間違えることではありません。間違えたことに誰も気づかないまま、本体に混ざってしまうことです。</a:t>
             </a:r>
             <a:endParaRPr lang="en-US" sz="1500" dirty="0"/>
           </a:p>
@@ -4495,7 +4495,7 @@
                 <a:ea typeface="Calibri" pitchFamily="34" charset="-122"/>
                 <a:cs typeface="Calibri" pitchFamily="34" charset="-120"/>
               </a:rPr>
-              <a:t>選択理由をバナーで</a:t>
+              <a:t>選んだ理由を</a:t>
             </a:r>
             <a:endParaRPr lang="en-US" sz="1000" dirty="0"/>
           </a:p>
@@ -4515,7 +4515,7 @@
                 <a:ea typeface="Calibri" pitchFamily="34" charset="-122"/>
                 <a:cs typeface="Calibri" pitchFamily="34" charset="-120"/>
               </a:rPr>
-              <a:t>先に宣言する</a:t>
+              <a:t>先に一行で出す</a:t>
             </a:r>
             <a:endParaRPr lang="en-US" sz="1000" dirty="0"/>
           </a:p>
@@ -5092,7 +5092,7 @@
                 <a:ea typeface="Calibri" pitchFamily="34" charset="-122"/>
                 <a:cs typeface="Calibri" pitchFamily="34" charset="-120"/>
               </a:rPr>
-              <a:t>反映は staged。</a:t>
+              <a:t>反映は staged まで。</a:t>
             </a:r>
             <a:endParaRPr lang="en-US" sz="1000" dirty="0"/>
           </a:p>
@@ -5224,7 +5224,7 @@
                 <a:ea typeface="Arial" pitchFamily="34" charset="-122"/>
                 <a:cs typeface="Arial" pitchFamily="34" charset="-120"/>
               </a:rPr>
-              <a:t>品質を自動で生む道具ではない</a:t>
+              <a:t>品質を自動で生む道具ではありません</a:t>
             </a:r>
             <a:endParaRPr lang="en-US" sz="1400" dirty="0"/>
           </a:p>
@@ -5266,7 +5266,7 @@
                 <a:ea typeface="Calibri" pitchFamily="34" charset="-122"/>
                 <a:cs typeface="Calibri" pitchFamily="34" charset="-120"/>
               </a:rPr>
-              <a:t>あなたが定義した品質基準を、AI に無視させないための道具。基準を作るのは人間の仕事のまま。rig の仕事は強制と測定。</a:t>
+              <a:t>あなたが決めた品質基準を、AI に無視させないための道具です。基準を作るのは人間の仕事のままで、rig の仕事は強制と測定です。</a:t>
             </a:r>
             <a:endParaRPr lang="en-US" sz="1200" dirty="0"/>
           </a:p>
@@ -5339,7 +5339,7 @@
                 <a:ea typeface="Arial" pitchFamily="34" charset="-122"/>
                 <a:cs typeface="Arial" pitchFamily="34" charset="-120"/>
               </a:rPr>
-              <a:t>対価がある</a:t>
+              <a:t>そのかわり、対価があります</a:t>
             </a:r>
             <a:endParaRPr lang="en-US" sz="1400" dirty="0"/>
           </a:p>
@@ -5381,7 +5381,7 @@
                 <a:ea typeface="Calibri" pitchFamily="34" charset="-122"/>
                 <a:cs typeface="Calibri" pitchFamily="34" charset="-120"/>
               </a:rPr>
-              <a:t>隔離・検証・記録のために、速度とトークンを意図的に払う。速く書かせたいだけなら、モデルに直接頼むほうが速い。</a:t>
+              <a:t>隔離と検証と記録のために、速度とトークンをわざと払っています。速く書かせたいだけなら、モデルに直接頼むほうが速いです。</a:t>
             </a:r>
             <a:endParaRPr lang="en-US" sz="1200" dirty="0"/>
           </a:p>
@@ -5496,7 +5496,7 @@
                 <a:ea typeface="Calibri" pitchFamily="34" charset="-122"/>
                 <a:cs typeface="Calibri" pitchFamily="34" charset="-120"/>
               </a:rPr>
-              <a:t>失敗したときのコストが、速度より高いとき。本番に触れるコード、他人が読むコード、あとで誰も検証しないコード。</a:t>
+              <a:t>失敗したときのコストが速度より高い場面です。本番に触れるコード、他人が読むコード、あとで誰も検証しないコードが当てはまります。</a:t>
             </a:r>
             <a:endParaRPr lang="en-US" sz="1200" dirty="0"/>
           </a:p>
@@ -7272,7 +7272,7 @@
                 <a:ea typeface="Calibri" pitchFamily="34" charset="-122"/>
                 <a:cs typeface="Calibri" pitchFamily="34" charset="-120"/>
               </a:rPr>
-              <a:t>安全性の核（分類・隔離・acceptance-gate・明示的な accept／discard）は実装済みで、リポジトリ自身のテストで裏づけがある。</a:t>
+              <a:t>安全性の核になる部分は実装済みで、リポジトリ自身のテストで裏づけがあります。分類・隔離・acceptance-gate・明示的な accept と discard です。</a:t>
             </a:r>
             <a:endParaRPr lang="en-US" sz="1150" dirty="0"/>
           </a:p>
@@ -7301,7 +7301,7 @@
                 <a:ea typeface="Calibri" pitchFamily="34" charset="-122"/>
                 <a:cs typeface="Calibri" pitchFamily="34" charset="-120"/>
               </a:rPr>
-              <a:t>その上の観測系（drill・board・stats・GitHub 連携）は実用可能だが発展中。</a:t>
+              <a:t>その上の観測系（drill・board・stats・GitHub 連携）は使えますが、まだ発展途中です。</a:t>
             </a:r>
             <a:endParaRPr lang="en-US" sz="1150" dirty="0"/>
           </a:p>
@@ -7416,7 +7416,7 @@
                 <a:ea typeface="Calibri" pitchFamily="34" charset="-122"/>
                 <a:cs typeface="Calibri" pitchFamily="34" charset="-120"/>
               </a:rPr>
-              <a:t>「未出荷の機能を Planned として載せない」がこのプロジェクトの方針。表に無いコマンドは、まだ出荷されていない。</a:t>
+              <a:t>このプロジェクトは、まだ出していない機能を Planned として載せない方針です。表に無いコマンドは、まだ出荷されていません。</a:t>
             </a:r>
             <a:endParaRPr lang="en-US" sz="1150" dirty="0"/>
           </a:p>
@@ -7489,7 +7489,7 @@
                 <a:ea typeface="Arial" pitchFamily="34" charset="-122"/>
                 <a:cs typeface="Arial" pitchFamily="34" charset="-120"/>
               </a:rPr>
-              <a:t>隔離が task 単位で閉じている、ということ</a:t>
+              <a:t>隔離が task ごとに閉じていると、何が嬉しいか</a:t>
             </a:r>
             <a:endParaRPr lang="en-US" sz="1400" dirty="0"/>
           </a:p>
@@ -7531,7 +7531,7 @@
                 <a:ea typeface="Calibri" pitchFamily="34" charset="-122"/>
                 <a:cs typeface="Calibri" pitchFamily="34" charset="-120"/>
               </a:rPr>
-              <a:t>複数タスクを同時に走らせても構造的に安全（別 worktree・別 branch）。/rig:queue で積んで一括 GO しても、並列プロセス同士がファイルを取り合わない。完了後の確認場所は /rig:go board — どの端末・どのプロセスが起動したかに関わらず、全 task の状態が一つの表に出る。</a:t>
+              <a:t>複数のタスクを同時に走らせても、別々の worktree と branch なので安全です。/rig:queue に積んで一括で GO しても、並列プロセスがファイルを取り合うことはありません。終わったあとは /rig:go board を見れば、どの端末のどのプロセスが動かしたかに関わらず、全タスクの状態が一つの表に出ます。</a:t>
             </a:r>
             <a:endParaRPr lang="en-US" sz="1150" dirty="0"/>
           </a:p>
@@ -7898,7 +7898,7 @@
                 <a:ea typeface="Calibri" pitchFamily="34" charset="-122"/>
                 <a:cs typeface="Calibri" pitchFamily="34" charset="-120"/>
               </a:rPr>
-              <a:t>スラッシュコマンドはここから来る。安全フローは一通りこれだけで動く。</a:t>
+              <a:t>スラッシュコマンドはここから来ます。安全フローは一通りこれだけで動きます。</a:t>
             </a:r>
             <a:endParaRPr lang="en-US" sz="1150" dirty="0"/>
           </a:p>
@@ -8173,7 +8173,7 @@
                 <a:ea typeface="Calibri" pitchFamily="34" charset="-122"/>
                 <a:cs typeface="Calibri" pitchFamily="34" charset="-120"/>
               </a:rPr>
-              <a:t>CI・スクリプト・別のアシスタント（Codex / Cursor）から同じ recipe とゲートを回す。</a:t>
+              <a:t>CI やスクリプト、別のアシスタント（Codex / Cursor）から、同じ recipe とゲートを回せます。</a:t>
             </a:r>
             <a:endParaRPr lang="en-US" sz="1150" dirty="0"/>
           </a:p>
@@ -8308,7 +8308,7 @@
                 <a:ea typeface="Calibri" pitchFamily="34" charset="-122"/>
                 <a:cs typeface="Calibri" pitchFamily="34" charset="-120"/>
               </a:rPr>
-              <a:t>両方は要らない。二つ目が必要なのは、Claude Code の外にあるものが同じ recipe とゲートに届く必要があるときだけ。/rig:setup が中から入れてくれる。</a:t>
+              <a:t>両方は要りません。二つ目が必要なのは、Claude Code の外にあるものを同じ recipe とゲートに通したいときだけです。/rig:setup を使えば、Claude Code の中から入れられます。</a:t>
             </a:r>
             <a:endParaRPr lang="en-US" sz="1100" dirty="0"/>
           </a:p>
@@ -8347,7 +8347,7 @@
                 <a:ea typeface="Arial" pitchFamily="34" charset="-122"/>
                 <a:cs typeface="Arial" pitchFamily="34" charset="-120"/>
               </a:rPr>
-              <a:t>最初の三十秒 — 設定はゼロでいい</a:t>
+              <a:t>最初の三十秒。設定はゼロで始められます</a:t>
             </a:r>
             <a:endParaRPr lang="en-US" sz="1200" dirty="0"/>
           </a:p>
@@ -8747,7 +8747,7 @@
                 <a:ea typeface="Calibri" pitchFamily="34" charset="-122"/>
                 <a:cs typeface="Calibri" pitchFamily="34" charset="-120"/>
               </a:rPr>
-              <a:t>manifest も gates.json も persona 設定も要らない（すべて後から足す opt-in）</a:t>
+              <a:t>manifest も gates.json も persona 設定も要りません。すべて後から足せます</a:t>
             </a:r>
             <a:endParaRPr lang="en-US" sz="1000" dirty="0"/>
           </a:p>
@@ -8786,7 +8786,7 @@
                 <a:ea typeface="Calibri" pitchFamily="34" charset="-122"/>
                 <a:cs typeface="Calibri" pitchFamily="34" charset="-120"/>
               </a:rPr>
-              <a:t>なぜその段取りになったかを、走り出す前に一行で宣言する</a:t>
+              <a:t>なぜその段取りになったかを、走り出す前に一行で出します</a:t>
             </a:r>
             <a:endParaRPr lang="en-US" sz="1000" dirty="0"/>
           </a:p>
@@ -8896,7 +8896,7 @@
                 <a:ea typeface="Arial" pitchFamily="34" charset="-122"/>
                 <a:cs typeface="Arial" pitchFamily="34" charset="-120"/>
               </a:rPr>
-              <a:t>「安全です」は主張にすぎない — 四本柱</a:t>
+              <a:t>rig が安全だと言える四つの理由</a:t>
             </a:r>
             <a:endParaRPr lang="en-US" sz="2700" dirty="0"/>
           </a:p>
@@ -9013,7 +9013,7 @@
                 <a:ea typeface="Calibri" pitchFamily="34" charset="-122"/>
                 <a:cs typeface="Calibri" pitchFamily="34" charset="-120"/>
               </a:rPr>
-              <a:t>rig が安全なのは、次の四つが文章ではなく配線として入っているから。</a:t>
+              <a:t>安全だと言えるのは、次の四つが文章ではなく配線として入っているからです。</a:t>
             </a:r>
             <a:endParaRPr lang="en-US" sz="1250" dirty="0"/>
           </a:p>
@@ -9192,7 +9192,7 @@
                 <a:ea typeface="Calibri" pitchFamily="34" charset="-122"/>
                 <a:cs typeface="Calibri" pitchFamily="34" charset="-120"/>
               </a:rPr>
-              <a:t>タスクごとに専用の worktree と使い捨てブランチ。rig はあなたの作業ツリーに直接書き込まない。失敗しても中断しても、手元は汚れない。隔離が task 単位で閉じているので、複数タスクの同時実行が構造的に安全。</a:t>
+              <a:t>タスクごとに専用の worktree と使い捨てブランチを作ります。rig があなたの作業ツリーに直接書き込むことはありません。失敗しても中断しても手元は汚れませんし、隔離がタスクごとに閉じているので同時実行も安全です。</a:t>
             </a:r>
             <a:endParaRPr lang="en-US" sz="1150" dirty="0"/>
           </a:p>
@@ -9371,7 +9371,7 @@
                 <a:ea typeface="Calibri" pitchFamily="34" charset="-122"/>
                 <a:cs typeface="Calibri" pitchFamily="34" charset="-120"/>
               </a:rPr>
-              <a:t>「完了しました」では完了にならない。無関係な差分・テスト・型・リスク記述・秘密情報を機械的に確認して初めて反映候補になる。failed か pending が一件でも残れば accept は拒否される（exit 1）。</a:t>
+              <a:t>「完了しました」と言われても完了にはなりません。無関係な差分・テスト・型・リスク記述・秘密情報を機械的に確認して、はじめて反映候補になります。failed か pending が一件でも残っていれば accept は拒否されます（exit 1）。</a:t>
             </a:r>
             <a:endParaRPr lang="en-US" sz="1150" dirty="0"/>
           </a:p>
@@ -9550,7 +9550,7 @@
                 <a:ea typeface="Calibri" pitchFamily="34" charset="-122"/>
                 <a:cs typeface="Calibri" pitchFamily="34" charset="-120"/>
               </a:rPr>
-              <a:t>実装する AI と検証する AI を分離し、検証側はプロセスレベルで読み取り専用に固定する。お願いではなく強制として。判定の一次証拠は自己申告レポートではなく、worktree の実際の git diff。</a:t>
+              <a:t>実装する AI と検証する AI を分け、検証側はプロセスレベルで読み取り専用に固定します。お願いではなく強制です。判定の一次証拠に使うのは自己申告のレポートではなく、worktree の実際の git diff です。</a:t>
             </a:r>
             <a:endParaRPr lang="en-US" sz="1150" dirty="0"/>
           </a:p>
@@ -9729,7 +9729,7 @@
                 <a:ea typeface="Calibri" pitchFamily="34" charset="-122"/>
                 <a:cs typeface="Calibri" pitchFamily="34" charset="-120"/>
               </a:rPr>
-              <a:t>accept は squash merge で staged（未コミット）まで。コミットは常に人間が打つ。discard しても run log は残り、何を試みてなぜ捨てたかを辿れる。構造的な前提は --force でも通らない。</a:t>
+              <a:t>accept は squash merge で staged（未コミット）まで進めます。コミットは常に人間が打ちます。discard しても run log は残るので、何を試してなぜ捨てたかを後から辿れます。構造的な前提は --force でも通りません。</a:t>
             </a:r>
             <a:endParaRPr lang="en-US" sz="1150" dirty="0"/>
           </a:p>
@@ -9963,7 +9963,7 @@
                 <a:ea typeface="Calibri" pitchFamily="34" charset="-122"/>
                 <a:cs typeface="Calibri" pitchFamily="34" charset="-120"/>
               </a:rPr>
-              <a:t>タスクごとに専用の git worktree ＋ 使い捨てブランチを作る</a:t>
+              <a:t>タスクごとに専用の git worktree と使い捨てブランチを作ります</a:t>
             </a:r>
             <a:endParaRPr lang="en-US" sz="1250" dirty="0"/>
           </a:p>
@@ -9987,7 +9987,7 @@
                 <a:ea typeface="Calibri" pitchFamily="34" charset="-122"/>
                 <a:cs typeface="Calibri" pitchFamily="34" charset="-120"/>
               </a:rPr>
-              <a:t>読み取り専用のタスク（レビュー・調査）は --no-worktree で worktree ごと省略できる</a:t>
+              <a:t>レビューや調査のような読み取り専用のタスクは、--no-worktree で worktree ごと省略できます</a:t>
             </a:r>
             <a:endParaRPr lang="en-US" sz="1250" dirty="0"/>
           </a:p>
@@ -10011,7 +10011,7 @@
                 <a:ea typeface="Calibri" pitchFamily="34" charset="-122"/>
                 <a:cs typeface="Calibri" pitchFamily="34" charset="-120"/>
               </a:rPr>
-              <a:t>discard は worktree と branch を消すが、run log（.rig/runs/）は残る</a:t>
+              <a:t>discard は worktree と branch を消しますが、run log（.rig/runs/）は残ります</a:t>
             </a:r>
             <a:endParaRPr lang="en-US" sz="1250" dirty="0"/>
           </a:p>
@@ -10035,7 +10035,7 @@
                 <a:ea typeface="Calibri" pitchFamily="34" charset="-122"/>
                 <a:cs typeface="Calibri" pitchFamily="34" charset="-120"/>
               </a:rPr>
-              <a:t>並列実行しても別 worktree・別 branch なので、プロセス同士がファイルを取り合わない</a:t>
+              <a:t>並列で実行しても別の worktree と branch なので、プロセス同士がファイルを取り合いません</a:t>
             </a:r>
             <a:endParaRPr lang="en-US" sz="1250" dirty="0"/>
           </a:p>
@@ -10468,7 +10468,7 @@
                 <a:ea typeface="Arial" pitchFamily="34" charset="-122"/>
                 <a:cs typeface="Arial" pitchFamily="34" charset="-120"/>
               </a:rPr>
-              <a:t>queue は accept しない</a:t>
+              <a:t>queue は accept までは進めません</a:t>
             </a:r>
             <a:endParaRPr lang="en-US" sz="1400" dirty="0"/>
           </a:p>
@@ -10510,7 +10510,7 @@
                 <a:ea typeface="Calibri" pitchFamily="34" charset="-122"/>
                 <a:cs typeface="Calibri" pitchFamily="34" charset="-120"/>
               </a:rPr>
-              <a:t>queue の verifier が見るのは「gate が確定したか」「worktree 内で完結し本体に書いていないか」だけ。反映の判断は人間に残る。完了後の確認場所は /rig:go board。</a:t>
+              <a:t>queue の verifier が見るのは二つだけです。gate が確定したか、worktree の中で完結して本体に書いていないか。反映するかどうかの判断は人間に残ります。終わったら /rig:go board で確認してください。</a:t>
             </a:r>
             <a:endParaRPr lang="en-US" sz="1150" dirty="0"/>
           </a:p>
@@ -10620,7 +10620,7 @@
                 <a:ea typeface="Arial" pitchFamily="34" charset="-122"/>
                 <a:cs typeface="Arial" pitchFamily="34" charset="-120"/>
               </a:rPr>
-              <a:t>柱 ② acceptance-gate — standard ＋ 種別プリセット</a:t>
+              <a:t>柱 ② acceptance-gate は standard と種別プリセットの合成です</a:t>
             </a:r>
             <a:endParaRPr lang="en-US" sz="2700" dirty="0"/>
           </a:p>
@@ -11893,7 +11893,7 @@
                 <a:ea typeface="Arial" pitchFamily="34" charset="-122"/>
                 <a:cs typeface="Arial" pitchFamily="34" charset="-120"/>
               </a:rPr>
-              <a:t>四つの状態</a:t>
+              <a:t>状態は四つ</a:t>
             </a:r>
             <a:endParaRPr lang="en-US" sz="1400" dirty="0"/>
           </a:p>
@@ -11935,7 +11935,7 @@
                 <a:ea typeface="Calibri" pitchFamily="34" charset="-122"/>
                 <a:cs typeface="Calibri" pitchFamily="34" charset="-120"/>
               </a:rPr>
-              <a:t>各基準は根拠つきで passed / failed / warning / skipped として記録され、全体は passed / passed_with_warnings / failed / pending に集約される。</a:t>
+              <a:t>各基準は根拠つきで passed / failed / warning / skipped として記録されます。全体は passed / passed_with_warnings / failed / pending に集約されます。</a:t>
             </a:r>
             <a:endParaRPr lang="en-US" sz="1100" dirty="0"/>
           </a:p>
@@ -12008,7 +12008,7 @@
                 <a:ea typeface="Arial" pitchFamily="34" charset="-122"/>
                 <a:cs typeface="Arial" pitchFamily="34" charset="-120"/>
               </a:rPr>
-              <a:t>accept を止めるもの</a:t>
+              <a:t>accept が止まる条件</a:t>
             </a:r>
             <a:endParaRPr lang="en-US" sz="1400" dirty="0"/>
           </a:p>
@@ -12050,7 +12050,7 @@
                 <a:ea typeface="Calibri" pitchFamily="34" charset="-122"/>
                 <a:cs typeface="Calibri" pitchFamily="34" charset="-120"/>
               </a:rPr>
-              <a:t>failed か pending が一件でも残っていれば accept は機械的に拒否される（exit 1）。</a:t>
+              <a:t>failed か pending が一件でも残っていれば、accept は機械的に拒否されます（exit 1）。</a:t>
             </a:r>
             <a:endParaRPr lang="en-US" sz="1100" dirty="0"/>
           </a:p>
@@ -12079,7 +12079,7 @@
                 <a:ea typeface="Calibri" pitchFamily="34" charset="-122"/>
                 <a:cs typeface="Calibri" pitchFamily="34" charset="-120"/>
               </a:rPr>
-              <a:t>warning は accept を止めないが、常に提示され、黙って握りつぶされることはない。</a:t>
+              <a:t>warning は accept を止めません。ただし必ず提示されるので、黙って握りつぶされることはありません。</a:t>
             </a:r>
             <a:endParaRPr lang="en-US" sz="1100" dirty="0"/>
           </a:p>
@@ -12118,7 +12118,7 @@
                 <a:ea typeface="Calibri" pitchFamily="34" charset="-122"/>
                 <a:cs typeface="Calibri" pitchFamily="34" charset="-120"/>
               </a:rPr>
-              <a:t>正本は scripts/workbench.py gates。プロジェクトは .rig/gates.json の extra_criteria で基準を足せる。</a:t>
+              <a:t>正本は scripts/workbench.py gates です。プロジェクト側は .rig/gates.json の extra_criteria で基準を足せます。</a:t>
             </a:r>
             <a:endParaRPr lang="en-US" sz="1000" dirty="0"/>
           </a:p>
@@ -12228,7 +12228,7 @@
                 <a:ea typeface="Arial" pitchFamily="34" charset="-122"/>
                 <a:cs typeface="Arial" pitchFamily="34" charset="-120"/>
               </a:rPr>
-              <a:t>基準は自己申告ではない — 機械センサーが裏づける</a:t>
+              <a:t>基準は自己申告ではなく、機械センサーが裏づけます</a:t>
             </a:r>
             <a:endParaRPr lang="en-US" sz="2700" dirty="0"/>
           </a:p>
@@ -12421,7 +12421,7 @@
                 <a:ea typeface="Calibri" pitchFamily="34" charset="-122"/>
                 <a:cs typeface="Calibri" pitchFamily="34" charset="-120"/>
               </a:rPr>
-              <a:t>task diff への決定論シークレットスキャン。検出があれば failed。抜粋は常にマスク済み。</a:t>
+              <a:t>task diff に決定論的なシークレットスキャンをかけます。検出があれば failed です。抜粋は常にマスクされます。</a:t>
             </a:r>
             <a:endParaRPr lang="en-US" sz="1050" dirty="0"/>
           </a:p>
@@ -12536,7 +12536,7 @@
                 <a:ea typeface="Calibri" pitchFamily="34" charset="-122"/>
                 <a:cs typeface="Calibri" pitchFamily="34" charset="-120"/>
               </a:rPr>
-              <a:t>prose 面へのインジェクション・マーカー検出。不可視／bidi Unicode は fail、指示上書き句は warning。</a:t>
+              <a:t>文章面のインジェクション・マーカーを探します。不可視文字や bidi Unicode は fail、指示を上書きする言い回しは warning です。</a:t>
             </a:r>
             <a:endParaRPr lang="en-US" sz="1050" dirty="0"/>
           </a:p>
@@ -12651,7 +12651,7 @@
                 <a:ea typeface="Calibri" pitchFamily="34" charset="-122"/>
                 <a:cs typeface="Calibri" pitchFamily="34" charset="-120"/>
               </a:rPr>
-              <a:t>破壊的コマンド検出。rm -rf / ・mkfs・DROP DATABASE は fail、force push や TRUNCATE は warning。</a:t>
+              <a:t>破壊的なコマンドを探します。rm -rf / ・mkfs・DROP DATABASE は fail、force push や TRUNCATE は warning です。</a:t>
             </a:r>
             <a:endParaRPr lang="en-US" sz="1050" dirty="0"/>
           </a:p>
@@ -12766,7 +12766,7 @@
                 <a:ea typeface="Calibri" pitchFamily="34" charset="-122"/>
                 <a:cs typeface="Calibri" pitchFamily="34" charset="-120"/>
               </a:rPr>
-              <a:t>gates.json・recipes・CI workflow の編集は fail。既存テストの改変・assert 削除・skip 追加は warning。</a:t>
+              <a:t>gates.json・recipes・CI workflow を編集していたら fail です。既存テストの改変・assert 削除・skip 追加は warning になります。</a:t>
             </a:r>
             <a:endParaRPr lang="en-US" sz="1050" dirty="0"/>
           </a:p>
@@ -12881,7 +12881,7 @@
                 <a:ea typeface="Calibri" pitchFamily="34" charset="-122"/>
                 <a:cs typeface="Calibri" pitchFamily="34" charset="-120"/>
               </a:rPr>
-              <a:t>OpenAPI schema-diff。API が変わったのに diff サマリに記述が無ければ warning に落とす。</a:t>
+              <a:t>OpenAPI の schema-diff を取ります。API が変わったのに diff サマリに記述が無ければ warning に落とします。</a:t>
             </a:r>
             <a:endParaRPr lang="en-US" sz="1050" dirty="0"/>
           </a:p>
@@ -12996,7 +12996,7 @@
                 <a:ea typeface="Calibri" pitchFamily="34" charset="-122"/>
                 <a:cs typeface="Calibri" pitchFamily="34" charset="-120"/>
               </a:rPr>
-              <a:t>diff が prompt 面に触れたときだけ自動追加。--set による手動上書きを拒否する唯一の基準。</a:t>
+              <a:t>diff が prompt 面に触れたときだけ自動で足されます。--set による手動上書きを拒否する唯一の基準です。</a:t>
             </a:r>
             <a:endParaRPr lang="en-US" sz="1050" dirty="0"/>
           </a:p>
@@ -13069,7 +13069,7 @@
                 <a:ea typeface="Arial" pitchFamily="34" charset="-122"/>
                 <a:cs typeface="Arial" pitchFamily="34" charset="-120"/>
               </a:rPr>
-              <a:t>設定は加算のみ</a:t>
+              <a:t>設定は足す方向にしか動きません</a:t>
             </a:r>
             <a:endParaRPr lang="en-US" sz="1400" dirty="0"/>
           </a:p>
@@ -13111,7 +13111,7 @@
                 <a:ea typeface="Calibri" pitchFamily="34" charset="-122"/>
                 <a:cs typeface="Calibri" pitchFamily="34" charset="-120"/>
               </a:rPr>
-              <a:t>プロジェクトは .rig/gates.json で独自基準を足せるが、組み込み基準の削除・緩和キーは即座に拒否される。リポジトリの中のファイルが、そのリポジトリを守るゲートを弱めることはできない。</a:t>
+              <a:t>プロジェクトは .rig/gates.json で独自の基準を足せます。ただし組み込み基準の削除キーや緩和キーは、その場で拒否されます。リポジトリの中のファイルが、そのリポジトリを守るゲートを弱めることはできません。</a:t>
             </a:r>
             <a:endParaRPr lang="en-US" sz="1150" dirty="0"/>
           </a:p>
@@ -13480,7 +13480,7 @@
                 <a:ea typeface="Calibri" pitchFamily="34" charset="-122"/>
                 <a:cs typeface="Calibri" pitchFamily="34" charset="-120"/>
               </a:rPr>
-              <a:t>見て、grep して、指摘は書ける</a:t>
+              <a:t>見て、grep して、指摘を書くことはできます</a:t>
             </a:r>
             <a:endParaRPr lang="en-US" sz="1150" dirty="0"/>
           </a:p>
@@ -13504,7 +13504,7 @@
                 <a:ea typeface="Calibri" pitchFamily="34" charset="-122"/>
                 <a:cs typeface="Calibri" pitchFamily="34" charset="-120"/>
               </a:rPr>
-              <a:t>編集・commit・formatter による書き換えはできない</a:t>
+              <a:t>編集も commit も、formatter による書き換えもできません</a:t>
             </a:r>
             <a:endParaRPr lang="en-US" sz="1150" dirty="0"/>
           </a:p>
@@ -13528,7 +13528,7 @@
                 <a:ea typeface="Calibri" pitchFamily="34" charset="-122"/>
                 <a:cs typeface="Calibri" pitchFamily="34" charset="-120"/>
               </a:rPr>
-              <a:t>判定の一次証拠は worktree の実際の git diff。生成側のレポートは「未検証の主張」として渡されるだけ</a:t>
+              <a:t>判定の一次証拠は worktree の実際の git diff です。生成側のレポートは「未検証の主張」として渡されるだけです</a:t>
             </a:r>
             <a:endParaRPr lang="en-US" sz="1150" dirty="0"/>
           </a:p>
@@ -13552,7 +13552,7 @@
                 <a:ea typeface="Calibri" pitchFamily="34" charset="-122"/>
                 <a:cs typeface="Calibri" pitchFamily="34" charset="-120"/>
               </a:rPr>
-              <a:t>orchestrate.py probe が、この制限が実装として発動していることをプロバイダごとに確認する</a:t>
+              <a:t>この制限が実装として効いていることは、orchestrate.py probe がプロバイダごとに確認します</a:t>
             </a:r>
             <a:endParaRPr lang="en-US" sz="1150" dirty="0"/>
           </a:p>
@@ -13591,7 +13591,7 @@
                 <a:ea typeface="Arial" pitchFamily="34" charset="-122"/>
                 <a:cs typeface="Arial" pitchFamily="34" charset="-120"/>
               </a:rPr>
-              <a:t>④  accept は staged で止まり、記録は消えない</a:t>
+              <a:t>④  accept は staged で止まり、記録は消えません</a:t>
             </a:r>
             <a:endParaRPr lang="en-US" sz="1200" dirty="0"/>
           </a:p>
@@ -13813,7 +13813,7 @@
                 <a:ea typeface="Calibri" pitchFamily="34" charset="-122"/>
                 <a:cs typeface="Calibri" pitchFamily="34" charset="-120"/>
               </a:rPr>
-              <a:t>構造的な前提は --force でも通らない。diff.md が無ければ accept できない</a:t>
+              <a:t>構造的な前提は --force でも通りません。diff.md が無ければ accept できません</a:t>
             </a:r>
             <a:endParaRPr lang="en-US" sz="1150" dirty="0"/>
           </a:p>
@@ -13837,7 +13837,7 @@
                 <a:ea typeface="Calibri" pitchFamily="34" charset="-122"/>
                 <a:cs typeface="Calibri" pitchFamily="34" charset="-120"/>
               </a:rPr>
-              <a:t>上書きした場合は forced: true として記録され、消えない</a:t>
+              <a:t>上書きした場合は forced: true として記録され、あとから消せません</a:t>
             </a:r>
             <a:endParaRPr lang="en-US" sz="1150" dirty="0"/>
           </a:p>
@@ -13861,7 +13861,7 @@
                 <a:ea typeface="Calibri" pitchFamily="34" charset="-122"/>
                 <a:cs typeface="Calibri" pitchFamily="34" charset="-120"/>
               </a:rPr>
-              <a:t>反映は squash merge の staged まで。コミットは常に人間が打つ</a:t>
+              <a:t>反映は squash merge の staged までです。コミットは常に人間が打ちます</a:t>
             </a:r>
             <a:endParaRPr lang="en-US" sz="1150" dirty="0"/>
           </a:p>
@@ -13885,7 +13885,7 @@
                 <a:ea typeface="Calibri" pitchFamily="34" charset="-122"/>
                 <a:cs typeface="Calibri" pitchFamily="34" charset="-120"/>
               </a:rPr>
-              <a:t>discard は変更ファイル一覧を必ず先に見せ、--yes を要求する</a:t>
+              <a:t>discard は変更ファイルの一覧を必ず先に見せ、--yes を求めます</a:t>
             </a:r>
             <a:endParaRPr lang="en-US" sz="1150" dirty="0"/>
           </a:p>
@@ -13924,7 +13924,7 @@
                 <a:ea typeface="Arial" pitchFamily="34" charset="-122"/>
                 <a:cs typeface="Arial" pitchFamily="34" charset="-120"/>
               </a:rPr>
-              <a:t>中断しても、静かに素の直接作業へ戻らない</a:t>
+              <a:t>中断しても、黙って素の作業には戻りません</a:t>
             </a:r>
             <a:endParaRPr lang="en-US" sz="1200" dirty="0"/>
           </a:p>
@@ -14113,7 +14113,7 @@
                 <a:ea typeface="Arial" pitchFamily="34" charset="-122"/>
                 <a:cs typeface="Arial" pitchFamily="34" charset="-120"/>
               </a:rPr>
-              <a:t>文脈圧縮も生き延びる</a:t>
+              <a:t>文脈が圧縮されても残ります</a:t>
             </a:r>
             <a:endParaRPr lang="en-US" sz="1400" dirty="0"/>
           </a:p>
@@ -14155,7 +14155,7 @@
                 <a:ea typeface="Calibri" pitchFamily="34" charset="-122"/>
                 <a:cs typeface="Calibri" pitchFamily="34" charset="-120"/>
               </a:rPr>
-              <a:t>PreCompact フックが run-state の保全指示を注入し、/rig:init は同じ保全文を CLAUDE.md の Compact Instructions にも置ける。</a:t>
+              <a:t>PreCompact フックが run-state の保全指示を差し込みます。/rig:init を使えば、同じ保全文を CLAUDE.md の Compact Instructions にも置けます。</a:t>
             </a:r>
             <a:endParaRPr lang="en-US" sz="1100" dirty="0"/>
           </a:p>
@@ -14265,7 +14265,7 @@
                 <a:ea typeface="Arial" pitchFamily="34" charset="-122"/>
                 <a:cs typeface="Arial" pitchFamily="34" charset="-120"/>
               </a:rPr>
-              <a:t>中身は四種類のブリック — LEGO のように合成する</a:t>
+              <a:t>中身は四種類のブリックで、LEGO のように組み合わせます</a:t>
             </a:r>
             <a:endParaRPr lang="en-US" sz="2700" dirty="0"/>
           </a:p>
@@ -14631,7 +14631,7 @@
                 <a:ea typeface="Calibri" pitchFamily="34" charset="-122"/>
                 <a:cs typeface="Calibri" pitchFamily="34" charset="-120"/>
               </a:rPr>
-              <a:t>手順そのもの。薄く保たれ、エンジンには触れない</a:t>
+              <a:t>手順そのものです。薄く保たれ、エンジンには触れません</a:t>
             </a:r>
             <a:endParaRPr lang="en-US" sz="1100" dirty="0"/>
           </a:p>
@@ -14958,7 +14958,7 @@
                 <a:ea typeface="Calibri" pitchFamily="34" charset="-122"/>
                 <a:cs typeface="Calibri" pitchFamily="34" charset="-120"/>
               </a:rPr>
-              <a:t>/rig:go はこの組み立てを自動でやる。/rig:dev は同じエンジンを recipe・step・flag すべて明示して使う上級者向けの入口。</a:t>
+              <a:t>/rig:go はこの組み立てを自動でやります。/rig:dev は同じエンジンを、recipe・step・flag をすべて自分で指定して使う入口です。</a:t>
             </a:r>
             <a:endParaRPr lang="en-US" sz="1200" dirty="0"/>
           </a:p>
@@ -15853,7 +15853,7 @@
                 <a:ea typeface="Calibri" pitchFamily="34" charset="-122"/>
                 <a:cs typeface="Calibri" pitchFamily="34" charset="-120"/>
               </a:rPr>
-              <a:t>flag とブリックの完全な一覧は skills/engine/SKILL.md が正本（README には複製しない＝目録ドリフト防止）。</a:t>
+              <a:t>flag とブリックの完全な一覧は skills/engine/SKILL.md が正本です。README には複製しません。二重に書くと目録がずれるためです。</a:t>
             </a:r>
             <a:endParaRPr lang="en-US" sz="1000" dirty="0"/>
           </a:p>
@@ -16942,7 +16942,7 @@
                 <a:ea typeface="Calibri" pitchFamily="34" charset="-122"/>
                 <a:cs typeface="Calibri" pitchFamily="34" charset="-120"/>
               </a:rPr>
-              <a:t>この資料は rig リポジトリの一次資料だけを典拠にしています。仕様は発展中のため、厳密な引数は各コマンドの --help を正本としてください。</a:t>
+              <a:t>典拠は rig リポジトリの一次資料だけです。仕様はまだ変わるので、引数の正確なところは各コマンドの --help を見てください。</a:t>
             </a:r>
             <a:endParaRPr lang="en-US" sz="1050" dirty="0"/>
           </a:p>
@@ -17052,7 +17052,7 @@
                 <a:ea typeface="Arial" pitchFamily="34" charset="-122"/>
                 <a:cs typeface="Arial" pitchFamily="34" charset="-120"/>
               </a:rPr>
-              <a:t>レビュアーは、測れる</a:t>
+              <a:t>レビュアーの実力は測れます</a:t>
             </a:r>
             <a:endParaRPr lang="en-US" sz="2700" dirty="0"/>
           </a:p>
@@ -17169,7 +17169,7 @@
                 <a:ea typeface="Calibri" pitchFamily="34" charset="-122"/>
                 <a:cs typeface="Calibri" pitchFamily="34" charset="-120"/>
               </a:rPr>
-              <a:t>reviewer persona は単なるプロンプトではない。既知のバグを使い捨ての diff に注入し、レビューを走らせ、reviewer には見せない答案キーと突き合わせて採点する。</a:t>
+              <a:t>reviewer persona は単なるプロンプトではありません。既知のバグを使い捨ての diff に仕込んでレビューを走らせ、reviewer には見せない答案キーと突き合わせて採点します。</a:t>
             </a:r>
             <a:endParaRPr lang="en-US" sz="1250" dirty="0"/>
           </a:p>
@@ -17846,7 +17846,7 @@
                 <a:ea typeface="Arial" pitchFamily="34" charset="-122"/>
                 <a:cs typeface="Arial" pitchFamily="34" charset="-120"/>
               </a:rPr>
-              <a:t>推奨される persona 更新は四カテゴリに固定</a:t>
+              <a:t>persona の更新案は四カテゴリに固定されています</a:t>
             </a:r>
             <a:endParaRPr lang="en-US" sz="1400" dirty="0"/>
           </a:p>
@@ -17888,7 +17888,7 @@
                 <a:ea typeface="Calibri" pitchFamily="34" charset="-122"/>
                 <a:cs typeface="Calibri" pitchFamily="34" charset="-120"/>
               </a:rPr>
-              <a:t>add_checklist_item ／ adjust_severity_rule ／ add_false_positive_guard ／ strengthen_security_focus。</a:t>
+              <a:t>add_checklist_item ／ adjust_severity_rule ／ add_false_positive_guard ／ strengthen_security_focus の四つです。</a:t>
             </a:r>
             <a:endParaRPr lang="en-US" sz="1150" dirty="0"/>
           </a:p>
@@ -17917,7 +17917,7 @@
                 <a:ea typeface="Calibri" pitchFamily="34" charset="-122"/>
                 <a:cs typeface="Calibri" pitchFamily="34" charset="-120"/>
               </a:rPr>
-              <a:t>曖昧な感想ではなく、run をまたいで集計できる形にするため。--replay はペルソナ編集後にアーカイブ済み diff へ再実行し、新旧 verdict を差分表示する。本物のコードには一切触れない。</a:t>
+              <a:t>曖昧な感想ではなく、run をまたいで集計できる形にするためです。--replay を使うと、persona を編集したあとにアーカイブ済みの diff へ再実行し、新旧の verdict を並べて見せます。本物のコードには一切触れません。</a:t>
             </a:r>
             <a:endParaRPr lang="en-US" sz="1150" dirty="0"/>
           </a:p>
@@ -17956,7 +17956,7 @@
                 <a:ea typeface="Arial" pitchFamily="34" charset="-122"/>
                 <a:cs typeface="Arial" pitchFamily="34" charset="-120"/>
               </a:rPr>
-              <a:t>そして、ゴム印を名指しする（/rig:go stats）</a:t>
+              <a:t>形だけのレビューも名指しします（/rig:go stats）</a:t>
             </a:r>
             <a:endParaRPr lang="en-US" sz="1200" dirty="0"/>
           </a:p>
@@ -18251,7 +18251,7 @@
                 <a:ea typeface="Arial" pitchFamily="34" charset="-122"/>
                 <a:cs typeface="Arial" pitchFamily="34" charset="-120"/>
               </a:rPr>
-              <a:t>コマンドの地図 — 上から下へ、必要になってから降りる</a:t>
+              <a:t>コマンドの地図。上から順に、必要になってから覚えます</a:t>
             </a:r>
             <a:endParaRPr lang="en-US" sz="2700" dirty="0"/>
           </a:p>
@@ -19440,7 +19440,7 @@
                 <a:ea typeface="Calibri" pitchFamily="34" charset="-122"/>
                 <a:cs typeface="Calibri" pitchFamily="34" charset="-120"/>
               </a:rPr>
-              <a:t>/rig:go と diff / accept / discard の四つだけ。</a:t>
+              <a:t>/rig:go と diff / accept / discard の四つだけです。</a:t>
             </a:r>
             <a:endParaRPr lang="en-US" sz="1150" dirty="0"/>
           </a:p>
@@ -19555,7 +19555,7 @@
                 <a:ea typeface="Calibri" pitchFamily="34" charset="-122"/>
                 <a:cs typeface="Calibri" pitchFamily="34" charset="-120"/>
               </a:rPr>
-              <a:t>残り全部。必要になった日に、この表に戻ってくればいい。</a:t>
+              <a:t>残り全部です。必要になった日に、この表へ戻ってきてください。</a:t>
             </a:r>
             <a:endParaRPr lang="en-US" sz="1150" dirty="0"/>
           </a:p>
@@ -19688,7 +19688,7 @@
                 <a:ea typeface="Calibri" pitchFamily="34" charset="-122"/>
                 <a:cs typeface="Calibri" pitchFamily="34" charset="-120"/>
               </a:rPr>
-              <a:t>バージョンとハッシュと出典を持った配布物として渡す。</a:t>
+              <a:t>バージョンとハッシュと出典を持った配布物として渡します。</a:t>
             </a:r>
             <a:endParaRPr lang="en-US" sz="1700" dirty="0"/>
           </a:p>
@@ -19837,7 +19837,7 @@
                 <a:ea typeface="Arial" pitchFamily="34" charset="-122"/>
                 <a:cs typeface="Arial" pitchFamily="34" charset="-120"/>
               </a:rPr>
-              <a:t>知識層とは何か、そしてなぜ二種類あるのか</a:t>
+              <a:t>知識層とは何か。なぜ二種類あるのか</a:t>
             </a:r>
             <a:endParaRPr lang="en-US" sz="2700" dirty="0"/>
           </a:p>
@@ -19988,7 +19988,7 @@
                 <a:ea typeface="Arial" pitchFamily="34" charset="-122"/>
                 <a:cs typeface="Arial" pitchFamily="34" charset="-120"/>
               </a:rPr>
-              <a:t>知識層＝subagent のプロンプトに注入される、ドメイン記述知識</a:t>
+              <a:t>知識層とは、subagent のプロンプトに注入されるドメイン知識のことです</a:t>
             </a:r>
             <a:endParaRPr lang="en-US" sz="1400" dirty="0"/>
           </a:p>
@@ -20030,7 +20030,7 @@
                 <a:ea typeface="Calibri" pitchFamily="34" charset="-122"/>
                 <a:cs typeface="Calibri" pitchFamily="34" charset="-120"/>
               </a:rPr>
-              <a:t>「この会社ではバックアップをこう定義している」「この製品のユビキタス言語はこれだ」— コードを読んでも出てこない事実を、レビュアーや実装役に持たせるための層。</a:t>
+              <a:t>「この会社ではバックアップをこう定義している」「この製品のユビキタス言語はこれだ」。こうした、コードを読んでも出てこない事実を、レビュアーや実装役に持たせるための層です。</a:t>
             </a:r>
             <a:endParaRPr lang="en-US" sz="1150" dirty="0"/>
           </a:p>
@@ -21586,7 +21586,7 @@
                 <a:ea typeface="Arial" pitchFamily="34" charset="-122"/>
                 <a:cs typeface="Arial" pitchFamily="34" charset="-120"/>
               </a:rPr>
-              <a:t>手元で育てるなら前者</a:t>
+              <a:t>手元で育てるなら前者で十分です</a:t>
             </a:r>
             <a:endParaRPr lang="en-US" sz="1400" dirty="0"/>
           </a:p>
@@ -21628,7 +21628,7 @@
                 <a:ea typeface="Calibri" pitchFamily="34" charset="-122"/>
                 <a:cs typeface="Calibri" pitchFamily="34" charset="-120"/>
               </a:rPr>
-              <a:t>書いてすぐ効く。棚卸しも配布も要らないうちは、これで十分。</a:t>
+              <a:t>書けばすぐ効きます。棚卸しも配布も要らないうちは、これで足ります。</a:t>
             </a:r>
             <a:endParaRPr lang="en-US" sz="1100" dirty="0"/>
           </a:p>
@@ -21701,7 +21701,7 @@
                 <a:ea typeface="Arial" pitchFamily="34" charset="-122"/>
                 <a:cs typeface="Arial" pitchFamily="34" charset="-120"/>
               </a:rPr>
-              <a:t>渡した瞬間に後者が要る</a:t>
+              <a:t>人に渡すなら後者が要ります</a:t>
             </a:r>
             <a:endParaRPr lang="en-US" sz="1400" dirty="0"/>
           </a:p>
@@ -21743,7 +21743,7 @@
                 <a:ea typeface="Calibri" pitchFamily="34" charset="-122"/>
                 <a:cs typeface="Calibri" pitchFamily="34" charset="-120"/>
               </a:rPr>
-              <a:t>誰が書いたのか。いつ見直したのか。根拠は何か。途中で書き換わっていないか。pack はこの四つを構造として持つ。</a:t>
+              <a:t>誰が書いたのか。いつ見直したのか。根拠は何か。途中で書き換わっていないか。pack はこの四つを構造として持っています。</a:t>
             </a:r>
             <a:endParaRPr lang="en-US" sz="1100" dirty="0"/>
           </a:p>
@@ -21853,7 +21853,7 @@
                 <a:ea typeface="Arial" pitchFamily="34" charset="-122"/>
                 <a:cs typeface="Arial" pitchFamily="34" charset="-120"/>
               </a:rPr>
-              <a:t>wiki と inject — 事実を埋め込まず、参照する</a:t>
+              <a:t>persona は事実を埋め込まず、wiki を参照します</a:t>
             </a:r>
             <a:endParaRPr lang="en-US" sz="2700" dirty="0"/>
           </a:p>
@@ -22073,7 +22073,7 @@
                 <a:ea typeface="Calibri" pitchFamily="34" charset="-122"/>
                 <a:cs typeface="Calibri" pitchFamily="34" charset="-120"/>
               </a:rPr>
-              <a:t>一つの概念につき一枚の正準ページ。相互リンクは [[slug]]</a:t>
+              <a:t>一つの概念につき、一枚の正準ページ。相互リンクは [[slug]]</a:t>
             </a:r>
             <a:endParaRPr lang="en-US" sz="1150" dirty="0"/>
           </a:p>
@@ -22097,7 +22097,7 @@
                 <a:ea typeface="Calibri" pitchFamily="34" charset="-122"/>
                 <a:cs typeface="Calibri" pitchFamily="34" charset="-120"/>
               </a:rPr>
-              <a:t>persona は事実を本文に埋め込まず、ページを参照する</a:t>
+              <a:t>persona は事実を本文に埋め込まず、ページを参照します</a:t>
             </a:r>
             <a:endParaRPr lang="en-US" sz="1150" dirty="0"/>
           </a:p>
@@ -22121,7 +22121,7 @@
                 <a:ea typeface="Calibri" pitchFamily="34" charset="-122"/>
                 <a:cs typeface="Calibri" pitchFamily="34" charset="-120"/>
               </a:rPr>
-              <a:t>埋め込むと知識が暗黙知になる。参照なら、ページを一枚直すだけで参照する全 persona の判断が同時に更新される</a:t>
+              <a:t>埋め込むと知識が暗黙知になります。参照にしておけば、ページを一枚直すだけで、参照している全 persona の判断が同時に更新されます</a:t>
             </a:r>
             <a:endParaRPr lang="en-US" sz="1150" dirty="0"/>
           </a:p>
@@ -22145,7 +22145,7 @@
                 <a:ea typeface="Calibri" pitchFamily="34" charset="-122"/>
                 <a:cs typeface="Calibri" pitchFamily="34" charset="-120"/>
               </a:rPr>
-              <a:t>/rig:knowledge は既定で global に書く（--project でプロジェクト overlay）</a:t>
+              <a:t>書き先は /rig:knowledge の既定で global。--project を付けるとプロジェクト overlay になります</a:t>
             </a:r>
             <a:endParaRPr lang="en-US" sz="1150" dirty="0"/>
           </a:p>
@@ -22184,7 +22184,7 @@
                 <a:ea typeface="Arial" pitchFamily="34" charset="-122"/>
                 <a:cs typeface="Arial" pitchFamily="34" charset="-120"/>
               </a:rPr>
-              <a:t>[[slug]] の tier 解決 — 上の層が勝つ</a:t>
+              <a:t>[[slug]] は tier で解決され、上の層が勝ちます</a:t>
             </a:r>
             <a:endParaRPr lang="en-US" sz="1200" dirty="0"/>
           </a:p>
@@ -22894,7 +22894,7 @@
                 <a:ea typeface="Courier New" pitchFamily="34" charset="-122"/>
                 <a:cs typeface="Courier New" pitchFamily="34" charset="-120"/>
               </a:rPr>
-              <a:t>rig が最初から持つ正準ページ</a:t>
+              <a:t>rig が最初から持っているページ</a:t>
             </a:r>
             <a:endParaRPr lang="en-US" sz="950" dirty="0"/>
           </a:p>
@@ -22967,7 +22967,7 @@
                 <a:ea typeface="Arial" pitchFamily="34" charset="-122"/>
                 <a:cs typeface="Arial" pitchFamily="34" charset="-120"/>
               </a:rPr>
-              <a:t>pack の persona は、まず自分の pack を見る</a:t>
+              <a:t>pack の persona は、まず自分の pack を見ます</a:t>
             </a:r>
             <a:endParaRPr lang="en-US" sz="1400" dirty="0"/>
           </a:p>
@@ -23009,7 +23009,7 @@
                 <a:ea typeface="Calibri" pitchFamily="34" charset="-122"/>
                 <a:cs typeface="Calibri" pitchFamily="34" charset="-120"/>
               </a:rPr>
-              <a:t>pack は自分の persona のために必要なページを同梱して持ち歩く。同じ slug をプロジェクト側に置けば、従来どおり上書きできる。</a:t>
+              <a:t>pack は自分の persona に必要なページを同梱して持ち歩きます。同じ slug をプロジェクト側に置けば、これまでどおり上書きできます。</a:t>
             </a:r>
             <a:endParaRPr lang="en-US" sz="1100" dirty="0"/>
           </a:p>
@@ -23119,7 +23119,7 @@
                 <a:ea typeface="Arial" pitchFamily="34" charset="-122"/>
                 <a:cs typeface="Arial" pitchFamily="34" charset="-120"/>
               </a:rPr>
-              <a:t>pack の type が決めるのは、権限</a:t>
+              <a:t>pack の type が決めるのは権限です</a:t>
             </a:r>
             <a:endParaRPr lang="en-US" sz="2700" dirty="0"/>
           </a:p>
@@ -24743,7 +24743,7 @@
                 <a:ea typeface="Arial" pitchFamily="34" charset="-122"/>
                 <a:cs typeface="Arial" pitchFamily="34" charset="-120"/>
               </a:rPr>
-              <a:t>右端の列が、この型モデルの存在理由</a:t>
+              <a:t>右端の列が、この型モデルがある理由です</a:t>
             </a:r>
             <a:endParaRPr lang="en-US" sz="1400" dirty="0"/>
           </a:p>
@@ -24785,7 +24785,7 @@
                 <a:ea typeface="Calibri" pitchFamily="34" charset="-122"/>
                 <a:cs typeface="Calibri" pitchFamily="34" charset="-120"/>
               </a:rPr>
-              <a:t>recipe に checks:（ホスト上で実行されるシェルコマンド）を書けるのは tool だけ。他の型が運ぶのは、プロバイダが読むテキストだけ。</a:t>
+              <a:t>recipe に checks:（ホスト上で実行されるシェルコマンド）を書けるのは tool だけです。他の型が運ぶのは、プロバイダが読むテキストだけです。</a:t>
             </a:r>
             <a:endParaRPr lang="en-US" sz="1100" dirty="0"/>
           </a:p>
@@ -24900,7 +24900,7 @@
                 <a:ea typeface="Calibri" pitchFamily="34" charset="-122"/>
                 <a:cs typeface="Calibri" pitchFamily="34" charset="-120"/>
               </a:rPr>
-              <a:t>kind（core / official / domain / project）は tier 順を決めるだけ。tier は権限ではない。</a:t>
+              <a:t>kind（core / official / domain / project）は tier 順を決めるだけです。tier は権限ではありません。</a:t>
             </a:r>
             <a:endParaRPr lang="en-US" sz="1100" dirty="0"/>
           </a:p>
@@ -24973,7 +24973,7 @@
                 <a:ea typeface="Arial" pitchFamily="34" charset="-122"/>
                 <a:cs typeface="Arial" pitchFamily="34" charset="-120"/>
               </a:rPr>
-              <a:t>既定値を持たない理由</a:t>
+              <a:t>既定値を持たせていない理由</a:t>
             </a:r>
             <a:endParaRPr lang="en-US" sz="1400" dirty="0"/>
           </a:p>
@@ -25015,7 +25015,7 @@
                 <a:ea typeface="Calibri" pitchFamily="34" charset="-122"/>
                 <a:cs typeface="Calibri" pitchFamily="34" charset="-120"/>
               </a:rPr>
-              <a:t>既定値を置くと、その決定を「決めなかった人」に渡してしまうから。</a:t>
+              <a:t>既定値を置くと、その決定を「決めなかった人」に渡してしまうからです。</a:t>
             </a:r>
             <a:endParaRPr lang="en-US" sz="1100" dirty="0"/>
           </a:p>
@@ -25054,7 +25054,7 @@
                 <a:ea typeface="Arial" pitchFamily="34" charset="-122"/>
                 <a:cs typeface="Arial" pitchFamily="34" charset="-120"/>
               </a:rPr>
-              <a:t>チームのドメイン知識を追加することが、同時にコマンド実行権限を渡すことになってはいけない — これが型モデルの引く線。</a:t>
+              <a:t>チームのドメイン知識を足すことが、そのままコマンド実行権限を渡すことになってはいけません。ここが型モデルの引く線です。</a:t>
             </a:r>
             <a:endParaRPr lang="en-US" sz="1300" dirty="0"/>
           </a:p>
@@ -25169,7 +25169,7 @@
                 <a:ea typeface="Calibri" pitchFamily="34" charset="-122"/>
                 <a:cs typeface="Calibri" pitchFamily="34" charset="-120"/>
               </a:rPr>
-              <a:t>知識層を配るだけなら knowledge。persona も一緒に配るなら reviewer。recipe やコマンドまで含むなら skill。必要以上に強い型を選ばないことが、そのまま受け取る側への安全保証になる。</a:t>
+              <a:t>知識層を配るだけなら knowledge を選びます。persona も一緒に配るなら reviewer、recipe やコマンドまで含むなら skill です。必要以上に強い型を選ばないことが、そのまま受け取る側への安全保証になります。</a:t>
             </a:r>
             <a:endParaRPr lang="en-US" sz="1150" dirty="0"/>
           </a:p>
@@ -25279,7 +25279,7 @@
                 <a:ea typeface="Arial" pitchFamily="34" charset="-122"/>
                 <a:cs typeface="Arial" pitchFamily="34" charset="-120"/>
               </a:rPr>
-              <a:t>作る — init → sync → validate → doctor</a:t>
+              <a:t>pack を作る。init → sync → validate → doctor</a:t>
             </a:r>
             <a:endParaRPr lang="en-US" sz="2700" dirty="0"/>
           </a:p>
@@ -25887,7 +25887,7 @@
                 <a:ea typeface="Arial" pitchFamily="34" charset="-122"/>
                 <a:cs typeface="Arial" pitchFamily="34" charset="-120"/>
               </a:rPr>
-              <a:t>pack.yaml は手で編集しない</a:t>
+              <a:t>pack.yaml は手で編集しません</a:t>
             </a:r>
             <a:endParaRPr lang="en-US" sz="1400" dirty="0"/>
           </a:p>
@@ -25929,7 +25929,7 @@
                 <a:ea typeface="Calibri" pitchFamily="34" charset="-122"/>
                 <a:cs typeface="Calibri" pitchFamily="34" charset="-120"/>
               </a:rPr>
-              <a:t>全アセットをパスと sha256 で宣言し、検証時に正準形とバイト比較される。だから生成物であって、手書きの対象ではない。</a:t>
+              <a:t>全アセットをパスと sha256 で宣言し、検証のときに正準形とバイト単位で比較されます。つまり生成物であって、手書きするものではありません。</a:t>
             </a:r>
             <a:endParaRPr lang="en-US" sz="1100" dirty="0"/>
           </a:p>
@@ -26002,7 +26002,7 @@
                 <a:ea typeface="Arial" pitchFamily="34" charset="-122"/>
                 <a:cs typeface="Arial" pitchFamily="34" charset="-120"/>
               </a:rPr>
-              <a:t>sync はディレクトリを鏡写しにする</a:t>
+              <a:t>sync はディレクトリを鏡写しにします</a:t>
             </a:r>
             <a:endParaRPr lang="en-US" sz="1400" dirty="0"/>
           </a:p>
@@ -26044,7 +26044,7 @@
                 <a:ea typeface="Calibri" pitchFamily="34" charset="-122"/>
                 <a:cs typeface="Calibri" pitchFamily="34" charset="-120"/>
               </a:rPr>
-              <a:t>消したファイルは宣言からも消える。書き換えるのは assets と hashes だけで、version・description・entrypoints はあなたのもの。</a:t>
+              <a:t>消したファイルは宣言からも消えます。書き換わるのは assets と hashes だけで、version・description・entrypoints はあなたのものです。</a:t>
             </a:r>
             <a:endParaRPr lang="en-US" sz="1100" dirty="0"/>
           </a:p>
@@ -26117,7 +26117,7 @@
                 <a:ea typeface="Arial" pitchFamily="34" charset="-122"/>
                 <a:cs typeface="Arial" pitchFamily="34" charset="-120"/>
               </a:rPr>
-              <a:t>valid は「完成」ではない</a:t>
+              <a:t>valid は「完成」という意味ではありません</a:t>
             </a:r>
             <a:endParaRPr lang="en-US" sz="1400" dirty="0"/>
           </a:p>
@@ -26159,7 +26159,7 @@
                 <a:ea typeface="Calibri" pitchFamily="34" charset="-122"/>
                 <a:cs typeface="Calibri" pitchFamily="34" charset="-120"/>
               </a:rPr>
-              <a:t>空の pack もスキーマは満たすので valid と出る。doctor がその状態を名指しする（警告では exit 0。failed だけがエラー）。</a:t>
+              <a:t>空の pack もスキーマは満たすので valid と出ます。その状態は doctor が名指ししてくれます。警告では exit 0 を返し、failed だけがエラーです。</a:t>
             </a:r>
             <a:endParaRPr lang="en-US" sz="1100" dirty="0"/>
           </a:p>
@@ -26269,7 +26269,7 @@
                 <a:ea typeface="Arial" pitchFamily="34" charset="-122"/>
                 <a:cs typeface="Arial" pitchFamily="34" charset="-120"/>
               </a:rPr>
-              <a:t>wiki を入れた瞬間、評価ゲートが立つ</a:t>
+              <a:t>wiki を入れると、評価ゲートが立ちます</a:t>
             </a:r>
             <a:endParaRPr lang="en-US" sz="2700" dirty="0"/>
           </a:p>
@@ -26420,7 +26420,7 @@
                 <a:ea typeface="Arial" pitchFamily="34" charset="-122"/>
                 <a:cs typeface="Arial" pitchFamily="34" charset="-120"/>
               </a:rPr>
-              <a:t>wiki はプロンプト素材 — プロバイダに見せるテキストである</a:t>
+              <a:t>wiki はプロンプト素材です。プロバイダに見せるテキストだからです</a:t>
             </a:r>
             <a:endParaRPr lang="en-US" sz="1400" dirty="0"/>
           </a:p>
@@ -26462,7 +26462,7 @@
                 <a:ea typeface="Calibri" pitchFamily="34" charset="-122"/>
                 <a:cs typeface="Calibri" pitchFamily="34" charset="-120"/>
               </a:rPr>
-              <a:t>だから wiki を持つ pack には、承認済みの評価ケースが最低一件必要になる。会社の知識ページも、他のプロンプト面と同じ規律で統治される。事故ではなく、意図された挙動。</a:t>
+              <a:t>そのため wiki を持つ pack には、承認済みの評価ケースが最低一件必要です。会社の知識ページも、他のプロンプト面と同じ規律で扱われます。これは事故ではなく、意図された挙動です。</a:t>
             </a:r>
             <a:endParaRPr lang="en-US" sz="1150" dirty="0"/>
           </a:p>
@@ -26840,7 +26840,7 @@
                 <a:ea typeface="Arial" pitchFamily="34" charset="-122"/>
                 <a:cs typeface="Arial" pitchFamily="34" charset="-120"/>
               </a:rPr>
-              <a:t>承認はフラグではない</a:t>
+              <a:t>承認はフラグを立てることではありません</a:t>
             </a:r>
             <a:endParaRPr lang="en-US" sz="1400" dirty="0"/>
           </a:p>
@@ -26882,7 +26882,7 @@
                 <a:ea typeface="Calibri" pitchFamily="34" charset="-122"/>
                 <a:cs typeface="Calibri" pitchFamily="34" charset="-120"/>
               </a:rPr>
-              <a:t>promote は閾値を満たさない証拠も、意味的ルーブリックが未判定のケースも拒否する。結果には署名がつくので、編集された結果は閾値を見る前に落ちる。</a:t>
+              <a:t>promote は、閾値を満たさない証拠も、意味的ルーブリックが未判定のケースも拒否します。結果には署名がつくので、編集された結果は閾値を見る前に落ちます。</a:t>
             </a:r>
             <a:endParaRPr lang="en-US" sz="1100" dirty="0"/>
           </a:p>
@@ -26955,7 +26955,7 @@
                 <a:ea typeface="Arial" pitchFamily="34" charset="-122"/>
                 <a:cs typeface="Arial" pitchFamily="34" charset="-120"/>
               </a:rPr>
-              <a:t>draft を pack に置けない理由</a:t>
+              <a:t>draft を pack の中に置けない理由</a:t>
             </a:r>
             <a:endParaRPr lang="en-US" sz="1400" dirty="0"/>
           </a:p>
@@ -26997,7 +26997,7 @@
                 <a:ea typeface="Calibri" pitchFamily="34" charset="-122"/>
                 <a:cs typeface="Calibri" pitchFamily="34" charset="-120"/>
               </a:rPr>
-              <a:t>pack は宣言していないものを一切持てないから。--into が変えるのは行き先だけ。</a:t>
+              <a:t>pack は宣言していないものを一切持てないからです。--into が変えるのは行き先だけです。</a:t>
             </a:r>
             <a:endParaRPr lang="en-US" sz="1100" dirty="0"/>
           </a:p>
@@ -27070,7 +27070,7 @@
                 <a:ea typeface="Arial" pitchFamily="34" charset="-122"/>
                 <a:cs typeface="Arial" pitchFamily="34" charset="-120"/>
               </a:rPr>
-              <a:t>忘れやすい一手：entrypoint を書かないと、ケースは走らない</a:t>
+              <a:t>忘れやすい一手。entrypoint を書かないとケースは走りません</a:t>
             </a:r>
             <a:endParaRPr lang="en-US" sz="1400" dirty="0"/>
           </a:p>
@@ -27112,7 +27112,7 @@
                 <a:ea typeface="Calibri" pitchFamily="34" charset="-122"/>
                 <a:cs typeface="Calibri" pitchFamily="34" charset="-120"/>
               </a:rPr>
-              <a:t>prompt_entrypoint はマニフェストが宣言する entrypoint を名指ししなければならない（知識 pack では kind: wiki でページ自身）。書き忘れても pack validate は通るが、pack test は structural_only と報告する — 同梱され、ハッシュされ、そして誰にも実行されない。</a:t>
+              <a:t>prompt_entrypoint は、マニフェストが宣言する entrypoint を名指しする必要があります（知識 pack では kind: wiki でページ自身）。書き忘れても pack validate は通ります。ただし pack test は structural_only と報告します。ケースは同梱され、ハッシュされ、それでも誰にも実行されません。</a:t>
             </a:r>
             <a:endParaRPr lang="en-US" sz="1100" dirty="0"/>
           </a:p>
@@ -27222,7 +27222,7 @@
                 <a:ea typeface="Arial" pitchFamily="34" charset="-122"/>
                 <a:cs typeface="Arial" pitchFamily="34" charset="-120"/>
               </a:rPr>
-              <a:t>その pack は何について書かれているのか — knowledge ブロック</a:t>
+              <a:t>knowledge ブロックで「何についての pack か」を書きます</a:t>
             </a:r>
             <a:endParaRPr lang="en-US" sz="2700" dirty="0"/>
           </a:p>
@@ -27522,7 +27522,7 @@
                 <a:ea typeface="Calibri" pitchFamily="34" charset="-122"/>
                 <a:cs typeface="Calibri" pitchFamily="34" charset="-120"/>
               </a:rPr>
-              <a:t>ブロック自体は任意。だが半分だけ書かれたブロックは許されない — 置いた以上は五つとも必須</a:t>
+              <a:t>ブロック自体は任意です。ただし置いたなら五つとも必須で、半分だけ書くことは許されません</a:t>
             </a:r>
             <a:endParaRPr lang="en-US" sz="1100" dirty="0"/>
           </a:p>
@@ -27546,7 +27546,7 @@
                 <a:ea typeface="Calibri" pitchFamily="34" charset="-122"/>
                 <a:cs typeface="Calibri" pitchFamily="34" charset="-120"/>
               </a:rPr>
-              <a:t>理由は reviewed_at にある。見直し日のない知識宣言こそ、誰にも気づかれずに腐る</a:t>
+              <a:t>理由は reviewed_at です。見直し日のない知識宣言こそ、誰にも気づかれずに古びていきます</a:t>
             </a:r>
             <a:endParaRPr lang="en-US" sz="1100" dirty="0"/>
           </a:p>
@@ -27570,7 +27570,7 @@
                 <a:ea typeface="Calibri" pitchFamily="34" charset="-122"/>
                 <a:cs typeface="Calibri" pitchFamily="34" charset="-120"/>
               </a:rPr>
-              <a:t>どの type でも宣言できる。これは説明であって、権限ではない</a:t>
+              <a:t>どの type でも宣言できます。これは説明であって、権限ではありません</a:t>
             </a:r>
             <a:endParaRPr lang="en-US" sz="1100" dirty="0"/>
           </a:p>
@@ -27594,7 +27594,7 @@
                 <a:ea typeface="Calibri" pitchFamily="34" charset="-122"/>
                 <a:cs typeface="Calibri" pitchFamily="34" charset="-120"/>
               </a:rPr>
-              <a:t>scope は company のような素の次元か、product:northwind-one のような値つき</a:t>
+              <a:t>scope は company のような素の次元か、product:northwind-one のような値つきで書きます</a:t>
             </a:r>
             <a:endParaRPr lang="en-US" sz="1100" dirty="0"/>
           </a:p>
@@ -27667,7 +27667,7 @@
                 <a:ea typeface="Arial" pitchFamily="34" charset="-122"/>
                 <a:cs typeface="Arial" pitchFamily="34" charset="-120"/>
               </a:rPr>
-              <a:t>evidence だけソートを要求されない</a:t>
+              <a:t>evidence だけはソートを求められません</a:t>
             </a:r>
             <a:endParaRPr lang="en-US" sz="1400" dirty="0"/>
           </a:p>
@@ -27709,7 +27709,7 @@
                 <a:ea typeface="Calibri" pitchFamily="34" charset="-122"/>
                 <a:cs typeface="Calibri" pitchFamily="34" charset="-120"/>
               </a:rPr>
-              <a:t>人が書いた文書の題名で、書いた言語のまま。順序自体が「主に何に依拠しているか」を運ぶ。重複だけは拒否される。</a:t>
+              <a:t>人が書いた文書の題名を、書いた言語のまま並べるからです。順序そのものが「主に何に依拠しているか」を表します。重複だけは拒否されます。</a:t>
             </a:r>
             <a:endParaRPr lang="en-US" sz="1050" dirty="0"/>
           </a:p>
@@ -27748,7 +27748,7 @@
                 <a:ea typeface="Arial" pitchFamily="34" charset="-122"/>
                 <a:cs typeface="Arial" pitchFamily="34" charset="-120"/>
               </a:rPr>
-              <a:t>探す — 選び出すが、決めはしない</a:t>
+              <a:t>探す。選び出しますが、決めはしません</a:t>
             </a:r>
             <a:endParaRPr lang="en-US" sz="1200" dirty="0"/>
           </a:p>
@@ -28067,12 +28067,12 @@
         </p:nvSpPr>
         <p:spPr>
           <a:xfrm>
-            <a:off x="6355080" y="4526280"/>
-            <a:ext cx="5303520" cy="1371600"/>
+            <a:off x="6355080" y="4480560"/>
+            <a:ext cx="5303520" cy="1554480"/>
           </a:xfrm>
           <a:prstGeom prst="roundRect">
             <a:avLst>
-              <a:gd name="adj" fmla="val 4000"/>
+              <a:gd name="adj" fmla="val 3529"/>
             </a:avLst>
           </a:prstGeom>
           <a:solidFill>
@@ -28101,7 +28101,7 @@
         </p:nvSpPr>
         <p:spPr>
           <a:xfrm>
-            <a:off x="6611112" y="4709160"/>
+            <a:off x="6611112" y="4663440"/>
             <a:ext cx="4791456" cy="320040"/>
           </a:xfrm>
           <a:prstGeom prst="rect">
@@ -28126,7 +28126,7 @@
                 <a:ea typeface="Arial" pitchFamily="34" charset="-122"/>
                 <a:cs typeface="Arial" pitchFamily="34" charset="-120"/>
               </a:rPr>
-              <a:t>どちらのつもりだったかは、どの pack にも書かれていない</a:t>
+              <a:t>どちらのつもりだったかは、どの pack にも書かれていません</a:t>
             </a:r>
             <a:endParaRPr lang="en-US" sz="1400" dirty="0"/>
           </a:p>
@@ -28140,8 +28140,8 @@
         </p:nvSpPr>
         <p:spPr>
           <a:xfrm>
-            <a:off x="6611112" y="5093208"/>
-            <a:ext cx="4791456" cy="640080"/>
+            <a:off x="6611112" y="5047488"/>
+            <a:ext cx="4791456" cy="822960"/>
           </a:xfrm>
           <a:prstGeom prst="rect">
             <a:avLst/>
@@ -28168,7 +28168,7 @@
                 <a:ea typeface="Calibri" pitchFamily="34" charset="-122"/>
                 <a:cs typeface="Calibri" pitchFamily="34" charset="-120"/>
               </a:rPr>
-              <a:t>質問者についての事実だから。だから rig は推測せず、問いが開いている事実と選択肢の正確な集合を返す。影に隠れたページも、隠さずラベルつきで列挙する。</a:t>
+              <a:t>それは質問した人についての事実だからです。rig は推測せず、問いが開いていることと、選択肢の正確な集合を返します。影に隠れたページも、隠さずラベルつきで並べます。</a:t>
             </a:r>
             <a:endParaRPr lang="en-US" sz="1050" dirty="0"/>
           </a:p>
@@ -28278,7 +28278,7 @@
                 <a:ea typeface="Arial" pitchFamily="34" charset="-122"/>
                 <a:cs typeface="Arial" pitchFamily="34" charset="-120"/>
               </a:rPr>
-              <a:t>渡す — bundle・named source・lock</a:t>
+              <a:t>pack を渡す。bundle と named source</a:t>
             </a:r>
             <a:endParaRPr lang="en-US" sz="2700" dirty="0"/>
           </a:p>
@@ -28741,7 +28741,7 @@
                 <a:ea typeface="Arial" pitchFamily="34" charset="-122"/>
                 <a:cs typeface="Arial" pitchFamily="34" charset="-120"/>
               </a:rPr>
-              <a:t>rig は資格情報を一切持たない</a:t>
+              <a:t>rig は資格情報を一切持ちません</a:t>
             </a:r>
             <a:endParaRPr lang="en-US" sz="1400" dirty="0"/>
           </a:p>
@@ -28783,7 +28783,7 @@
                 <a:ea typeface="Calibri" pitchFamily="34" charset="-122"/>
                 <a:cs typeface="Calibri" pitchFamily="34" charset="-120"/>
               </a:rPr>
-              <a:t>git を呼ぶだけで、認証は設定済みのもの（SSH agent・credential helper・CI secret）が答える。lock が記録するのはソースの名前と commit であって URL ではない。</a:t>
+              <a:t>git を呼ぶだけで、認証は設定済みのもの（SSH agent・credential helper・CI secret）が答えます。lock が記録するのはソースの名前と commit で、URL は記録しません。</a:t>
             </a:r>
             <a:endParaRPr lang="en-US" sz="1100" dirty="0"/>
           </a:p>
@@ -29714,7 +29714,7 @@
                 <a:ea typeface="Arial" pitchFamily="34" charset="-122"/>
                 <a:cs typeface="Arial" pitchFamily="34" charset="-120"/>
               </a:rPr>
-              <a:t>「override したのに何も起きない」の正体</a:t>
+              <a:t>「override したのに何も起きない」の正体です</a:t>
             </a:r>
             <a:endParaRPr lang="en-US" sz="1400" dirty="0"/>
           </a:p>
@@ -29756,7 +29756,7 @@
                 <a:ea typeface="Calibri" pitchFamily="34" charset="-122"/>
                 <a:cs typeface="Calibri" pitchFamily="34" charset="-120"/>
               </a:rPr>
-              <a:t>pack がインストール済みで、valid で、しかし完全に影に隠れている状態。info は身元しか答えないので、explain で tier 争いの勝敗を見る。</a:t>
+              <a:t>pack はインストール済みで valid なのに、完全に影に隠れている状態です。info は身元しか答えないので、explain で tier 争いの勝敗を見てください。</a:t>
             </a:r>
             <a:endParaRPr lang="en-US" sz="1100" dirty="0"/>
           </a:p>
@@ -29829,7 +29829,7 @@
                 <a:ea typeface="Arial" pitchFamily="34" charset="-122"/>
                 <a:cs typeface="Arial" pitchFamily="34" charset="-120"/>
               </a:rPr>
-              <a:t>digest は「誰が」を答えない</a:t>
+              <a:t>digest は「誰が」を答えません</a:t>
             </a:r>
             <a:endParaRPr lang="en-US" sz="1400" dirty="0"/>
           </a:p>
@@ -29871,7 +29871,7 @@
                 <a:ea typeface="Calibri" pitchFamily="34" charset="-122"/>
                 <a:cs typeface="Calibri" pitchFamily="34" charset="-120"/>
               </a:rPr>
-              <a:t>同じバイト列であることだけを保証する。出所を答えるのは署名と trust root。</a:t>
+              <a:t>同じバイト列であることだけを保証します。出所を答えるのは署名と trust root です。</a:t>
             </a:r>
             <a:endParaRPr lang="en-US" sz="1100" dirty="0"/>
           </a:p>
@@ -30074,11 +30074,11 @@
         <p:spPr>
           <a:xfrm>
             <a:off x="502920" y="1298448"/>
-            <a:ext cx="11155680" cy="914400"/>
+            <a:ext cx="11155680" cy="1097280"/>
           </a:xfrm>
           <a:prstGeom prst="roundRect">
             <a:avLst>
-              <a:gd name="adj" fmla="val 6000"/>
+              <a:gd name="adj" fmla="val 5000"/>
             </a:avLst>
           </a:prstGeom>
           <a:solidFill>
@@ -30107,8 +30107,8 @@
         </p:nvSpPr>
         <p:spPr>
           <a:xfrm>
-            <a:off x="822960" y="1481328"/>
-            <a:ext cx="10515600" cy="365760"/>
+            <a:off x="822960" y="1426464"/>
+            <a:ext cx="10515600" cy="502920"/>
           </a:xfrm>
           <a:prstGeom prst="rect">
             <a:avLst/>
@@ -30124,7 +30124,7 @@
               <a:buNone/>
             </a:pPr>
             <a:r>
-              <a:rPr lang="en-US" sz="1700" b="1" dirty="0">
+              <a:rPr lang="en-US" sz="1600" b="1" dirty="0">
                 <a:solidFill>
                   <a:srgbClr val="1C1C1C"/>
                 </a:solidFill>
@@ -30132,9 +30132,9 @@
                 <a:ea typeface="Arial" pitchFamily="34" charset="-122"/>
                 <a:cs typeface="Arial" pitchFamily="34" charset="-120"/>
               </a:rPr>
-              <a:t>オーケストレータは「どう動かすか」を決める。rig は「その結果を受け入れてよいか」を決める。</a:t>
-            </a:r>
-            <a:endParaRPr lang="en-US" sz="1700" dirty="0"/>
+              <a:t>オーケストレータは「どう動かすか」を決めます。rig が決めるのは「その結果を受け入れてよいか」です。</a:t>
+            </a:r>
+            <a:endParaRPr lang="en-US" sz="1600" dirty="0"/>
           </a:p>
         </p:txBody>
       </p:sp>
@@ -30146,7 +30146,7 @@
         </p:nvSpPr>
         <p:spPr>
           <a:xfrm>
-            <a:off x="822960" y="1865376"/>
+            <a:off x="822960" y="1975104"/>
             <a:ext cx="10515600" cy="274320"/>
           </a:xfrm>
           <a:prstGeom prst="rect">
@@ -30171,7 +30171,7 @@
                 <a:ea typeface="Calibri" pitchFamily="34" charset="-122"/>
                 <a:cs typeface="Calibri" pitchFamily="34" charset="-120"/>
               </a:rPr>
-              <a:t>docs/landscape.md — この一行が、機能を足すかどうかの判断基準になっている。</a:t>
+              <a:t>docs/landscape.md より。rig に機能を足すかどうかは、この一行で判断しています。</a:t>
             </a:r>
             <a:endParaRPr lang="en-US" sz="1100" dirty="0"/>
           </a:p>
@@ -30389,7 +30389,7 @@
                 <a:ea typeface="Calibri" pitchFamily="34" charset="-122"/>
                 <a:cs typeface="Calibri" pitchFamily="34" charset="-120"/>
               </a:rPr>
-              <a:t>生成は速くなったが、その成果物を「受け入れてよいか」を判定する層は、人間の目視のままだった。</a:t>
+              <a:t>コードを書く速度は上がりました。でも、出てきたものを受け入れてよいか判定するのは、相変わらず人間の目視でした。</a:t>
             </a:r>
             <a:endParaRPr lang="en-US" sz="1050" dirty="0"/>
           </a:p>
@@ -30568,7 +30568,7 @@
                 <a:ea typeface="Calibri" pitchFamily="34" charset="-122"/>
                 <a:cs typeface="Calibri" pitchFamily="34" charset="-120"/>
               </a:rPr>
-              <a:t>モデルの自己申告は完了の根拠にならない。だが実務では、それ以外に判断材料がない状態が普通だった。</a:t>
+              <a:t>モデルが「できました」と言っても、それは完了の根拠になりません。それなのに、他に判断材料がないのが普通でした。</a:t>
             </a:r>
             <a:endParaRPr lang="en-US" sz="1050" dirty="0"/>
           </a:p>
@@ -30747,7 +30747,7 @@
                 <a:ea typeface="Calibri" pitchFamily="34" charset="-122"/>
                 <a:cs typeface="Calibri" pitchFamily="34" charset="-120"/>
               </a:rPr>
-              <a:t>うまくいかなかった試行が作業ツリーに混ざる。何を捨てて何を残すかの判断自体がコストになる。</a:t>
+              <a:t>うまくいかなかった試行が、作業ツリーにそのまま混ざります。何を残して何を捨てるかを考えること自体が手間になります。</a:t>
             </a:r>
             <a:endParaRPr lang="en-US" sz="1050" dirty="0"/>
           </a:p>
@@ -30820,7 +30820,7 @@
                 <a:ea typeface="Arial" pitchFamily="34" charset="-122"/>
                 <a:cs typeface="Arial" pitchFamily="34" charset="-120"/>
               </a:rPr>
-              <a:t>だから rig が引き受けたのは、一箇所だけ</a:t>
+              <a:t>rig が引き受けたのは一箇所だけです</a:t>
             </a:r>
             <a:endParaRPr lang="en-US" sz="1400" dirty="0"/>
           </a:p>
@@ -30862,7 +30862,7 @@
                 <a:ea typeface="Calibri" pitchFamily="34" charset="-122"/>
                 <a:cs typeface="Calibri" pitchFamily="34" charset="-120"/>
               </a:rPr>
-              <a:t>受け入れの判定を、人間の目視から機械の関門へ移すこと。速く書かせることでも、賢く書かせることでもない。</a:t>
+              <a:t>受け入れの判定を、人間の目視から機械の関門へ移すことです。速く書かせることでも、賢く書かせることでもありません。</a:t>
             </a:r>
             <a:endParaRPr lang="en-US" sz="1150" dirty="0"/>
           </a:p>
@@ -30977,7 +30977,7 @@
                 <a:ea typeface="Calibri" pitchFamily="34" charset="-122"/>
                 <a:cs typeface="Calibri" pitchFamily="34" charset="-120"/>
               </a:rPr>
-              <a:t>rig は品質を自動的に生まない。あなたが定義した基準を、AI に無視させないだけ。基準を作るのは人間の仕事のまま。</a:t>
+              <a:t>rig は品質を自動的に生みません。あなたが決めた基準を AI に無視させない、それだけです。基準を作るのは人間の仕事のままです。</a:t>
             </a:r>
             <a:endParaRPr lang="en-US" sz="1150" dirty="0"/>
           </a:p>
@@ -31180,11 +31180,11 @@
         <p:spPr>
           <a:xfrm>
             <a:off x="502920" y="1298448"/>
-            <a:ext cx="5486400" cy="1051560"/>
+            <a:ext cx="5486400" cy="1170432"/>
           </a:xfrm>
           <a:prstGeom prst="roundRect">
             <a:avLst>
-              <a:gd name="adj" fmla="val 5217"/>
+              <a:gd name="adj" fmla="val 4688"/>
             </a:avLst>
           </a:prstGeom>
           <a:solidFill>
@@ -31302,7 +31302,7 @@
                 <a:ea typeface="Arial" pitchFamily="34" charset="-122"/>
                 <a:cs typeface="Arial" pitchFamily="34" charset="-120"/>
               </a:rPr>
-              <a:t>valid は完成ではない</a:t>
+              <a:t>valid は完成ではありません</a:t>
             </a:r>
             <a:endParaRPr lang="en-US" sz="1150" dirty="0"/>
           </a:p>
@@ -31317,7 +31317,7 @@
         <p:spPr>
           <a:xfrm>
             <a:off x="1289304" y="1865376"/>
-            <a:ext cx="4443984" cy="320040"/>
+            <a:ext cx="4443984" cy="438912"/>
           </a:xfrm>
           <a:prstGeom prst="rect">
             <a:avLst/>
@@ -31344,7 +31344,7 @@
                 <a:ea typeface="Calibri" pitchFamily="34" charset="-122"/>
                 <a:cs typeface="Calibri" pitchFamily="34" charset="-120"/>
               </a:rPr>
-              <a:t>空の pack も valid になる。doctor の empty_pack 警告を見る</a:t>
+              <a:t>空の pack も valid になります。doctor の empty_pack 警告を見てください</a:t>
             </a:r>
             <a:endParaRPr lang="en-US" sz="1050" dirty="0"/>
           </a:p>
@@ -31359,11 +31359,11 @@
         <p:spPr>
           <a:xfrm>
             <a:off x="6355080" y="1298448"/>
-            <a:ext cx="5486400" cy="1051560"/>
+            <a:ext cx="5486400" cy="1170432"/>
           </a:xfrm>
           <a:prstGeom prst="roundRect">
             <a:avLst>
-              <a:gd name="adj" fmla="val 5217"/>
+              <a:gd name="adj" fmla="val 4688"/>
             </a:avLst>
           </a:prstGeom>
           <a:solidFill>
@@ -31481,7 +31481,7 @@
                 <a:ea typeface="Arial" pitchFamily="34" charset="-122"/>
                 <a:cs typeface="Arial" pitchFamily="34" charset="-120"/>
               </a:rPr>
-              <a:t>pack.yaml を手で書かない</a:t>
+              <a:t>pack.yaml は手で書きません</a:t>
             </a:r>
             <a:endParaRPr lang="en-US" sz="1150" dirty="0"/>
           </a:p>
@@ -31496,7 +31496,7 @@
         <p:spPr>
           <a:xfrm>
             <a:off x="7141464" y="1865376"/>
-            <a:ext cx="4443984" cy="320040"/>
+            <a:ext cx="4443984" cy="438912"/>
           </a:xfrm>
           <a:prstGeom prst="rect">
             <a:avLst/>
@@ -31523,7 +31523,7 @@
                 <a:ea typeface="Calibri" pitchFamily="34" charset="-122"/>
                 <a:cs typeface="Calibri" pitchFamily="34" charset="-120"/>
               </a:rPr>
-              <a:t>「たまたま一致する」か「間違っている」かにしかならない</a:t>
+              <a:t>「たまたま一致する」か「間違っている」かにしかなりません</a:t>
             </a:r>
             <a:endParaRPr lang="en-US" sz="1050" dirty="0"/>
           </a:p>
@@ -31538,11 +31538,11 @@
         <p:spPr>
           <a:xfrm>
             <a:off x="502920" y="2487168"/>
-            <a:ext cx="5486400" cy="1051560"/>
+            <a:ext cx="5486400" cy="1170432"/>
           </a:xfrm>
           <a:prstGeom prst="roundRect">
             <a:avLst>
-              <a:gd name="adj" fmla="val 5217"/>
+              <a:gd name="adj" fmla="val 4688"/>
             </a:avLst>
           </a:prstGeom>
           <a:solidFill>
@@ -31660,7 +31660,7 @@
                 <a:ea typeface="Arial" pitchFamily="34" charset="-122"/>
                 <a:cs typeface="Arial" pitchFamily="34" charset="-120"/>
               </a:rPr>
-              <a:t>署名した pack は sync できない</a:t>
+              <a:t>署名した pack は sync できません</a:t>
             </a:r>
             <a:endParaRPr lang="en-US" sz="1150" dirty="0"/>
           </a:p>
@@ -31675,7 +31675,7 @@
         <p:spPr>
           <a:xfrm>
             <a:off x="1289304" y="3054096"/>
-            <a:ext cx="4443984" cy="320040"/>
+            <a:ext cx="4443984" cy="438912"/>
           </a:xfrm>
           <a:prstGeom prst="rect">
             <a:avLst/>
@@ -31702,7 +31702,7 @@
                 <a:ea typeface="Calibri" pitchFamily="34" charset="-122"/>
                 <a:cs typeface="Calibri" pitchFamily="34" charset="-120"/>
               </a:rPr>
-              <a:t>署名を外し、sync し、鍵で署名し直す</a:t>
+              <a:t>署名を外し、sync してから、鍵で署名し直してください</a:t>
             </a:r>
             <a:endParaRPr lang="en-US" sz="1050" dirty="0"/>
           </a:p>
@@ -31717,11 +31717,11 @@
         <p:spPr>
           <a:xfrm>
             <a:off x="6355080" y="2487168"/>
-            <a:ext cx="5486400" cy="1051560"/>
+            <a:ext cx="5486400" cy="1170432"/>
           </a:xfrm>
           <a:prstGeom prst="roundRect">
             <a:avLst>
-              <a:gd name="adj" fmla="val 5217"/>
+              <a:gd name="adj" fmla="val 4688"/>
             </a:avLst>
           </a:prstGeom>
           <a:solidFill>
@@ -31839,7 +31839,7 @@
                 <a:ea typeface="Arial" pitchFamily="34" charset="-122"/>
                 <a:cs typeface="Arial" pitchFamily="34" charset="-120"/>
               </a:rPr>
-              <a:t>install だけではコマンドにならない</a:t>
+              <a:t>install だけではコマンドになりません</a:t>
             </a:r>
             <a:endParaRPr lang="en-US" sz="1150" dirty="0"/>
           </a:p>
@@ -31854,7 +31854,7 @@
         <p:spPr>
           <a:xfrm>
             <a:off x="7141464" y="3054096"/>
-            <a:ext cx="4443984" cy="320040"/>
+            <a:ext cx="4443984" cy="438912"/>
           </a:xfrm>
           <a:prstGeom prst="rect">
             <a:avLst/>
@@ -31881,7 +31881,7 @@
                 <a:ea typeface="Calibri" pitchFamily="34" charset="-122"/>
                 <a:cs typeface="Calibri" pitchFamily="34" charset="-120"/>
               </a:rPr>
-              <a:t>command アセットは、明示登録を扱えるホスト向けの資料</a:t>
+              <a:t>command アセットは、明示登録を扱えるホスト向けの資料です</a:t>
             </a:r>
             <a:endParaRPr lang="en-US" sz="1050" dirty="0"/>
           </a:p>
@@ -31896,11 +31896,11 @@
         <p:spPr>
           <a:xfrm>
             <a:off x="502920" y="3675888"/>
-            <a:ext cx="5486400" cy="1051560"/>
+            <a:ext cx="5486400" cy="1170432"/>
           </a:xfrm>
           <a:prstGeom prst="roundRect">
             <a:avLst>
-              <a:gd name="adj" fmla="val 5217"/>
+              <a:gd name="adj" fmla="val 4688"/>
             </a:avLst>
           </a:prstGeom>
           <a:solidFill>
@@ -32018,7 +32018,7 @@
                 <a:ea typeface="Arial" pitchFamily="34" charset="-122"/>
                 <a:cs typeface="Arial" pitchFamily="34" charset="-120"/>
               </a:rPr>
-              <a:t>project pack は初回に同意が要る</a:t>
+              <a:t>project pack は初回に同意が要ります</a:t>
             </a:r>
             <a:endParaRPr lang="en-US" sz="1150" dirty="0"/>
           </a:p>
@@ -32033,7 +32033,7 @@
         <p:spPr>
           <a:xfrm>
             <a:off x="1289304" y="4242816"/>
-            <a:ext cx="4443984" cy="320040"/>
+            <a:ext cx="4443984" cy="438912"/>
           </a:xfrm>
           <a:prstGeom prst="rect">
             <a:avLst/>
@@ -32060,7 +32060,7 @@
                 <a:ea typeface="Calibri" pitchFamily="34" charset="-122"/>
                 <a:cs typeface="Calibri" pitchFamily="34" charset="-120"/>
               </a:rPr>
-              <a:t>RIG_ALLOW_PROJECT_PACKS=1。同意は内容ハッシュに紐づく</a:t>
+              <a:t>RIG_ALLOW_PROJECT_PACKS=1 で同意します。同意は内容ハッシュに紐づきます</a:t>
             </a:r>
             <a:endParaRPr lang="en-US" sz="1050" dirty="0"/>
           </a:p>
@@ -32075,11 +32075,11 @@
         <p:spPr>
           <a:xfrm>
             <a:off x="6355080" y="3675888"/>
-            <a:ext cx="5486400" cy="1051560"/>
+            <a:ext cx="5486400" cy="1170432"/>
           </a:xfrm>
           <a:prstGeom prst="roundRect">
             <a:avLst>
-              <a:gd name="adj" fmla="val 5217"/>
+              <a:gd name="adj" fmla="val 4688"/>
             </a:avLst>
           </a:prstGeom>
           <a:solidFill>
@@ -32197,7 +32197,7 @@
                 <a:ea typeface="Arial" pitchFamily="34" charset="-122"/>
                 <a:cs typeface="Arial" pitchFamily="34" charset="-120"/>
               </a:rPr>
-              <a:t>user / org は品質検証を回避できない</a:t>
+              <a:t>user / org は品質検証を回避できません</a:t>
             </a:r>
             <a:endParaRPr lang="en-US" sz="1150" dirty="0"/>
           </a:p>
@@ -32212,7 +32212,7 @@
         <p:spPr>
           <a:xfrm>
             <a:off x="7141464" y="4242816"/>
-            <a:ext cx="4443984" cy="320040"/>
+            <a:ext cx="4443984" cy="438912"/>
           </a:xfrm>
           <a:prstGeom prst="rect">
             <a:avLst/>
@@ -32239,7 +32239,7 @@
                 <a:ea typeface="Calibri" pitchFamily="34" charset="-122"/>
                 <a:cs typeface="Calibri" pitchFamily="34" charset="-120"/>
               </a:rPr>
-              <a:t>--allow-unverified は project スコープだけ</a:t>
+              <a:t>--allow-unverified が使えるのは project スコープだけです</a:t>
             </a:r>
             <a:endParaRPr lang="en-US" sz="1050" dirty="0"/>
           </a:p>
@@ -32254,11 +32254,11 @@
         <p:spPr>
           <a:xfrm>
             <a:off x="502920" y="4864608"/>
-            <a:ext cx="5486400" cy="1051560"/>
+            <a:ext cx="5486400" cy="1170432"/>
           </a:xfrm>
           <a:prstGeom prst="roundRect">
             <a:avLst>
-              <a:gd name="adj" fmla="val 5217"/>
+              <a:gd name="adj" fmla="val 4688"/>
             </a:avLst>
           </a:prstGeom>
           <a:solidFill>
@@ -32376,7 +32376,7 @@
                 <a:ea typeface="Arial" pitchFamily="34" charset="-122"/>
                 <a:cs typeface="Arial" pitchFamily="34" charset="-120"/>
               </a:rPr>
-              <a:t>mock は品質の証拠ではない</a:t>
+              <a:t>mock は品質の証拠になりません</a:t>
             </a:r>
             <a:endParaRPr lang="en-US" sz="1150" dirty="0"/>
           </a:p>
@@ -32391,7 +32391,7 @@
         <p:spPr>
           <a:xfrm>
             <a:off x="1289304" y="5431536"/>
-            <a:ext cx="4443984" cy="320040"/>
+            <a:ext cx="4443984" cy="438912"/>
           </a:xfrm>
           <a:prstGeom prst="rect">
             <a:avLst/>
@@ -32418,7 +32418,7 @@
                 <a:ea typeface="Calibri" pitchFamily="34" charset="-122"/>
                 <a:cs typeface="Calibri" pitchFamily="34" charset="-120"/>
               </a:rPr>
-              <a:t>結果は non_quality_mock と明示される</a:t>
+              <a:t>結果は non_quality_mock と明示されます</a:t>
             </a:r>
             <a:endParaRPr lang="en-US" sz="1050" dirty="0"/>
           </a:p>
@@ -32433,11 +32433,11 @@
         <p:spPr>
           <a:xfrm>
             <a:off x="6355080" y="4864608"/>
-            <a:ext cx="5486400" cy="1051560"/>
+            <a:ext cx="5486400" cy="1170432"/>
           </a:xfrm>
           <a:prstGeom prst="roundRect">
             <a:avLst>
-              <a:gd name="adj" fmla="val 5217"/>
+              <a:gd name="adj" fmla="val 4688"/>
             </a:avLst>
           </a:prstGeom>
           <a:solidFill>
@@ -32555,7 +32555,7 @@
                 <a:ea typeface="Arial" pitchFamily="34" charset="-122"/>
                 <a:cs typeface="Arial" pitchFamily="34" charset="-120"/>
               </a:rPr>
-              <a:t>private は署名の代わりにならない</a:t>
+              <a:t>private は署名の代わりになりません</a:t>
             </a:r>
             <a:endParaRPr lang="en-US" sz="1150" dirty="0"/>
           </a:p>
@@ -32570,7 +32570,7 @@
         <p:spPr>
           <a:xfrm>
             <a:off x="7141464" y="5431536"/>
-            <a:ext cx="4443984" cy="320040"/>
+            <a:ext cx="4443984" cy="438912"/>
           </a:xfrm>
           <a:prstGeom prst="rect">
             <a:avLst/>
@@ -32597,7 +32597,7 @@
                 <a:ea typeface="Calibri" pitchFamily="34" charset="-122"/>
                 <a:cs typeface="Calibri" pitchFamily="34" charset="-120"/>
               </a:rPr>
-              <a:t>private リポジトリの pack も同じ検証を全部通る</a:t>
+              <a:t>private リポジトリの pack も、同じ検証を全部通ります</a:t>
             </a:r>
             <a:endParaRPr lang="en-US" sz="1050" dirty="0"/>
           </a:p>
@@ -32813,7 +32813,7 @@
                 <a:ea typeface="Calibri" pitchFamily="34" charset="-122"/>
                 <a:cs typeface="Calibri" pitchFamily="34" charset="-120"/>
               </a:rPr>
-              <a:t>diff / accept / discard の四つで一週間。ゲートに一度落ちて、なぜ落ちたかを読むところまで来れば、rig が何を売っているかは体で分かる。</a:t>
+              <a:t>diff / accept / discard の四つで一週間やってみてください。ゲートに一度落ちて、なぜ落ちたかを読むところまで来れば、rig が何をする道具かは体で分かります。</a:t>
             </a:r>
             <a:endParaRPr lang="en-US" sz="1200" dirty="0"/>
           </a:p>
@@ -32958,7 +32958,7 @@
                 <a:ea typeface="Calibri" pitchFamily="34" charset="-122"/>
                 <a:cs typeface="Calibri" pitchFamily="34" charset="-120"/>
               </a:rPr>
-              <a:t>/rig:knowledge で自分のドメインを一枚書き、persona の inject: から参照させる。効くかどうかをここで確かめる。</a:t>
+              <a:t>/rig:knowledge で自分のドメインを一枚書き、persona の inject: から参照させます。効くかどうかは、ここで確かめられます。</a:t>
             </a:r>
             <a:endParaRPr lang="en-US" sz="1200" dirty="0"/>
           </a:p>
@@ -33103,7 +33103,7 @@
                 <a:ea typeface="Calibri" pitchFamily="34" charset="-122"/>
                 <a:cs typeface="Calibri" pitchFamily="34" charset="-120"/>
               </a:rPr>
-              <a:t>rig-wb pack init --type knowledge で配布物に格上げする。順番を逆にすると、まだ効くか分からないものに評価ケースを書く羽目になる。</a:t>
+              <a:t>rig-wb pack init --type knowledge で配布物に格上げします。順番を逆にすると、まだ効くか分からないものに評価ケースを書くことになります。</a:t>
             </a:r>
             <a:endParaRPr lang="en-US" sz="1200" dirty="0"/>
           </a:p>
@@ -33291,7 +33291,7 @@
                 <a:ea typeface="Arial" pitchFamily="34" charset="-122"/>
                 <a:cs typeface="Arial" pitchFamily="34" charset="-120"/>
               </a:rPr>
-              <a:t>よくある AI 活用の四つの型と、そこで起きること</a:t>
+              <a:t>よくある AI の使い方と、そこで起きること</a:t>
             </a:r>
             <a:endParaRPr lang="en-US" sz="2700" dirty="0"/>
           </a:p>
@@ -33548,7 +33548,7 @@
                 <a:ea typeface="Calibri" pitchFamily="34" charset="-122"/>
                 <a:cs typeface="Calibri" pitchFamily="34" charset="-120"/>
               </a:rPr>
-              <a:t>差分の出所が消える。どこを変えたかは人間の記憶にしかなく、無関係な変更が混ざっても検出する場所がない。</a:t>
+              <a:t>差分の出所が消えます。どこを変えたかは人間の記憶にしか残らず、無関係な変更が混ざっても検出する場所がありません。</a:t>
             </a:r>
             <a:endParaRPr lang="en-US" sz="1100" dirty="0"/>
           </a:p>
@@ -33727,7 +33727,7 @@
                 <a:ea typeface="Calibri" pitchFamily="34" charset="-122"/>
                 <a:cs typeface="Calibri" pitchFamily="34" charset="-120"/>
               </a:rPr>
-              <a:t>失敗した試行がそのまま手元に残る。機械的なチェックを誰も配線していなければ、そのチェックは構造的に一度も走らない。</a:t>
+              <a:t>失敗した試行がそのまま手元に残ります。機械的なチェックを誰も配線していなければ、そのチェックは一度も走りません。</a:t>
             </a:r>
             <a:endParaRPr lang="en-US" sz="1100" dirty="0"/>
           </a:p>
@@ -33906,7 +33906,7 @@
                 <a:ea typeface="Calibri" pitchFamily="34" charset="-122"/>
                 <a:cs typeface="Calibri" pitchFamily="34" charset="-120"/>
               </a:rPr>
-              <a:t>prose の依頼は守られないことがある。「テストを実行して」と書くことと、hook で毎回強制することの信頼性は段違い。</a:t>
+              <a:t>文章でのお願いは守られないことがあります。「テストを実行して」と書くのと、hook で毎回強制するのとでは信頼性が違います。</a:t>
             </a:r>
             <a:endParaRPr lang="en-US" sz="1100" dirty="0"/>
           </a:p>
@@ -34085,7 +34085,7 @@
                 <a:ea typeface="Calibri" pitchFamily="34" charset="-122"/>
                 <a:cs typeface="Calibri" pitchFamily="34" charset="-120"/>
               </a:rPr>
-              <a:t>生成者と採点者が同系統だと自己評価に甘くなる。しかもそのレビュアーの検出率を、誰も測っていない。</a:t>
+              <a:t>書いた側と採点する側が同系統だと、自己評価が甘くなります。しかもそのレビュアーの検出率を、誰も測っていません。</a:t>
             </a:r>
             <a:endParaRPr lang="en-US" sz="1100" dirty="0"/>
           </a:p>
@@ -34158,7 +34158,7 @@
                 <a:ea typeface="Arial" pitchFamily="34" charset="-122"/>
                 <a:cs typeface="Arial" pitchFamily="34" charset="-120"/>
               </a:rPr>
-              <a:t>四つに共通するのは「悪いことが起きた」ではなく、「起きたかどうかが分からない」こと</a:t>
+              <a:t>四つに共通するのは、失敗したかどうかが分からないことです</a:t>
             </a:r>
             <a:endParaRPr lang="en-US" sz="1400" dirty="0"/>
           </a:p>
@@ -34200,7 +34200,7 @@
                 <a:ea typeface="Calibri" pitchFamily="34" charset="-122"/>
                 <a:cs typeface="Calibri" pitchFamily="34" charset="-120"/>
               </a:rPr>
-              <a:t>どれも普通に成果を出す。問題は失敗率ではなく、失敗したときに誰も気づかないまま次へ進む構造のほうにある。</a:t>
+              <a:t>どれも普通に成果は出ます。困るのは失敗する確率ではなく、失敗しても誰も気づかないまま次へ進んでしまうことです。</a:t>
             </a:r>
             <a:endParaRPr lang="en-US" sz="1150" dirty="0"/>
           </a:p>
@@ -34310,7 +34310,7 @@
                 <a:ea typeface="Arial" pitchFamily="34" charset="-122"/>
                 <a:cs typeface="Arial" pitchFamily="34" charset="-120"/>
               </a:rPr>
-              <a:t>症状の根っこ — 開きやすい穴は四つ（重い順）</a:t>
+              <a:t>原因をたどると、いつも同じ四つの穴に行き着きます</a:t>
             </a:r>
             <a:endParaRPr lang="en-US" sz="2700" dirty="0"/>
           </a:p>
@@ -34567,7 +34567,7 @@
                 <a:ea typeface="Calibri" pitchFamily="34" charset="-122"/>
                 <a:cs typeface="Calibri" pitchFamily="34" charset="-120"/>
               </a:rPr>
-              <a:t>テストや lint が「存在する」だけで、エージェントの実行ループにバックプレッシャーとして入っていない。存在することと、効いていることは別。</a:t>
+              <a:t>テストや lint が「ある」だけで、エージェントの実行ループにバックプレッシャーとして入っていません。あることと、効いていることは別です。</a:t>
             </a:r>
             <a:endParaRPr lang="en-US" sz="1100" dirty="0"/>
           </a:p>
@@ -34785,7 +34785,7 @@
                 <a:ea typeface="Calibri" pitchFamily="34" charset="-122"/>
                 <a:cs typeface="Calibri" pitchFamily="34" charset="-120"/>
               </a:rPr>
-              <a:t>モデルに自分の仕事を検証する手段を与えると品質が 2〜3 倍になる（Boris Cherny）。逆に言えば、手段が無いエージェントは自己評価に甘くなる。</a:t>
+              <a:t>モデルに自分の仕事を検証する手段を与えると、品質が 2〜3 倍になると言われています（Boris Cherny）。裏を返せば、手段が無いエージェントは自己評価が甘くなります。</a:t>
             </a:r>
             <a:endParaRPr lang="en-US" sz="1100" dirty="0"/>
           </a:p>
@@ -35003,7 +35003,7 @@
                 <a:ea typeface="Calibri" pitchFamily="34" charset="-122"/>
                 <a:cs typeface="Calibri" pitchFamily="34" charset="-120"/>
               </a:rPr>
-              <a:t>ルールを足したが、効果を測っていない。善意のルール追加が逆効果になることがある（Context Rot ＝ 文脈が長いほど性能が落ちる）。</a:t>
+              <a:t>ルールは足したのに、効果を測っていません。よかれと思った追加が逆効果になることもあります（Context Rot。文脈が長いほど性能が落ちる現象です）。</a:t>
             </a:r>
             <a:endParaRPr lang="en-US" sz="1100" dirty="0"/>
           </a:p>
@@ -35221,7 +35221,7 @@
                 <a:ea typeface="Calibri" pitchFamily="34" charset="-122"/>
                 <a:cs typeface="Calibri" pitchFamily="34" charset="-120"/>
               </a:rPr>
-              <a:t>Thin Harness, Fat Skills（Garry Tan）。ループ管理は薄く、知能は Skills に、実行は決定論的ツールに委ねる。親ループが肥大したら設計が間違っている。</a:t>
+              <a:t>Thin Harness, Fat Skills（Garry Tan）という言い方があります。ループ管理は薄く、知能は Skills に、実行は決定論的ツールに委ねます。親ループが太ったら設計を疑ってください。</a:t>
             </a:r>
             <a:endParaRPr lang="en-US" sz="1100" dirty="0"/>
           </a:p>
@@ -35299,7 +35299,7 @@
                 <a:ea typeface="Calibri" pitchFamily="34" charset="-122"/>
                 <a:cs typeface="Calibri" pitchFamily="34" charset="-120"/>
               </a:rPr>
-              <a:t>典拠：skills/engine/facets/knowledge/harness-taxonomy.md（rig 自身が /rig:harness で使う観点カタログ）</a:t>
+              <a:t>典拠は skills/engine/facets/knowledge/harness-taxonomy.md です。rig 自身が /rig:harness で使っている観点カタログです。</a:t>
             </a:r>
             <a:endParaRPr lang="en-US" sz="1000" dirty="0"/>
           </a:p>
@@ -35526,7 +35526,7 @@
                 <a:ea typeface="Calibri" pitchFamily="34" charset="-122"/>
                 <a:cs typeface="Calibri" pitchFamily="34" charset="-120"/>
               </a:rPr>
-              <a:t>「〇〇エンジニアリング」は別々の流派ではなく、包含関係にある。外側を設計しないまま内側だけ磨いても、効果は再現しない。</a:t>
+              <a:t>「〇〇エンジニアリング」は別々の流派ではなく、入れ子になっています。外側を設計しないまま内側だけ磨いても、効果は安定しません。</a:t>
             </a:r>
             <a:endParaRPr lang="en-US" sz="1250" dirty="0"/>
           </a:p>
@@ -35851,7 +35851,7 @@
                 <a:ea typeface="Calibri" pitchFamily="34" charset="-122"/>
                 <a:cs typeface="Calibri" pitchFamily="34" charset="-120"/>
               </a:rPr>
-              <a:t>一回の指示の書き方。ここだけを磨くのが最も一般的で、</a:t>
+              <a:t>一回の指示の書き方です。ここだけを磨く人が一番多いのですが、</a:t>
             </a:r>
             <a:endParaRPr lang="en-US" sz="1050" dirty="0"/>
           </a:p>
@@ -35871,7 +35871,7 @@
                 <a:ea typeface="Calibri" pitchFamily="34" charset="-122"/>
                 <a:cs typeface="Calibri" pitchFamily="34" charset="-120"/>
               </a:rPr>
-              <a:t>ここだけでは面が変わると再現しない。</a:t>
+              <a:t>条件が変わると同じようには効きません。</a:t>
             </a:r>
             <a:endParaRPr lang="en-US" sz="1050" dirty="0"/>
           </a:p>
@@ -35900,7 +35900,7 @@
                 <a:ea typeface="Calibri" pitchFamily="34" charset="-122"/>
                 <a:cs typeface="Calibri" pitchFamily="34" charset="-120"/>
               </a:rPr>
-              <a:t>rig ではプロンプト面（persona・instruction・recipe・wiki）は</a:t>
+              <a:t>rig はプロンプト面（persona・instruction・recipe・wiki）を</a:t>
             </a:r>
             <a:endParaRPr lang="en-US" sz="1050" dirty="0"/>
           </a:p>
@@ -35920,7 +35920,7 @@
                 <a:ea typeface="Calibri" pitchFamily="34" charset="-122"/>
                 <a:cs typeface="Calibri" pitchFamily="34" charset="-120"/>
               </a:rPr>
-              <a:t>コンパイラが一切検査しない部分として扱い、</a:t>
+              <a:t>「コンパイラが検査してくれない部分」として扱い、</a:t>
             </a:r>
             <a:endParaRPr lang="en-US" sz="1050" dirty="0"/>
           </a:p>
@@ -35940,7 +35940,7 @@
                 <a:ea typeface="Calibri" pitchFamily="34" charset="-122"/>
                 <a:cs typeface="Calibri" pitchFamily="34" charset="-120"/>
               </a:rPr>
-              <a:t>変更には承認済みの評価ケースを要求する。</a:t>
+              <a:t>変更するときは承認済みの評価ケースを求めます。</a:t>
             </a:r>
             <a:endParaRPr lang="en-US" sz="1050" dirty="0"/>
           </a:p>
@@ -36013,7 +36013,7 @@
                 <a:ea typeface="Arial" pitchFamily="34" charset="-122"/>
                 <a:cs typeface="Arial" pitchFamily="34" charset="-120"/>
               </a:rPr>
-              <a:t>ハーネスには二層ある</a:t>
+              <a:t>ハーネスは二層に分かれます</a:t>
             </a:r>
             <a:endParaRPr lang="en-US" sz="1400" dirty="0"/>
           </a:p>
@@ -36055,7 +36055,7 @@
                 <a:ea typeface="Calibri" pitchFamily="34" charset="-122"/>
                 <a:cs typeface="Calibri" pitchFamily="34" charset="-120"/>
               </a:rPr>
-              <a:t>エージェントハーネス（プロダクト内蔵＝Claude Code / Codex 側のループ・ツール・メモリ）と、ユーザーハーネス（使う側が組む＝CLAUDE.md・Skills・Hooks・MCP・テスト・lint・CI・recipe）。</a:t>
+              <a:t>一つはエージェントハーネスで、Claude Code や Codex に内蔵されたループ・ツール・メモリです。もう一つはユーザーハーネスで、使う側が組む CLAUDE.md・Skills・Hooks・MCP・テスト・lint・CI・recipe です。</a:t>
             </a:r>
             <a:endParaRPr lang="en-US" sz="1150" dirty="0"/>
           </a:p>
@@ -36070,11 +36070,11 @@
         <p:spPr>
           <a:xfrm>
             <a:off x="6903720" y="3794760"/>
-            <a:ext cx="4754880" cy="1188720"/>
+            <a:ext cx="4754880" cy="1143000"/>
           </a:xfrm>
           <a:prstGeom prst="roundRect">
             <a:avLst>
-              <a:gd name="adj" fmla="val 4615"/>
+              <a:gd name="adj" fmla="val 4800"/>
             </a:avLst>
           </a:prstGeom>
           <a:solidFill>
@@ -36128,7 +36128,7 @@
                 <a:ea typeface="Arial" pitchFamily="34" charset="-122"/>
                 <a:cs typeface="Arial" pitchFamily="34" charset="-120"/>
               </a:rPr>
-              <a:t>rig が作るのは、後者だけ</a:t>
+              <a:t>rig が作るのは後者だけです</a:t>
             </a:r>
             <a:endParaRPr lang="en-US" sz="1400" dirty="0"/>
           </a:p>
@@ -36143,7 +36143,7 @@
         <p:spPr>
           <a:xfrm>
             <a:off x="7159752" y="4361688"/>
-            <a:ext cx="4242816" cy="457200"/>
+            <a:ext cx="4242816" cy="411480"/>
           </a:xfrm>
           <a:prstGeom prst="rect">
             <a:avLst/>
@@ -36170,7 +36170,7 @@
                 <a:ea typeface="Calibri" pitchFamily="34" charset="-122"/>
                 <a:cs typeface="Calibri" pitchFamily="34" charset="-120"/>
               </a:rPr>
-              <a:t>内蔵ループには手を入れない。その外側に、薄い品質・安全レイヤーとして乗る。</a:t>
+              <a:t>内蔵ループには手を入れません。その外側に、薄い品質・安全レイヤーとして乗ります。</a:t>
             </a:r>
             <a:endParaRPr lang="en-US" sz="1150" dirty="0"/>
           </a:p>
@@ -36184,12 +36184,12 @@
         </p:nvSpPr>
         <p:spPr>
           <a:xfrm>
-            <a:off x="6903720" y="5120640"/>
-            <a:ext cx="4754880" cy="731520"/>
+            <a:off x="6903720" y="5074920"/>
+            <a:ext cx="4754880" cy="960120"/>
           </a:xfrm>
           <a:prstGeom prst="roundRect">
             <a:avLst>
-              <a:gd name="adj" fmla="val 7500"/>
+              <a:gd name="adj" fmla="val 5714"/>
             </a:avLst>
           </a:prstGeom>
           <a:solidFill>
@@ -36218,7 +36218,7 @@
         </p:nvSpPr>
         <p:spPr>
           <a:xfrm>
-            <a:off x="7159752" y="5303520"/>
+            <a:off x="7159752" y="5257800"/>
             <a:ext cx="4242816" cy="320040"/>
           </a:xfrm>
           <a:prstGeom prst="rect">
@@ -36243,7 +36243,7 @@
                 <a:ea typeface="Arial" pitchFamily="34" charset="-122"/>
                 <a:cs typeface="Arial" pitchFamily="34" charset="-120"/>
               </a:rPr>
-              <a:t>だから engine は不変</a:t>
+              <a:t>だから engine は変えません</a:t>
             </a:r>
             <a:endParaRPr lang="en-US" sz="1400" dirty="0"/>
           </a:p>
@@ -36257,8 +36257,8 @@
         </p:nvSpPr>
         <p:spPr>
           <a:xfrm>
-            <a:off x="7159752" y="5687568"/>
-            <a:ext cx="4242816" cy="0"/>
+            <a:off x="7159752" y="5641848"/>
+            <a:ext cx="4242816" cy="228600"/>
           </a:xfrm>
           <a:prstGeom prst="rect">
             <a:avLst/>
@@ -36285,7 +36285,7 @@
                 <a:ea typeface="Calibri" pitchFamily="34" charset="-122"/>
                 <a:cs typeface="Calibri" pitchFamily="34" charset="-120"/>
               </a:rPr>
-              <a:t>拡張は pack として上に乗せる。エンジンを書き換えて対応しない。</a:t>
+              <a:t>拡張は pack として上に乗せます。</a:t>
             </a:r>
             <a:endParaRPr lang="en-US" sz="1150" dirty="0"/>
           </a:p>
@@ -36395,7 +36395,7 @@
                 <a:ea typeface="Arial" pitchFamily="34" charset="-122"/>
                 <a:cs typeface="Arial" pitchFamily="34" charset="-120"/>
               </a:rPr>
-              <a:t>ハーネスの 2×2 — 何が足りないかは、ここで見える</a:t>
+              <a:t>ハーネスを 2×2 で棚卸しすると、足りない場所が見えます</a:t>
             </a:r>
             <a:endParaRPr lang="en-US" sz="2700" dirty="0"/>
           </a:p>
@@ -36512,7 +36512,7 @@
                 <a:ea typeface="Calibri" pitchFamily="34" charset="-122"/>
                 <a:cs typeface="Calibri" pitchFamily="34" charset="-120"/>
               </a:rPr>
-              <a:t>二軸で分ける。① 計算的（決定論的・コードで判定）か、推論的（LLM の判断）か。② ガイド（先回りで方向づける）か、センサー（事後に検知する）か。</a:t>
+              <a:t>軸は二つです。①コードで判定する計算的なものか、LLM が判断する推論的なものか。②先回りして方向づけるガイドか、あとから検知するセンサーか。</a:t>
             </a:r>
             <a:endParaRPr lang="en-US" sz="1200" dirty="0"/>
           </a:p>
@@ -37349,7 +37349,7 @@
                 <a:ea typeface="Arial" pitchFamily="34" charset="-122"/>
                 <a:cs typeface="Arial" pitchFamily="34" charset="-120"/>
               </a:rPr>
-              <a:t>四象限が揃って強い</a:t>
+              <a:t>四象限が揃ってはじめて強くなります</a:t>
             </a:r>
             <a:endParaRPr lang="en-US" sz="1400" dirty="0"/>
           </a:p>
@@ -37391,7 +37391,7 @@
                 <a:ea typeface="Calibri" pitchFamily="34" charset="-122"/>
                 <a:cs typeface="Calibri" pitchFamily="34" charset="-120"/>
               </a:rPr>
-              <a:t>推論だけ（レビューはするがテストが無い）も、計算だけ（テストは通るが設計の妥当性を誰も見ない）も穴になる。</a:t>
+              <a:t>レビューはするがテストが無い状態も、テストは通るが設計の妥当性を誰も見ていない状態も、どちらも穴です。</a:t>
             </a:r>
             <a:endParaRPr lang="en-US" sz="1100" dirty="0"/>
           </a:p>
@@ -37464,7 +37464,7 @@
                 <a:ea typeface="Arial" pitchFamily="34" charset="-122"/>
                 <a:cs typeface="Arial" pitchFamily="34" charset="-120"/>
               </a:rPr>
-              <a:t>計算的センサーが一次</a:t>
+              <a:t>まず計算的センサーから</a:t>
             </a:r>
             <a:endParaRPr lang="en-US" sz="1400" dirty="0"/>
           </a:p>
@@ -37506,7 +37506,7 @@
                 <a:ea typeface="Calibri" pitchFamily="34" charset="-122"/>
                 <a:cs typeface="Calibri" pitchFamily="34" charset="-120"/>
               </a:rPr>
-              <a:t>計算的センサーは sweet-talk できない。だから最強のバックプレッシャーになる。推論的センサーはその二次。</a:t>
+              <a:t>計算的センサーは口説き落とせません。だから一番強いバックプレッシャーになります。推論的センサーはその次に置きます。</a:t>
             </a:r>
             <a:endParaRPr lang="en-US" sz="1100" dirty="0"/>
           </a:p>
@@ -37621,7 +37621,7 @@
                 <a:ea typeface="Calibri" pitchFamily="34" charset="-122"/>
                 <a:cs typeface="Calibri" pitchFamily="34" charset="-120"/>
               </a:rPr>
-              <a:t>どの hook にも acceptance gate にも繋がっていない lint は、ループに何の back pressure もかけない。</a:t>
+              <a:t>どの hook にも acceptance gate にも繋がっていない lint は、ループに何の圧力もかけていません。</a:t>
             </a:r>
             <a:endParaRPr lang="en-US" sz="1100" dirty="0"/>
           </a:p>
@@ -37694,7 +37694,7 @@
                 <a:ea typeface="Arial" pitchFamily="34" charset="-122"/>
                 <a:cs typeface="Arial" pitchFamily="34" charset="-120"/>
               </a:rPr>
-              <a:t>この 2×2 は、自分のプロジェクトにも当てられる</a:t>
+              <a:t>この 2×2 は自分のプロジェクトにも当てられます</a:t>
             </a:r>
             <a:endParaRPr lang="en-US" sz="1400" dirty="0"/>
           </a:p>
@@ -37736,7 +37736,7 @@
                 <a:ea typeface="Calibri" pitchFamily="34" charset="-122"/>
                 <a:cs typeface="Calibri" pitchFamily="34" charset="-120"/>
               </a:rPr>
-              <a:t>/rig:harness が read-only で棚卸しし、空いている象限と「あるのに効いていない資産」を名指しする。答えは「新しいルールを足す」ではなく、接続する・強制する・減らす。</a:t>
+              <a:t>/rig:harness が読み取り専用で棚卸しし、空いている象限と、あるのに効いていない資産を名指しします。処方は新しいルールを足すことではなく、接続する・強制する・減らすの三つです。</a:t>
             </a:r>
             <a:endParaRPr lang="en-US" sz="1150" dirty="0"/>
           </a:p>
@@ -37846,7 +37846,7 @@
                 <a:ea typeface="Arial" pitchFamily="34" charset="-122"/>
                 <a:cs typeface="Arial" pitchFamily="34" charset="-120"/>
               </a:rPr>
-              <a:t>それらへの一般的な対応と、その限界</a:t>
+              <a:t>よく採られる対応と、それがどこで止まるか</a:t>
             </a:r>
             <a:endParaRPr lang="en-US" sz="2700" dirty="0"/>
           </a:p>
@@ -38180,7 +38180,7 @@
                           <a:ea typeface="Calibri" pitchFamily="34" charset="-122"/>
                           <a:cs typeface="Calibri" pitchFamily="34" charset="-120"/>
                         </a:rPr>
-                        <a:t>面が変わると再現しない。効果を測っていないので、良くなったかどうかも分からない</a:t>
+                        <a:t>条件が変わると再現しません。効果を測っていないので、良くなったかどうかも分かりません</a:t>
                       </a:r>
                       <a:endParaRPr lang="en-US" sz="1050" dirty="0">
                         <a:latin typeface="Calibri" charset="0"/>
@@ -38318,7 +38318,7 @@
                           <a:ea typeface="Calibri" pitchFamily="34" charset="-122"/>
                           <a:cs typeface="Calibri" pitchFamily="34" charset="-120"/>
                         </a:rPr>
-                        <a:t>prose の依頼は守られないことがある。しかも足しすぎると文脈が濁って逆効果になる</a:t>
+                        <a:t>文章でのお願いは、守られないことがあります。足しすぎると文脈が濁って逆効果にもなります</a:t>
                       </a:r>
                       <a:endParaRPr lang="en-US" sz="1050" dirty="0">
                         <a:latin typeface="Calibri" charset="0"/>
@@ -38456,7 +38456,7 @@
                           <a:ea typeface="Calibri" pitchFamily="34" charset="-122"/>
                           <a:cs typeface="Calibri" pitchFamily="34" charset="-120"/>
                         </a:rPr>
-                        <a:t>用意しただけでは、エージェントのループの外にある。人間の CI 待ちまで誰も見ない</a:t>
+                        <a:t>用意しただけでは、エージェントのループの外にあります。人間が CI を待つまで誰も見ません</a:t>
                       </a:r>
                       <a:endParaRPr lang="en-US" sz="1050" dirty="0">
                         <a:latin typeface="Calibri" charset="0"/>
@@ -38594,7 +38594,7 @@
                           <a:ea typeface="Calibri" pitchFamily="34" charset="-122"/>
                           <a:cs typeface="Calibri" pitchFamily="34" charset="-120"/>
                         </a:rPr>
-                        <a:t>生成者と同系統だと甘くなる。検出率が不明なので、通ったことに意味があるか分からない</a:t>
+                        <a:t>書いた側と同系統のモデルだと甘くなります。検出率が分からないので、通っても意味があるか判断できません</a:t>
                       </a:r>
                       <a:endParaRPr lang="en-US" sz="1050" dirty="0">
                         <a:latin typeface="Calibri" charset="0"/>
@@ -38732,7 +38732,7 @@
                           <a:ea typeface="Calibri" pitchFamily="34" charset="-122"/>
                           <a:cs typeface="Calibri" pitchFamily="34" charset="-120"/>
                         </a:rPr>
-                        <a:t>スケールしない。ゴム印化しても、ゴム印になったこと自体を検知できない</a:t>
+                        <a:t>人手が足りません。形だけのレビューになっても、そうなったこと自体に気づけません</a:t>
                       </a:r>
                       <a:endParaRPr lang="en-US" sz="1050" dirty="0">
                         <a:latin typeface="Calibri" charset="0"/>
@@ -38821,7 +38821,7 @@
                 <a:ea typeface="Arial" pitchFamily="34" charset="-122"/>
                 <a:cs typeface="Arial" pitchFamily="34" charset="-120"/>
               </a:rPr>
-              <a:t>効く順序は、足すことではない</a:t>
+              <a:t>効く順序があります</a:t>
             </a:r>
             <a:endParaRPr lang="en-US" sz="1200" dirty="0"/>
           </a:p>
@@ -39000,7 +39000,7 @@
                 <a:ea typeface="Calibri" pitchFamily="34" charset="-122"/>
                 <a:cs typeface="Calibri" pitchFamily="34" charset="-120"/>
               </a:rPr>
-              <a:t>既にある lint・型・テストを、hook と acceptance gate に繋いでループの中へ入れる</a:t>
+              <a:t>すでにある lint・型・テストを hook と acceptance gate に繋いで、ループの中へ入れます</a:t>
             </a:r>
             <a:endParaRPr lang="en-US" sz="1050" dirty="0"/>
           </a:p>
@@ -39179,7 +39179,7 @@
                 <a:ea typeface="Calibri" pitchFamily="34" charset="-122"/>
                 <a:cs typeface="Calibri" pitchFamily="34" charset="-120"/>
               </a:rPr>
-              <a:t>重要なルールを prose から決定論的な強制へ移す</a:t>
+              <a:t>大事なルールを、文章でのお願いから決定論的な強制へ移します</a:t>
             </a:r>
             <a:endParaRPr lang="en-US" sz="1050" dirty="0"/>
           </a:p>
@@ -39358,7 +39358,7 @@
                 <a:ea typeface="Calibri" pitchFamily="34" charset="-122"/>
                 <a:cs typeface="Calibri" pitchFamily="34" charset="-120"/>
               </a:rPr>
-              <a:t>効いていないルールを落とす。足したら減らす候補も持つ</a:t>
+              <a:t>効いていないルールを落とします。足したときは、減らす候補も一緒に考えます</a:t>
             </a:r>
             <a:endParaRPr lang="en-US" sz="1050" dirty="0"/>
           </a:p>
@@ -39431,7 +39431,7 @@
                 <a:ea typeface="Arial" pitchFamily="34" charset="-122"/>
                 <a:cs typeface="Arial" pitchFamily="34" charset="-120"/>
               </a:rPr>
-              <a:t>新しいルールを書くのは、最後</a:t>
+              <a:t>新しいルールを書くのは最後です</a:t>
             </a:r>
             <a:endParaRPr lang="en-US" sz="1400" dirty="0"/>
           </a:p>
@@ -39473,7 +39473,7 @@
                 <a:ea typeface="Calibri" pitchFamily="34" charset="-122"/>
                 <a:cs typeface="Calibri" pitchFamily="34" charset="-120"/>
               </a:rPr>
-              <a:t>善意のルール追加が事態を悪くすることがある。まず接続し、次に強制し、そのうえで減らす。</a:t>
+              <a:t>よかれと思って足したルールが、かえって邪魔をすることがあります。まず接続し、次に強制し、そのうえで減らしてください。</a:t>
             </a:r>
             <a:endParaRPr lang="en-US" sz="1150" dirty="0"/>
           </a:p>
@@ -39546,7 +39546,7 @@
                 <a:ea typeface="Arial" pitchFamily="34" charset="-122"/>
                 <a:cs typeface="Arial" pitchFamily="34" charset="-120"/>
               </a:rPr>
-              <a:t>測っていないゲートは願望</a:t>
+              <a:t>効果を測らないと回せません</a:t>
             </a:r>
             <a:endParaRPr lang="en-US" sz="1400" dirty="0"/>
           </a:p>
@@ -39588,7 +39588,7 @@
                 <a:ea typeface="Calibri" pitchFamily="34" charset="-122"/>
                 <a:cs typeface="Calibri" pitchFamily="34" charset="-120"/>
               </a:rPr>
-              <a:t>効果の計測が無いと、この順序自体を回せない。</a:t>
+              <a:t>何が効いたか分からないままだと、この三つの順序自体が回りません。</a:t>
             </a:r>
             <a:endParaRPr lang="en-US" sz="1050" dirty="0"/>
           </a:p>
@@ -39698,7 +39698,7 @@
                 <a:ea typeface="Arial" pitchFamily="34" charset="-122"/>
                 <a:cs typeface="Arial" pitchFamily="34" charset="-120"/>
               </a:rPr>
-              <a:t>rig の活用 — 四象限を、どう埋めるか</a:t>
+              <a:t>rig は四つの象限をこう埋めます</a:t>
             </a:r>
             <a:endParaRPr lang="en-US" sz="2700" dirty="0"/>
           </a:p>
@@ -39891,7 +39891,7 @@
                 <a:ea typeface="Calibri" pitchFamily="34" charset="-122"/>
                 <a:cs typeface="Calibri" pitchFamily="34" charset="-120"/>
               </a:rPr>
-              <a:t>hook・manifest（.claude/rig.md）・recipe・scaffold。作業を始める前に、走らせ方と既定値を先回りで決める。</a:t>
+              <a:t>hook・manifest（.claude/rig.md）・recipe・scaffold です。作業を始める前に、走らせ方と既定値を決めておきます。</a:t>
             </a:r>
             <a:endParaRPr lang="en-US" sz="1050" dirty="0"/>
           </a:p>
@@ -40006,7 +40006,7 @@
                 <a:ea typeface="Calibri" pitchFamily="34" charset="-122"/>
                 <a:cs typeface="Calibri" pitchFamily="34" charset="-120"/>
               </a:rPr>
-              <a:t>acceptance-gate の機械検証（build / lint / test / 型）＋ 決定論センサー（秘密情報・インジェクション・破壊的コマンド・ゲート改竄・schema-diff）。</a:t>
+              <a:t>acceptance-gate の機械検証（build / lint / test / 型）と、決定論センサー（秘密情報・インジェクション・破壊的コマンド・ゲート改竄・schema-diff）です。</a:t>
             </a:r>
             <a:endParaRPr lang="en-US" sz="1050" dirty="0"/>
           </a:p>
@@ -40121,7 +40121,7 @@
                 <a:ea typeface="Calibri" pitchFamily="34" charset="-122"/>
                 <a:cs typeface="Calibri" pitchFamily="34" charset="-120"/>
               </a:rPr>
-              <a:t>persona・instruction・知識層の wiki。ドメインの前提を、判断する側に持たせる。</a:t>
+              <a:t>persona・instruction・知識層の wiki です。ドメインの前提を、判断する側に持たせます。</a:t>
             </a:r>
             <a:endParaRPr lang="en-US" sz="1050" dirty="0"/>
           </a:p>
@@ -40236,7 +40236,7 @@
                 <a:ea typeface="Calibri" pitchFamily="34" charset="-122"/>
                 <a:cs typeface="Calibri" pitchFamily="34" charset="-120"/>
               </a:rPr>
-              <a:t>reviewer persona の並列レビュー。read-only をプロセスレベルで強制し、drill で検出率を実測する。</a:t>
+              <a:t>reviewer persona による並列レビューです。読み取り専用をプロセスレベルで強制し、drill で検出率を実測します。</a:t>
             </a:r>
             <a:endParaRPr lang="en-US" sz="1050" dirty="0"/>
           </a:p>
@@ -40309,7 +40309,7 @@
                 <a:ea typeface="Arial" pitchFamily="34" charset="-122"/>
                 <a:cs typeface="Arial" pitchFamily="34" charset="-120"/>
               </a:rPr>
-              <a:t>そして 2×2 の外に、rig 固有のものが二つ</a:t>
+              <a:t>2×2 の外にも、rig 固有のものが二つあります</a:t>
             </a:r>
             <a:endParaRPr lang="en-US" sz="1400" dirty="0"/>
           </a:p>
@@ -40351,7 +40351,7 @@
                 <a:ea typeface="Calibri" pitchFamily="34" charset="-122"/>
                 <a:cs typeface="Calibri" pitchFamily="34" charset="-120"/>
               </a:rPr>
-              <a:t>① 隔離 — 判定が終わるまで、成果物は作業ツリーに触れない。② 記録 — 何を試み、どの基準で、なぜ受け入れた（拒否した）かが run log と監査証跡に残る。</a:t>
+              <a:t>一つは隔離です。判定が終わるまで、成果物は作業ツリーに触れません。もう一つは記録です。何を試して、どの基準で、なぜ受け入れた（あるいは拒否した）かが run log と監査証跡に残ります。</a:t>
             </a:r>
             <a:endParaRPr lang="en-US" sz="1150" dirty="0"/>
           </a:p>
@@ -40555,7 +40555,7 @@
                 <a:ea typeface="Calibri" pitchFamily="34" charset="-122"/>
                 <a:cs typeface="Calibri" pitchFamily="34" charset="-120"/>
               </a:rPr>
-              <a:t>rig が複数モデルを使うのは、検証役を生成役から構造的に独立させるためであって、答えを合成するためではない。</a:t>
+              <a:t>rig が複数モデルを使うのは、検証役を生成役から独立させるためです。答えを合成するためではありません。</a:t>
             </a:r>
             <a:endParaRPr lang="en-US" sz="1100" dirty="0"/>
           </a:p>
@@ -40628,7 +40628,7 @@
                 <a:ea typeface="Arial" pitchFamily="34" charset="-122"/>
                 <a:cs typeface="Arial" pitchFamily="34" charset="-120"/>
               </a:rPr>
-              <a:t>逆に、明確に目標なこと</a:t>
+              <a:t>はっきり目標にしていること</a:t>
             </a:r>
             <a:endParaRPr lang="en-US" sz="1400" dirty="0"/>
           </a:p>
@@ -40670,7 +40670,7 @@
                 <a:ea typeface="Calibri" pitchFamily="34" charset="-122"/>
                 <a:cs typeface="Calibri" pitchFamily="34" charset="-120"/>
               </a:rPr>
-              <a:t>他のオーケストレータが作った成果物にも、同じ受け入れ契約を当てること（workbench.py import）。</a:t>
+              <a:t>他のオーケストレータが作った成果物にも、同じ受け入れ契約を当てます（workbench.py import）。</a:t>
             </a:r>
             <a:endParaRPr lang="en-US" sz="1100" dirty="0"/>
           </a:p>

--- a/docs/onboarding/rig-intro.ja.pptx
+++ b/docs/onboarding/rig-intro.ja.pptx
@@ -532,7 +532,7 @@
           <a:p>
             <a:r>
               <a:rPr lang="en-US" dirty="0"/>
-              <a:t>rig をまったく知らない人向けの資料です。前半で安全フローの仕組み、後半で pack による知識層の拡張を扱います。</a:t>
+              <a:t>rig をまったく知らない人向けの資料です。前半で安全フローの仕組み、後半で pack による知識層の広げ方を扱います。</a:t>
             </a:r>
             <a:endParaRPr lang="en-US" dirty="0"/>
           </a:p>
@@ -3620,7 +3620,7 @@
                 <a:ea typeface="Calibri" pitchFamily="34" charset="-122"/>
                 <a:cs typeface="Calibri" pitchFamily="34" charset="-120"/>
               </a:rPr>
-              <a:t>AI に仕事を任せるときの、隔離と検証のしくみ。</a:t>
+              <a:t>AI に仕事をおまかせするときの、隔離と検証のしくみ。</a:t>
             </a:r>
             <a:endParaRPr lang="en-US" sz="1700" dirty="0"/>
           </a:p>
@@ -3640,7 +3640,7 @@
                 <a:ea typeface="Calibri" pitchFamily="34" charset="-122"/>
                 <a:cs typeface="Calibri" pitchFamily="34" charset="-120"/>
               </a:rPr>
-              <a:t>はじめて触る人から、自分のドメインを教え込む人まで。</a:t>
+              <a:t>はじめて触る人から、自分の領域を教え込みたい人まで。</a:t>
             </a:r>
             <a:endParaRPr lang="en-US" sz="1700" dirty="0"/>
           </a:p>
@@ -3831,7 +3831,7 @@
                 <a:ea typeface="Calibri" pitchFamily="34" charset="-122"/>
                 <a:cs typeface="Calibri" pitchFamily="34" charset="-120"/>
               </a:rPr>
-              <a:t>ここからは、その仕組みが実際にどう動くかを見ていきます。</a:t>
+              <a:t>ここからは、その仕組みが実際にどう動くのかを見ていきます。</a:t>
             </a:r>
             <a:endParaRPr lang="en-US" sz="1700" dirty="0"/>
           </a:p>
@@ -3851,7 +3851,7 @@
                 <a:ea typeface="Calibri" pitchFamily="34" charset="-122"/>
                 <a:cs typeface="Calibri" pitchFamily="34" charset="-120"/>
               </a:rPr>
-              <a:t>分類、隔離、ゲート、受け入れの順です。</a:t>
+              <a:t>分類、隔離、ゲート、受け入れの順番です。</a:t>
             </a:r>
             <a:endParaRPr lang="en-US" sz="1700" dirty="0"/>
           </a:p>
@@ -4117,7 +4117,7 @@
                 <a:ea typeface="Arial" pitchFamily="34" charset="-122"/>
                 <a:cs typeface="Arial" pitchFamily="34" charset="-120"/>
               </a:rPr>
-              <a:t>困るのは AI が間違えることではありません。間違えたことに誰も気づかないまま、本体に混ざってしまうことです。</a:t>
+              <a:t>困るのは、AI が間違えることではないんです。間違えたことに誰も気づかないまま、本体に混ざってしまうこと。そこが怖いところです。</a:t>
             </a:r>
             <a:endParaRPr lang="en-US" sz="1500" dirty="0"/>
           </a:p>
@@ -4453,7 +4453,7 @@
                 <a:ea typeface="Arial" pitchFamily="34" charset="-122"/>
                 <a:cs typeface="Arial" pitchFamily="34" charset="-120"/>
               </a:rPr>
-              <a:t>recipe 選択</a:t>
+              <a:t>recipe えらび</a:t>
             </a:r>
             <a:endParaRPr lang="en-US" sz="1250" dirty="0"/>
           </a:p>
@@ -4515,7 +4515,7 @@
                 <a:ea typeface="Calibri" pitchFamily="34" charset="-122"/>
                 <a:cs typeface="Calibri" pitchFamily="34" charset="-120"/>
               </a:rPr>
-              <a:t>先に一行で出す</a:t>
+              <a:t>先に一行で見せる</a:t>
             </a:r>
             <a:endParaRPr lang="en-US" sz="1000" dirty="0"/>
           </a:p>
@@ -5112,7 +5112,7 @@
                 <a:ea typeface="Calibri" pitchFamily="34" charset="-122"/>
                 <a:cs typeface="Calibri" pitchFamily="34" charset="-120"/>
               </a:rPr>
-              <a:t>判断は常に人間</a:t>
+              <a:t>決めるのはいつも人</a:t>
             </a:r>
             <a:endParaRPr lang="en-US" sz="1000" dirty="0"/>
           </a:p>
@@ -5266,7 +5266,7 @@
                 <a:ea typeface="Calibri" pitchFamily="34" charset="-122"/>
                 <a:cs typeface="Calibri" pitchFamily="34" charset="-120"/>
               </a:rPr>
-              <a:t>あなたが決めた品質基準を、AI に無視させないための道具です。基準を作るのは人間の仕事のままで、rig の仕事は強制と測定です。</a:t>
+              <a:t>あなたが決めた品質のルールを、AI に飛ばさせないための道具です。ルールを決めるのは人の仕事のまま。rig がやるのは、守らせることと測ることだけです。</a:t>
             </a:r>
             <a:endParaRPr lang="en-US" sz="1200" dirty="0"/>
           </a:p>
@@ -5339,7 +5339,7 @@
                 <a:ea typeface="Arial" pitchFamily="34" charset="-122"/>
                 <a:cs typeface="Arial" pitchFamily="34" charset="-120"/>
               </a:rPr>
-              <a:t>そのかわり、対価があります</a:t>
+              <a:t>そのかわり、払うものがあります</a:t>
             </a:r>
             <a:endParaRPr lang="en-US" sz="1400" dirty="0"/>
           </a:p>
@@ -5381,7 +5381,7 @@
                 <a:ea typeface="Calibri" pitchFamily="34" charset="-122"/>
                 <a:cs typeface="Calibri" pitchFamily="34" charset="-120"/>
               </a:rPr>
-              <a:t>隔離と検証と記録のために、速度とトークンをわざと払っています。速く書かせたいだけなら、モデルに直接頼むほうが速いです。</a:t>
+              <a:t>隔離と検証と記録のために、速さとトークンをわざと差し出しています。とにかく速く書かせたいだけなら、モデルに直接お願いするほうが早いです。</a:t>
             </a:r>
             <a:endParaRPr lang="en-US" sz="1200" dirty="0"/>
           </a:p>
@@ -5496,7 +5496,7 @@
                 <a:ea typeface="Calibri" pitchFamily="34" charset="-122"/>
                 <a:cs typeface="Calibri" pitchFamily="34" charset="-120"/>
               </a:rPr>
-              <a:t>失敗したときのコストが速度より高い場面です。本番に触れるコード、他人が読むコード、あとで誰も検証しないコードが当てはまります。</a:t>
+              <a:t>失敗したときの痛手が、速さより大きい場面です。本番に触れるコード、ほかの人が読むコード、あとで誰も見直さないコードあたりですね。</a:t>
             </a:r>
             <a:endParaRPr lang="en-US" sz="1200" dirty="0"/>
           </a:p>
@@ -7272,7 +7272,7 @@
                 <a:ea typeface="Calibri" pitchFamily="34" charset="-122"/>
                 <a:cs typeface="Calibri" pitchFamily="34" charset="-120"/>
               </a:rPr>
-              <a:t>安全性の核になる部分は実装済みで、リポジトリ自身のテストで裏づけがあります。分類・隔離・acceptance-gate・明示的な accept と discard です。</a:t>
+              <a:t>安全のいちばん芯になる部分は、もう動いています。分類・隔離・acceptance-gate・自分で選ぶ accept と discard。リポジトリ自身のテストで裏づけもあります。</a:t>
             </a:r>
             <a:endParaRPr lang="en-US" sz="1150" dirty="0"/>
           </a:p>
@@ -7301,7 +7301,7 @@
                 <a:ea typeface="Calibri" pitchFamily="34" charset="-122"/>
                 <a:cs typeface="Calibri" pitchFamily="34" charset="-120"/>
               </a:rPr>
-              <a:t>その上の観測系（drill・board・stats・GitHub 連携）は使えますが、まだ発展途中です。</a:t>
+              <a:t>その上に乗る観測まわり（drill・board・stats・GitHub 連携）は使えますが、まだ育てている最中です。</a:t>
             </a:r>
             <a:endParaRPr lang="en-US" sz="1150" dirty="0"/>
           </a:p>
@@ -7374,7 +7374,7 @@
                 <a:ea typeface="Arial" pitchFamily="34" charset="-122"/>
                 <a:cs typeface="Arial" pitchFamily="34" charset="-120"/>
               </a:rPr>
-              <a:t>正直なスコープ</a:t>
+              <a:t>正直に書いていること</a:t>
             </a:r>
             <a:endParaRPr lang="en-US" sz="1400" dirty="0"/>
           </a:p>
@@ -7416,7 +7416,7 @@
                 <a:ea typeface="Calibri" pitchFamily="34" charset="-122"/>
                 <a:cs typeface="Calibri" pitchFamily="34" charset="-120"/>
               </a:rPr>
-              <a:t>このプロジェクトは、まだ出していない機能を Planned として載せない方針です。表に無いコマンドは、まだ出荷されていません。</a:t>
+              <a:t>このプロジェクトは、まだ出していない機能を「予定」として載せない方針です。表に無いコマンドは、まだ世に出ていません。</a:t>
             </a:r>
             <a:endParaRPr lang="en-US" sz="1150" dirty="0"/>
           </a:p>
@@ -7489,7 +7489,7 @@
                 <a:ea typeface="Arial" pitchFamily="34" charset="-122"/>
                 <a:cs typeface="Arial" pitchFamily="34" charset="-120"/>
               </a:rPr>
-              <a:t>隔離が task ごとに閉じていると、何が嬉しいか</a:t>
+              <a:t>task ごとに閉じていると、こんなに楽です</a:t>
             </a:r>
             <a:endParaRPr lang="en-US" sz="1400" dirty="0"/>
           </a:p>
@@ -7531,7 +7531,7 @@
                 <a:ea typeface="Calibri" pitchFamily="34" charset="-122"/>
                 <a:cs typeface="Calibri" pitchFamily="34" charset="-120"/>
               </a:rPr>
-              <a:t>複数のタスクを同時に走らせても、別々の worktree と branch なので安全です。/rig:queue に積んで一括で GO しても、並列プロセスがファイルを取り合うことはありません。終わったあとは /rig:go board を見れば、どの端末のどのプロセスが動かしたかに関わらず、全タスクの状態が一つの表に出ます。</a:t>
+              <a:t>タスクを何本か同時に走らせても、それぞれ別の worktree と branch なので安心です。/rig:queue に積んでまとめて GO しても、プロセス同士がファイルを取り合うことはありません。終わったら /rig:go board を見てください。どの端末のどのプロセスが動かしたかに関係なく、全部の状態が一つの表に並びます。</a:t>
             </a:r>
             <a:endParaRPr lang="en-US" sz="1150" dirty="0"/>
           </a:p>
@@ -7898,7 +7898,7 @@
                 <a:ea typeface="Calibri" pitchFamily="34" charset="-122"/>
                 <a:cs typeface="Calibri" pitchFamily="34" charset="-120"/>
               </a:rPr>
-              <a:t>スラッシュコマンドはここから来ます。安全フローは一通りこれだけで動きます。</a:t>
+              <a:t>スラッシュコマンドはここから来ます。安全なひと通りの流れは、これだけで動きます。</a:t>
             </a:r>
             <a:endParaRPr lang="en-US" sz="1150" dirty="0"/>
           </a:p>
@@ -8173,7 +8173,7 @@
                 <a:ea typeface="Calibri" pitchFamily="34" charset="-122"/>
                 <a:cs typeface="Calibri" pitchFamily="34" charset="-120"/>
               </a:rPr>
-              <a:t>CI やスクリプト、別のアシスタント（Codex / Cursor）から、同じ recipe とゲートを回せます。</a:t>
+              <a:t>CI やスクリプト、ほかのアシスタント（Codex / Cursor）からでも、同じ recipe とゲートを回せます。</a:t>
             </a:r>
             <a:endParaRPr lang="en-US" sz="1150" dirty="0"/>
           </a:p>
@@ -8308,7 +8308,7 @@
                 <a:ea typeface="Calibri" pitchFamily="34" charset="-122"/>
                 <a:cs typeface="Calibri" pitchFamily="34" charset="-120"/>
               </a:rPr>
-              <a:t>両方は要りません。二つ目が必要なのは、Claude Code の外にあるものを同じ recipe とゲートに通したいときだけです。/rig:setup を使えば、Claude Code の中から入れられます。</a:t>
+              <a:t>両方そろえる必要はありません。二つめが要るのは、Claude Code の外にあるものを同じ recipe とゲートに通したいときだけです。/rig:setup を使えば、Claude Code の中から入れられます。</a:t>
             </a:r>
             <a:endParaRPr lang="en-US" sz="1100" dirty="0"/>
           </a:p>
@@ -8347,7 +8347,7 @@
                 <a:ea typeface="Arial" pitchFamily="34" charset="-122"/>
                 <a:cs typeface="Arial" pitchFamily="34" charset="-120"/>
               </a:rPr>
-              <a:t>最初の三十秒。設定はゼロで始められます</a:t>
+              <a:t>最初の三十秒。設定はゼロのままで大丈夫です</a:t>
             </a:r>
             <a:endParaRPr lang="en-US" sz="1200" dirty="0"/>
           </a:p>
@@ -8747,7 +8747,7 @@
                 <a:ea typeface="Calibri" pitchFamily="34" charset="-122"/>
                 <a:cs typeface="Calibri" pitchFamily="34" charset="-120"/>
               </a:rPr>
-              <a:t>manifest も gates.json も persona 設定も要りません。すべて後から足せます</a:t>
+              <a:t>manifest も gates.json も persona の設定も要りません。ぜんぶ後から足せます</a:t>
             </a:r>
             <a:endParaRPr lang="en-US" sz="1000" dirty="0"/>
           </a:p>
@@ -8786,7 +8786,7 @@
                 <a:ea typeface="Calibri" pitchFamily="34" charset="-122"/>
                 <a:cs typeface="Calibri" pitchFamily="34" charset="-120"/>
               </a:rPr>
-              <a:t>なぜその段取りになったかを、走り出す前に一行で出します</a:t>
+              <a:t>どうしてその段取りにしたのかを、走り出す前に一行で見せてくれます</a:t>
             </a:r>
             <a:endParaRPr lang="en-US" sz="1000" dirty="0"/>
           </a:p>
@@ -8896,7 +8896,7 @@
                 <a:ea typeface="Arial" pitchFamily="34" charset="-122"/>
                 <a:cs typeface="Arial" pitchFamily="34" charset="-120"/>
               </a:rPr>
-              <a:t>rig が安全だと言える四つの理由</a:t>
+              <a:t>rig が安全だと言える、四つの理由</a:t>
             </a:r>
             <a:endParaRPr lang="en-US" sz="2700" dirty="0"/>
           </a:p>
@@ -9013,7 +9013,7 @@
                 <a:ea typeface="Calibri" pitchFamily="34" charset="-122"/>
                 <a:cs typeface="Calibri" pitchFamily="34" charset="-120"/>
               </a:rPr>
-              <a:t>安全だと言えるのは、次の四つが文章ではなく配線として入っているからです。</a:t>
+              <a:t>安全だと言えるのは、次の四つが文章ではなく仕組みとして組み込まれているからです。</a:t>
             </a:r>
             <a:endParaRPr lang="en-US" sz="1250" dirty="0"/>
           </a:p>
@@ -9192,7 +9192,7 @@
                 <a:ea typeface="Calibri" pitchFamily="34" charset="-122"/>
                 <a:cs typeface="Calibri" pitchFamily="34" charset="-120"/>
               </a:rPr>
-              <a:t>タスクごとに専用の worktree と使い捨てブランチを作ります。rig があなたの作業ツリーに直接書き込むことはありません。失敗しても中断しても手元は汚れませんし、隔離がタスクごとに閉じているので同時実行も安全です。</a:t>
+              <a:t>タスクごとに、専用の worktree と使い捨てのブランチを作ります。rig があなたの作業ツリーに直接書き込むことはありません。失敗しても途中でやめても、手元は汚れないままです。タスクごとに閉じているので、同時に走らせても大丈夫です。</a:t>
             </a:r>
             <a:endParaRPr lang="en-US" sz="1150" dirty="0"/>
           </a:p>
@@ -9371,7 +9371,7 @@
                 <a:ea typeface="Calibri" pitchFamily="34" charset="-122"/>
                 <a:cs typeface="Calibri" pitchFamily="34" charset="-120"/>
               </a:rPr>
-              <a:t>「完了しました」と言われても完了にはなりません。無関係な差分・テスト・型・リスク記述・秘密情報を機械的に確認して、はじめて反映候補になります。failed か pending が一件でも残っていれば accept は拒否されます（exit 1）。</a:t>
+              <a:t>「完了しました」と言われても、それだけでは終わりになりません。関係ない差分・テスト・型・リスクの書きぶり・秘密情報を機械が見て、そこではじめて反映の候補になります。failed か pending が一件でも残っていたら、accept ははじかれます（exit 1）。</a:t>
             </a:r>
             <a:endParaRPr lang="en-US" sz="1150" dirty="0"/>
           </a:p>
@@ -9550,7 +9550,7 @@
                 <a:ea typeface="Calibri" pitchFamily="34" charset="-122"/>
                 <a:cs typeface="Calibri" pitchFamily="34" charset="-120"/>
               </a:rPr>
-              <a:t>実装する AI と検証する AI を分け、検証側はプロセスレベルで読み取り専用に固定します。お願いではなく強制です。判定の一次証拠に使うのは自己申告のレポートではなく、worktree の実際の git diff です。</a:t>
+              <a:t>書く AI と、たしかめる AI を分けます。たしかめる側はプロセスの段階で読み取り専用に固定されます。お願いではなく、そうとしか動けない状態です。判断のいちばんの根拠は、本人の申告ではなく worktree の実際の git diff です。</a:t>
             </a:r>
             <a:endParaRPr lang="en-US" sz="1150" dirty="0"/>
           </a:p>
@@ -9729,7 +9729,7 @@
                 <a:ea typeface="Calibri" pitchFamily="34" charset="-122"/>
                 <a:cs typeface="Calibri" pitchFamily="34" charset="-120"/>
               </a:rPr>
-              <a:t>accept は squash merge で staged（未コミット）まで進めます。コミットは常に人間が打ちます。discard しても run log は残るので、何を試してなぜ捨てたかを後から辿れます。構造的な前提は --force でも通りません。</a:t>
+              <a:t>accept は squash merge で staged（コミット前）まで進めます。コミットするのは、いつも人です。discard しても run log は残るので、何を試してなぜ捨てたのかを後から追えます。土台になる前提は --force でも通り抜けられません。</a:t>
             </a:r>
             <a:endParaRPr lang="en-US" sz="1150" dirty="0"/>
           </a:p>
@@ -10468,7 +10468,7 @@
                 <a:ea typeface="Arial" pitchFamily="34" charset="-122"/>
                 <a:cs typeface="Arial" pitchFamily="34" charset="-120"/>
               </a:rPr>
-              <a:t>queue は accept までは進めません</a:t>
+              <a:t>queue は accept まではやりません</a:t>
             </a:r>
             <a:endParaRPr lang="en-US" sz="1400" dirty="0"/>
           </a:p>
@@ -10510,7 +10510,7 @@
                 <a:ea typeface="Calibri" pitchFamily="34" charset="-122"/>
                 <a:cs typeface="Calibri" pitchFamily="34" charset="-120"/>
               </a:rPr>
-              <a:t>queue の verifier が見るのは二つだけです。gate が確定したか、worktree の中で完結して本体に書いていないか。反映するかどうかの判断は人間に残ります。終わったら /rig:go board で確認してください。</a:t>
+              <a:t>queue の verifier が見るのは二つだけです。gate が決まったかどうかと、worktree の中で完結して本体に書いていないかどうか。反映するかどうかは、ちゃんと人の手元に残ります。終わったら /rig:go board で見てみてください。</a:t>
             </a:r>
             <a:endParaRPr lang="en-US" sz="1150" dirty="0"/>
           </a:p>
@@ -10620,7 +10620,7 @@
                 <a:ea typeface="Arial" pitchFamily="34" charset="-122"/>
                 <a:cs typeface="Arial" pitchFamily="34" charset="-120"/>
               </a:rPr>
-              <a:t>柱 ② acceptance-gate は standard と種別プリセットの合成です</a:t>
+              <a:t>柱 ② acceptance-gate は standard ＋ 種別プリセット</a:t>
             </a:r>
             <a:endParaRPr lang="en-US" sz="2700" dirty="0"/>
           </a:p>
@@ -11893,7 +11893,7 @@
                 <a:ea typeface="Arial" pitchFamily="34" charset="-122"/>
                 <a:cs typeface="Arial" pitchFamily="34" charset="-120"/>
               </a:rPr>
-              <a:t>状態は四つ</a:t>
+              <a:t>状態は四つあります</a:t>
             </a:r>
             <a:endParaRPr lang="en-US" sz="1400" dirty="0"/>
           </a:p>
@@ -11935,7 +11935,7 @@
                 <a:ea typeface="Calibri" pitchFamily="34" charset="-122"/>
                 <a:cs typeface="Calibri" pitchFamily="34" charset="-120"/>
               </a:rPr>
-              <a:t>各基準は根拠つきで passed / failed / warning / skipped として記録されます。全体は passed / passed_with_warnings / failed / pending に集約されます。</a:t>
+              <a:t>一つひとつの基準は、根拠つきで passed / failed / warning / skipped として残ります。全体としては passed / passed_with_warnings / failed / pending にまとまります。</a:t>
             </a:r>
             <a:endParaRPr lang="en-US" sz="1100" dirty="0"/>
           </a:p>
@@ -12008,7 +12008,7 @@
                 <a:ea typeface="Arial" pitchFamily="34" charset="-122"/>
                 <a:cs typeface="Arial" pitchFamily="34" charset="-120"/>
               </a:rPr>
-              <a:t>accept が止まる条件</a:t>
+              <a:t>accept が止まるのはこのとき</a:t>
             </a:r>
             <a:endParaRPr lang="en-US" sz="1400" dirty="0"/>
           </a:p>
@@ -12050,7 +12050,7 @@
                 <a:ea typeface="Calibri" pitchFamily="34" charset="-122"/>
                 <a:cs typeface="Calibri" pitchFamily="34" charset="-120"/>
               </a:rPr>
-              <a:t>failed か pending が一件でも残っていれば、accept は機械的に拒否されます（exit 1）。</a:t>
+              <a:t>failed か pending が一件でも残っていたら、accept ははじかれます（exit 1）。</a:t>
             </a:r>
             <a:endParaRPr lang="en-US" sz="1100" dirty="0"/>
           </a:p>
@@ -12079,7 +12079,7 @@
                 <a:ea typeface="Calibri" pitchFamily="34" charset="-122"/>
                 <a:cs typeface="Calibri" pitchFamily="34" charset="-120"/>
               </a:rPr>
-              <a:t>warning は accept を止めません。ただし必ず提示されるので、黙って握りつぶされることはありません。</a:t>
+              <a:t>warning は accept を止めません。ただし必ず見せてくれるので、こっそり握りつぶされることはありません。</a:t>
             </a:r>
             <a:endParaRPr lang="en-US" sz="1100" dirty="0"/>
           </a:p>
@@ -12118,7 +12118,7 @@
                 <a:ea typeface="Calibri" pitchFamily="34" charset="-122"/>
                 <a:cs typeface="Calibri" pitchFamily="34" charset="-120"/>
               </a:rPr>
-              <a:t>正本は scripts/workbench.py gates です。プロジェクト側は .rig/gates.json の extra_criteria で基準を足せます。</a:t>
+              <a:t>元になっているのは scripts/workbench.py gates です。プロジェクト側は .rig/gates.json の extra_criteria から基準を足せます。</a:t>
             </a:r>
             <a:endParaRPr lang="en-US" sz="1000" dirty="0"/>
           </a:p>
@@ -12228,7 +12228,7 @@
                 <a:ea typeface="Arial" pitchFamily="34" charset="-122"/>
                 <a:cs typeface="Arial" pitchFamily="34" charset="-120"/>
               </a:rPr>
-              <a:t>基準は自己申告ではなく、機械センサーが裏づけます</a:t>
+              <a:t>基準は自己申告ではなく、機械が裏づけてくれます</a:t>
             </a:r>
             <a:endParaRPr lang="en-US" sz="2700" dirty="0"/>
           </a:p>
@@ -12421,7 +12421,7 @@
                 <a:ea typeface="Calibri" pitchFamily="34" charset="-122"/>
                 <a:cs typeface="Calibri" pitchFamily="34" charset="-120"/>
               </a:rPr>
-              <a:t>task diff に決定論的なシークレットスキャンをかけます。検出があれば failed です。抜粋は常にマスクされます。</a:t>
+              <a:t>task diff に、毎回おなじ結果になるシークレットスキャンをかけます。見つかれば failed です。抜粋はいつもマスクされます。</a:t>
             </a:r>
             <a:endParaRPr lang="en-US" sz="1050" dirty="0"/>
           </a:p>
@@ -12536,7 +12536,7 @@
                 <a:ea typeface="Calibri" pitchFamily="34" charset="-122"/>
                 <a:cs typeface="Calibri" pitchFamily="34" charset="-120"/>
               </a:rPr>
-              <a:t>文章面のインジェクション・マーカーを探します。不可視文字や bidi Unicode は fail、指示を上書きする言い回しは warning です。</a:t>
+              <a:t>文章の中のインジェクション・マーカーを探します。目に見えない文字や bidi Unicode は fail、指示を上書きしようとする言い回しは warning です。</a:t>
             </a:r>
             <a:endParaRPr lang="en-US" sz="1050" dirty="0"/>
           </a:p>
@@ -12651,7 +12651,7 @@
                 <a:ea typeface="Calibri" pitchFamily="34" charset="-122"/>
                 <a:cs typeface="Calibri" pitchFamily="34" charset="-120"/>
               </a:rPr>
-              <a:t>破壊的なコマンドを探します。rm -rf / ・mkfs・DROP DATABASE は fail、force push や TRUNCATE は warning です。</a:t>
+              <a:t>危ないコマンドを探します。rm -rf / ・mkfs・DROP DATABASE は fail、force push や TRUNCATE は warning です。</a:t>
             </a:r>
             <a:endParaRPr lang="en-US" sz="1050" dirty="0"/>
           </a:p>
@@ -12766,7 +12766,7 @@
                 <a:ea typeface="Calibri" pitchFamily="34" charset="-122"/>
                 <a:cs typeface="Calibri" pitchFamily="34" charset="-120"/>
               </a:rPr>
-              <a:t>gates.json・recipes・CI workflow を編集していたら fail です。既存テストの改変・assert 削除・skip 追加は warning になります。</a:t>
+              <a:t>gates.json・recipes・CI workflow に手を入れていたら fail です。今あるテストの書き換え・assert 削除・skip 追加は warning になります。</a:t>
             </a:r>
             <a:endParaRPr lang="en-US" sz="1050" dirty="0"/>
           </a:p>
@@ -12881,7 +12881,7 @@
                 <a:ea typeface="Calibri" pitchFamily="34" charset="-122"/>
                 <a:cs typeface="Calibri" pitchFamily="34" charset="-120"/>
               </a:rPr>
-              <a:t>OpenAPI の schema-diff を取ります。API が変わったのに diff サマリに記述が無ければ warning に落とします。</a:t>
+              <a:t>OpenAPI の schema-diff を取ります。API が変わったのに diff サマリに何も書かれていなければ warning にします。</a:t>
             </a:r>
             <a:endParaRPr lang="en-US" sz="1050" dirty="0"/>
           </a:p>
@@ -12996,7 +12996,7 @@
                 <a:ea typeface="Calibri" pitchFamily="34" charset="-122"/>
                 <a:cs typeface="Calibri" pitchFamily="34" charset="-120"/>
               </a:rPr>
-              <a:t>diff が prompt 面に触れたときだけ自動で足されます。--set による手動上書きを拒否する唯一の基準です。</a:t>
+              <a:t>diff が prompt 面に触れたときだけ、自動で足されます。--set での手動の上書きを断る、唯一の基準です。</a:t>
             </a:r>
             <a:endParaRPr lang="en-US" sz="1050" dirty="0"/>
           </a:p>
@@ -13111,7 +13111,7 @@
                 <a:ea typeface="Calibri" pitchFamily="34" charset="-122"/>
                 <a:cs typeface="Calibri" pitchFamily="34" charset="-120"/>
               </a:rPr>
-              <a:t>プロジェクトは .rig/gates.json で独自の基準を足せます。ただし組み込み基準の削除キーや緩和キーは、その場で拒否されます。リポジトリの中のファイルが、そのリポジトリを守るゲートを弱めることはできません。</a:t>
+              <a:t>プロジェクトは .rig/gates.json から独自の基準を足せます。ただし、もとからある基準を消したりゆるめたりするキーは、その場ではじかれます。リポジトリの中のファイルが、そのリポジトリを守っているゲートをゆるめることはできない、ということですね。</a:t>
             </a:r>
             <a:endParaRPr lang="en-US" sz="1150" dirty="0"/>
           </a:p>
@@ -13504,7 +13504,7 @@
                 <a:ea typeface="Calibri" pitchFamily="34" charset="-122"/>
                 <a:cs typeface="Calibri" pitchFamily="34" charset="-120"/>
               </a:rPr>
-              <a:t>編集も commit も、formatter による書き換えもできません</a:t>
+              <a:t>編集も commit も、formatter での書き換えもできません</a:t>
             </a:r>
             <a:endParaRPr lang="en-US" sz="1150" dirty="0"/>
           </a:p>
@@ -13528,7 +13528,7 @@
                 <a:ea typeface="Calibri" pitchFamily="34" charset="-122"/>
                 <a:cs typeface="Calibri" pitchFamily="34" charset="-120"/>
               </a:rPr>
-              <a:t>判定の一次証拠は worktree の実際の git diff です。生成側のレポートは「未検証の主張」として渡されるだけです</a:t>
+              <a:t>いちばんの根拠は worktree の実際の git diff です。書いた側のレポートは「まだ確かめていない主張」として渡るだけです</a:t>
             </a:r>
             <a:endParaRPr lang="en-US" sz="1150" dirty="0"/>
           </a:p>
@@ -13552,7 +13552,7 @@
                 <a:ea typeface="Calibri" pitchFamily="34" charset="-122"/>
                 <a:cs typeface="Calibri" pitchFamily="34" charset="-120"/>
               </a:rPr>
-              <a:t>この制限が実装として効いていることは、orchestrate.py probe がプロバイダごとに確認します</a:t>
+              <a:t>この制限がちゃんと効いていることは、orchestrate.py probe がプロバイダごとに確かめてくれます</a:t>
             </a:r>
             <a:endParaRPr lang="en-US" sz="1150" dirty="0"/>
           </a:p>
@@ -13591,7 +13591,7 @@
                 <a:ea typeface="Arial" pitchFamily="34" charset="-122"/>
                 <a:cs typeface="Arial" pitchFamily="34" charset="-120"/>
               </a:rPr>
-              <a:t>④  accept は staged で止まり、記録は消えません</a:t>
+              <a:t>④  accept は staged で止まり、記録も消えません</a:t>
             </a:r>
             <a:endParaRPr lang="en-US" sz="1200" dirty="0"/>
           </a:p>
@@ -13813,7 +13813,7 @@
                 <a:ea typeface="Calibri" pitchFamily="34" charset="-122"/>
                 <a:cs typeface="Calibri" pitchFamily="34" charset="-120"/>
               </a:rPr>
-              <a:t>構造的な前提は --force でも通りません。diff.md が無ければ accept できません</a:t>
+              <a:t>土台になる前提は --force でも通りません。diff.md が無ければ accept できません</a:t>
             </a:r>
             <a:endParaRPr lang="en-US" sz="1150" dirty="0"/>
           </a:p>
@@ -13837,7 +13837,7 @@
                 <a:ea typeface="Calibri" pitchFamily="34" charset="-122"/>
                 <a:cs typeface="Calibri" pitchFamily="34" charset="-120"/>
               </a:rPr>
-              <a:t>上書きした場合は forced: true として記録され、あとから消せません</a:t>
+              <a:t>上書きしたときは forced: true として残ります。あとから消すことはできません</a:t>
             </a:r>
             <a:endParaRPr lang="en-US" sz="1150" dirty="0"/>
           </a:p>
@@ -13861,7 +13861,7 @@
                 <a:ea typeface="Calibri" pitchFamily="34" charset="-122"/>
                 <a:cs typeface="Calibri" pitchFamily="34" charset="-120"/>
               </a:rPr>
-              <a:t>反映は squash merge の staged までです。コミットは常に人間が打ちます</a:t>
+              <a:t>反映は squash merge の staged まで。コミットするのはいつも人です</a:t>
             </a:r>
             <a:endParaRPr lang="en-US" sz="1150" dirty="0"/>
           </a:p>
@@ -13885,7 +13885,7 @@
                 <a:ea typeface="Calibri" pitchFamily="34" charset="-122"/>
                 <a:cs typeface="Calibri" pitchFamily="34" charset="-120"/>
               </a:rPr>
-              <a:t>discard は変更ファイルの一覧を必ず先に見せ、--yes を求めます</a:t>
+              <a:t>discard は変更するファイルの一覧を必ず先に見せて、--yes を待ちます</a:t>
             </a:r>
             <a:endParaRPr lang="en-US" sz="1150" dirty="0"/>
           </a:p>
@@ -14113,7 +14113,7 @@
                 <a:ea typeface="Arial" pitchFamily="34" charset="-122"/>
                 <a:cs typeface="Arial" pitchFamily="34" charset="-120"/>
               </a:rPr>
-              <a:t>文脈が圧縮されても残ります</a:t>
+              <a:t>文脈が圧縮されても消えません</a:t>
             </a:r>
             <a:endParaRPr lang="en-US" sz="1400" dirty="0"/>
           </a:p>
@@ -14155,7 +14155,7 @@
                 <a:ea typeface="Calibri" pitchFamily="34" charset="-122"/>
                 <a:cs typeface="Calibri" pitchFamily="34" charset="-120"/>
               </a:rPr>
-              <a:t>PreCompact フックが run-state の保全指示を差し込みます。/rig:init を使えば、同じ保全文を CLAUDE.md の Compact Instructions にも置けます。</a:t>
+              <a:t>PreCompact フックが、run-state を守る指示をそっと差し込みます。/rig:init を使えば、同じ文を CLAUDE.md の Compact Instructions にも置けます。</a:t>
             </a:r>
             <a:endParaRPr lang="en-US" sz="1100" dirty="0"/>
           </a:p>
@@ -14265,7 +14265,7 @@
                 <a:ea typeface="Arial" pitchFamily="34" charset="-122"/>
                 <a:cs typeface="Arial" pitchFamily="34" charset="-120"/>
               </a:rPr>
-              <a:t>中身は四種類のブリックで、LEGO のように組み合わせます</a:t>
+              <a:t>中身は四種類のブリック。LEGO みたいに組み合わせます</a:t>
             </a:r>
             <a:endParaRPr lang="en-US" sz="2700" dirty="0"/>
           </a:p>
@@ -14631,7 +14631,7 @@
                 <a:ea typeface="Calibri" pitchFamily="34" charset="-122"/>
                 <a:cs typeface="Calibri" pitchFamily="34" charset="-120"/>
               </a:rPr>
-              <a:t>手順そのものです。薄く保たれ、エンジンには触れません</a:t>
+              <a:t>手順そのものです。薄いまま保たれて、エンジンには触れません</a:t>
             </a:r>
             <a:endParaRPr lang="en-US" sz="1100" dirty="0"/>
           </a:p>
@@ -14958,7 +14958,7 @@
                 <a:ea typeface="Calibri" pitchFamily="34" charset="-122"/>
                 <a:cs typeface="Calibri" pitchFamily="34" charset="-120"/>
               </a:rPr>
-              <a:t>/rig:go はこの組み立てを自動でやります。/rig:dev は同じエンジンを、recipe・step・flag をすべて自分で指定して使う入口です。</a:t>
+              <a:t>/rig:go はこの組み立てを自動でやってくれます。/rig:dev のほうは、recipe も step も flag も自分で指定したい人向けの入口です。</a:t>
             </a:r>
             <a:endParaRPr lang="en-US" sz="1200" dirty="0"/>
           </a:p>
@@ -15853,7 +15853,7 @@
                 <a:ea typeface="Calibri" pitchFamily="34" charset="-122"/>
                 <a:cs typeface="Calibri" pitchFamily="34" charset="-120"/>
               </a:rPr>
-              <a:t>flag とブリックの完全な一覧は skills/engine/SKILL.md が正本です。README には複製しません。二重に書くと目録がずれるためです。</a:t>
+              <a:t>flag とブリックの全部の一覧は skills/engine/SKILL.md にあります。README にはあえて写していません。二か所に書くと、いつかずれてしまうからです。</a:t>
             </a:r>
             <a:endParaRPr lang="en-US" sz="1000" dirty="0"/>
           </a:p>
@@ -16153,7 +16153,7 @@
                 <a:ea typeface="Arial" pitchFamily="34" charset="-122"/>
                 <a:cs typeface="Arial" pitchFamily="34" charset="-120"/>
               </a:rPr>
-              <a:t>なぜ rig を作ったか</a:t>
+              <a:t>なぜ rig を作ったのか</a:t>
             </a:r>
             <a:endParaRPr lang="en-US" sz="1500" dirty="0"/>
           </a:p>
@@ -16195,7 +16195,7 @@
                 <a:ea typeface="Calibri" pitchFamily="34" charset="-122"/>
                 <a:cs typeface="Calibri" pitchFamily="34" charset="-120"/>
               </a:rPr>
-              <a:t>・よくある AI 活用の四つの型</a:t>
+              <a:t>・よくある AI の使い方</a:t>
             </a:r>
             <a:endParaRPr lang="en-US" sz="1200" dirty="0"/>
           </a:p>
@@ -16215,7 +16215,7 @@
                 <a:ea typeface="Calibri" pitchFamily="34" charset="-122"/>
                 <a:cs typeface="Calibri" pitchFamily="34" charset="-120"/>
               </a:rPr>
-              <a:t>・そこで共通して開く穴</a:t>
+              <a:t>・そこで開きがちな穴</a:t>
             </a:r>
             <a:endParaRPr lang="en-US" sz="1200" dirty="0"/>
           </a:p>
@@ -16295,7 +16295,7 @@
                 <a:ea typeface="Calibri" pitchFamily="34" charset="-122"/>
                 <a:cs typeface="Calibri" pitchFamily="34" charset="-120"/>
               </a:rPr>
-              <a:t>・一般的な対応と、その限界</a:t>
+              <a:t>・よくある対応と、その限界</a:t>
             </a:r>
             <a:endParaRPr lang="en-US" sz="1200" dirty="0"/>
           </a:p>
@@ -16315,7 +16315,7 @@
                 <a:ea typeface="Calibri" pitchFamily="34" charset="-122"/>
                 <a:cs typeface="Calibri" pitchFamily="34" charset="-120"/>
               </a:rPr>
-              <a:t>・rig は四象限をどう埋めるか</a:t>
+              <a:t>・rig はそこをどう埋めるか</a:t>
             </a:r>
             <a:endParaRPr lang="en-US" sz="1200" dirty="0"/>
           </a:p>
@@ -16549,7 +16549,7 @@
                 <a:ea typeface="Calibri" pitchFamily="34" charset="-122"/>
                 <a:cs typeface="Calibri" pitchFamily="34" charset="-120"/>
               </a:rPr>
-              <a:t>・ゲートと機械センサー</a:t>
+              <a:t>・ゲートと機械のチェック</a:t>
             </a:r>
             <a:endParaRPr lang="en-US" sz="1200" dirty="0"/>
           </a:p>
@@ -16783,7 +16783,7 @@
                 <a:ea typeface="Calibri" pitchFamily="34" charset="-122"/>
                 <a:cs typeface="Calibri" pitchFamily="34" charset="-120"/>
               </a:rPr>
-              <a:t>・wiki と inject、tier 解決</a:t>
+              <a:t>・wiki と inject、tier のしくみ</a:t>
             </a:r>
             <a:endParaRPr lang="en-US" sz="1200" dirty="0"/>
           </a:p>
@@ -16863,7 +16863,7 @@
                 <a:ea typeface="Calibri" pitchFamily="34" charset="-122"/>
                 <a:cs typeface="Calibri" pitchFamily="34" charset="-120"/>
               </a:rPr>
-              <a:t>・knowledge ブロックと検索</a:t>
+              <a:t>・knowledge ブロックと探し方</a:t>
             </a:r>
             <a:endParaRPr lang="en-US" sz="1200" dirty="0"/>
           </a:p>
@@ -16883,7 +16883,7 @@
                 <a:ea typeface="Calibri" pitchFamily="34" charset="-122"/>
                 <a:cs typeface="Calibri" pitchFamily="34" charset="-120"/>
               </a:rPr>
-              <a:t>・配る：bundle / named source</a:t>
+              <a:t>・渡す：bundle / named source</a:t>
             </a:r>
             <a:endParaRPr lang="en-US" sz="1200" dirty="0"/>
           </a:p>
@@ -16903,7 +16903,7 @@
                 <a:ea typeface="Calibri" pitchFamily="34" charset="-122"/>
                 <a:cs typeface="Calibri" pitchFamily="34" charset="-120"/>
               </a:rPr>
-              <a:t>・落とし穴と、明日からの順番</a:t>
+              <a:t>・つまずきどころと、明日の一歩</a:t>
             </a:r>
             <a:endParaRPr lang="en-US" sz="1200" dirty="0"/>
           </a:p>
@@ -16942,7 +16942,7 @@
                 <a:ea typeface="Calibri" pitchFamily="34" charset="-122"/>
                 <a:cs typeface="Calibri" pitchFamily="34" charset="-120"/>
               </a:rPr>
-              <a:t>典拠は rig リポジトリの一次資料だけです。仕様はまだ変わるので、引数の正確なところは各コマンドの --help を見てください。</a:t>
+              <a:t>中身はぜんぶ rig リポジトリの資料から取っています。仕様はまだ動くので、引数の正確なところは各コマンドの --help をのぞいてみてください。</a:t>
             </a:r>
             <a:endParaRPr lang="en-US" sz="1050" dirty="0"/>
           </a:p>
@@ -17052,7 +17052,7 @@
                 <a:ea typeface="Arial" pitchFamily="34" charset="-122"/>
                 <a:cs typeface="Arial" pitchFamily="34" charset="-120"/>
               </a:rPr>
-              <a:t>レビュアーの実力は測れます</a:t>
+              <a:t>レビュアーの実力は、ちゃんと測れます</a:t>
             </a:r>
             <a:endParaRPr lang="en-US" sz="2700" dirty="0"/>
           </a:p>
@@ -17169,7 +17169,7 @@
                 <a:ea typeface="Calibri" pitchFamily="34" charset="-122"/>
                 <a:cs typeface="Calibri" pitchFamily="34" charset="-120"/>
               </a:rPr>
-              <a:t>reviewer persona は単なるプロンプトではありません。既知のバグを使い捨ての diff に仕込んでレビューを走らせ、reviewer には見せない答案キーと突き合わせて採点します。</a:t>
+              <a:t>reviewer persona は、テストできます。わざと仕込んだバグを使い捨ての diff に入れてレビューを走らせ、reviewer には見せていない答え合わせ用のキーと照らして採点します。</a:t>
             </a:r>
             <a:endParaRPr lang="en-US" sz="1250" dirty="0"/>
           </a:p>
@@ -17846,7 +17846,7 @@
                 <a:ea typeface="Arial" pitchFamily="34" charset="-122"/>
                 <a:cs typeface="Arial" pitchFamily="34" charset="-120"/>
               </a:rPr>
-              <a:t>persona の更新案は四カテゴリに固定されています</a:t>
+              <a:t>persona の直し方は、四種類に決めてあります</a:t>
             </a:r>
             <a:endParaRPr lang="en-US" sz="1400" dirty="0"/>
           </a:p>
@@ -17888,7 +17888,7 @@
                 <a:ea typeface="Calibri" pitchFamily="34" charset="-122"/>
                 <a:cs typeface="Calibri" pitchFamily="34" charset="-120"/>
               </a:rPr>
-              <a:t>add_checklist_item ／ adjust_severity_rule ／ add_false_positive_guard ／ strengthen_security_focus の四つです。</a:t>
+              <a:t>add_checklist_item ／ adjust_severity_rule ／ add_false_positive_guard ／ strengthen_security_focus の四つ。</a:t>
             </a:r>
             <a:endParaRPr lang="en-US" sz="1150" dirty="0"/>
           </a:p>
@@ -17917,7 +17917,7 @@
                 <a:ea typeface="Calibri" pitchFamily="34" charset="-122"/>
                 <a:cs typeface="Calibri" pitchFamily="34" charset="-120"/>
               </a:rPr>
-              <a:t>曖昧な感想ではなく、run をまたいで集計できる形にするためです。--replay を使うと、persona を編集したあとにアーカイブ済みの diff へ再実行し、新旧の verdict を並べて見せます。本物のコードには一切触れません。</a:t>
+              <a:t>ふんわりした感想ではなく、run をまたいで数えられる形にしたいからです。--replay を使うと、persona を直したあとに保存ずみの diff へもう一度かけて、前と後の verdict を並べて見せてくれます。本物のコードには一切触れません。</a:t>
             </a:r>
             <a:endParaRPr lang="en-US" sz="1150" dirty="0"/>
           </a:p>
@@ -17956,7 +17956,7 @@
                 <a:ea typeface="Arial" pitchFamily="34" charset="-122"/>
                 <a:cs typeface="Arial" pitchFamily="34" charset="-120"/>
               </a:rPr>
-              <a:t>形だけのレビューも名指しします（/rig:go stats）</a:t>
+              <a:t>形だけのレビューも、ちゃんと教えてくれます（/rig:go stats）</a:t>
             </a:r>
             <a:endParaRPr lang="en-US" sz="1200" dirty="0"/>
           </a:p>
@@ -18251,7 +18251,7 @@
                 <a:ea typeface="Arial" pitchFamily="34" charset="-122"/>
                 <a:cs typeface="Arial" pitchFamily="34" charset="-120"/>
               </a:rPr>
-              <a:t>コマンドの地図。上から順に、必要になってから覚えます</a:t>
+              <a:t>コマンドの地図。上から順に、必要になったら覚えれば大丈夫</a:t>
             </a:r>
             <a:endParaRPr lang="en-US" sz="2700" dirty="0"/>
           </a:p>
@@ -19339,12 +19339,12 @@
         </p:nvSpPr>
         <p:spPr>
           <a:xfrm>
-            <a:off x="502920" y="4892040"/>
-            <a:ext cx="5486400" cy="960120"/>
+            <a:off x="502920" y="4800600"/>
+            <a:ext cx="5486400" cy="1097280"/>
           </a:xfrm>
           <a:prstGeom prst="roundRect">
             <a:avLst>
-              <a:gd name="adj" fmla="val 5714"/>
+              <a:gd name="adj" fmla="val 5000"/>
             </a:avLst>
           </a:prstGeom>
           <a:solidFill>
@@ -19373,7 +19373,7 @@
         </p:nvSpPr>
         <p:spPr>
           <a:xfrm>
-            <a:off x="758952" y="5074920"/>
+            <a:off x="758952" y="4983480"/>
             <a:ext cx="4974336" cy="320040"/>
           </a:xfrm>
           <a:prstGeom prst="rect">
@@ -19398,7 +19398,7 @@
                 <a:ea typeface="Arial" pitchFamily="34" charset="-122"/>
                 <a:cs typeface="Arial" pitchFamily="34" charset="-120"/>
               </a:rPr>
-              <a:t>最初の一日に要るもの</a:t>
+              <a:t>最初の一日に使うもの</a:t>
             </a:r>
             <a:endParaRPr lang="en-US" sz="1400" dirty="0"/>
           </a:p>
@@ -19412,8 +19412,8 @@
         </p:nvSpPr>
         <p:spPr>
           <a:xfrm>
-            <a:off x="758952" y="5458968"/>
-            <a:ext cx="4974336" cy="228600"/>
+            <a:off x="758952" y="5367528"/>
+            <a:ext cx="4974336" cy="365760"/>
           </a:xfrm>
           <a:prstGeom prst="rect">
             <a:avLst/>
@@ -19454,12 +19454,12 @@
         </p:nvSpPr>
         <p:spPr>
           <a:xfrm>
-            <a:off x="6355080" y="4892040"/>
-            <a:ext cx="5303520" cy="960120"/>
+            <a:off x="6355080" y="4800600"/>
+            <a:ext cx="5303520" cy="1097280"/>
           </a:xfrm>
           <a:prstGeom prst="roundRect">
             <a:avLst>
-              <a:gd name="adj" fmla="val 5714"/>
+              <a:gd name="adj" fmla="val 5000"/>
             </a:avLst>
           </a:prstGeom>
           <a:solidFill>
@@ -19488,7 +19488,7 @@
         </p:nvSpPr>
         <p:spPr>
           <a:xfrm>
-            <a:off x="6611112" y="5074920"/>
+            <a:off x="6611112" y="4983480"/>
             <a:ext cx="4791456" cy="320040"/>
           </a:xfrm>
           <a:prstGeom prst="rect">
@@ -19513,7 +19513,7 @@
                 <a:ea typeface="Arial" pitchFamily="34" charset="-122"/>
                 <a:cs typeface="Arial" pitchFamily="34" charset="-120"/>
               </a:rPr>
-              <a:t>覚えなくていいもの</a:t>
+              <a:t>今は覚えなくていいもの</a:t>
             </a:r>
             <a:endParaRPr lang="en-US" sz="1400" dirty="0"/>
           </a:p>
@@ -19527,8 +19527,8 @@
         </p:nvSpPr>
         <p:spPr>
           <a:xfrm>
-            <a:off x="6611112" y="5458968"/>
-            <a:ext cx="4791456" cy="228600"/>
+            <a:off x="6611112" y="5367528"/>
+            <a:ext cx="4791456" cy="365760"/>
           </a:xfrm>
           <a:prstGeom prst="rect">
             <a:avLst/>
@@ -19555,7 +19555,7 @@
                 <a:ea typeface="Calibri" pitchFamily="34" charset="-122"/>
                 <a:cs typeface="Calibri" pitchFamily="34" charset="-120"/>
               </a:rPr>
-              <a:t>残り全部です。必要になった日に、この表へ戻ってきてください。</a:t>
+              <a:t>残りは全部そうです。必要になった日に、この表へ戻ってきてくれれば大丈夫です。</a:t>
             </a:r>
             <a:endParaRPr lang="en-US" sz="1150" dirty="0"/>
           </a:p>
@@ -19668,7 +19668,7 @@
                 <a:ea typeface="Calibri" pitchFamily="34" charset="-122"/>
                 <a:cs typeface="Calibri" pitchFamily="34" charset="-120"/>
               </a:rPr>
-              <a:t>専用領域の知識を、口伝でもコピペでもなく、</a:t>
+              <a:t>自分の領域の知識に、バージョンとハッシュと出どころを付けて、</a:t>
             </a:r>
             <a:endParaRPr lang="en-US" sz="1700" dirty="0"/>
           </a:p>
@@ -19688,7 +19688,7 @@
                 <a:ea typeface="Calibri" pitchFamily="34" charset="-122"/>
                 <a:cs typeface="Calibri" pitchFamily="34" charset="-120"/>
               </a:rPr>
-              <a:t>バージョンとハッシュと出典を持った配布物として渡します。</a:t>
+              <a:t>配布物として渡せるようにします。</a:t>
             </a:r>
             <a:endParaRPr lang="en-US" sz="1700" dirty="0"/>
           </a:p>
@@ -19837,7 +19837,7 @@
                 <a:ea typeface="Arial" pitchFamily="34" charset="-122"/>
                 <a:cs typeface="Arial" pitchFamily="34" charset="-120"/>
               </a:rPr>
-              <a:t>知識層とは何か。なぜ二種類あるのか</a:t>
+              <a:t>知識層って何でしょう。そして、なぜ二種類あるのか</a:t>
             </a:r>
             <a:endParaRPr lang="en-US" sz="2700" dirty="0"/>
           </a:p>
@@ -19988,7 +19988,7 @@
                 <a:ea typeface="Arial" pitchFamily="34" charset="-122"/>
                 <a:cs typeface="Arial" pitchFamily="34" charset="-120"/>
               </a:rPr>
-              <a:t>知識層とは、subagent のプロンプトに注入されるドメイン知識のことです</a:t>
+              <a:t>知識層は、subagent のプロンプトに差し込まれる「その領域の知識」です</a:t>
             </a:r>
             <a:endParaRPr lang="en-US" sz="1400" dirty="0"/>
           </a:p>
@@ -20030,7 +20030,7 @@
                 <a:ea typeface="Calibri" pitchFamily="34" charset="-122"/>
                 <a:cs typeface="Calibri" pitchFamily="34" charset="-120"/>
               </a:rPr>
-              <a:t>「この会社ではバックアップをこう定義している」「この製品のユビキタス言語はこれだ」。こうした、コードを読んでも出てこない事実を、レビュアーや実装役に持たせるための層です。</a:t>
+              <a:t>「うちの会社ではバックアップをこう呼んでいる」「この製品ではこの言葉をこう使う」。コードをいくら読んでも出てこないこういう事実を、レビュアーや実装役に持たせておくための層です。</a:t>
             </a:r>
             <a:endParaRPr lang="en-US" sz="1150" dirty="0"/>
           </a:p>
@@ -21586,7 +21586,7 @@
                 <a:ea typeface="Arial" pitchFamily="34" charset="-122"/>
                 <a:cs typeface="Arial" pitchFamily="34" charset="-120"/>
               </a:rPr>
-              <a:t>手元で育てるなら前者で十分です</a:t>
+              <a:t>手元で育てるなら、前者でじゅうぶん</a:t>
             </a:r>
             <a:endParaRPr lang="en-US" sz="1400" dirty="0"/>
           </a:p>
@@ -21628,7 +21628,7 @@
                 <a:ea typeface="Calibri" pitchFamily="34" charset="-122"/>
                 <a:cs typeface="Calibri" pitchFamily="34" charset="-120"/>
               </a:rPr>
-              <a:t>書けばすぐ効きます。棚卸しも配布も要らないうちは、これで足ります。</a:t>
+              <a:t>書いたらすぐ効きます。棚卸しも配布もまだ要らないうちは、これで足ります。</a:t>
             </a:r>
             <a:endParaRPr lang="en-US" sz="1100" dirty="0"/>
           </a:p>
@@ -21701,7 +21701,7 @@
                 <a:ea typeface="Arial" pitchFamily="34" charset="-122"/>
                 <a:cs typeface="Arial" pitchFamily="34" charset="-120"/>
               </a:rPr>
-              <a:t>人に渡すなら後者が要ります</a:t>
+              <a:t>人に渡すなら、後者の出番です</a:t>
             </a:r>
             <a:endParaRPr lang="en-US" sz="1400" dirty="0"/>
           </a:p>
@@ -21743,7 +21743,7 @@
                 <a:ea typeface="Calibri" pitchFamily="34" charset="-122"/>
                 <a:cs typeface="Calibri" pitchFamily="34" charset="-120"/>
               </a:rPr>
-              <a:t>誰が書いたのか。いつ見直したのか。根拠は何か。途中で書き換わっていないか。pack はこの四つを構造として持っています。</a:t>
+              <a:t>誰が書いたのか。いつ見直したのか。根拠は何か。途中で書き換わっていないか。pack は、この四つをちゃんと構造として持っています。</a:t>
             </a:r>
             <a:endParaRPr lang="en-US" sz="1100" dirty="0"/>
           </a:p>
@@ -21853,7 +21853,7 @@
                 <a:ea typeface="Arial" pitchFamily="34" charset="-122"/>
                 <a:cs typeface="Arial" pitchFamily="34" charset="-120"/>
               </a:rPr>
-              <a:t>persona は事実を埋め込まず、wiki を参照します</a:t>
+              <a:t>persona は事実を書き写さず、wiki を見にいきます</a:t>
             </a:r>
             <a:endParaRPr lang="en-US" sz="2700" dirty="0"/>
           </a:p>
@@ -22073,7 +22073,7 @@
                 <a:ea typeface="Calibri" pitchFamily="34" charset="-122"/>
                 <a:cs typeface="Calibri" pitchFamily="34" charset="-120"/>
               </a:rPr>
-              <a:t>一つの概念につき、一枚の正準ページ。相互リンクは [[slug]]</a:t>
+              <a:t>一つの概念につき、正しいページを一枚だけ。行き来は [[slug]] でつなぎます</a:t>
             </a:r>
             <a:endParaRPr lang="en-US" sz="1150" dirty="0"/>
           </a:p>
@@ -22097,7 +22097,7 @@
                 <a:ea typeface="Calibri" pitchFamily="34" charset="-122"/>
                 <a:cs typeface="Calibri" pitchFamily="34" charset="-120"/>
               </a:rPr>
-              <a:t>persona は事実を本文に埋め込まず、ページを参照します</a:t>
+              <a:t>persona は事実を本文に書き写さず、ページを見にいきます</a:t>
             </a:r>
             <a:endParaRPr lang="en-US" sz="1150" dirty="0"/>
           </a:p>
@@ -22121,7 +22121,7 @@
                 <a:ea typeface="Calibri" pitchFamily="34" charset="-122"/>
                 <a:cs typeface="Calibri" pitchFamily="34" charset="-120"/>
               </a:rPr>
-              <a:t>埋め込むと知識が暗黙知になります。参照にしておけば、ページを一枚直すだけで、参照している全 persona の判断が同時に更新されます</a:t>
+              <a:t>書き写してしまうと、その知識は誰にも見えない暗黙知になります。参照にしておけば、ページを一枚直すだけで、見にきている persona 全員の判断がいっぺんに新しくなります</a:t>
             </a:r>
             <a:endParaRPr lang="en-US" sz="1150" dirty="0"/>
           </a:p>
@@ -22145,7 +22145,7 @@
                 <a:ea typeface="Calibri" pitchFamily="34" charset="-122"/>
                 <a:cs typeface="Calibri" pitchFamily="34" charset="-120"/>
               </a:rPr>
-              <a:t>書き先は /rig:knowledge の既定で global。--project を付けるとプロジェクト overlay になります</a:t>
+              <a:t>/rig:knowledge の書き先は、何も指定しなければ global。--project を付けるとプロジェクト側の上書きになります</a:t>
             </a:r>
             <a:endParaRPr lang="en-US" sz="1150" dirty="0"/>
           </a:p>
@@ -22184,7 +22184,7 @@
                 <a:ea typeface="Arial" pitchFamily="34" charset="-122"/>
                 <a:cs typeface="Arial" pitchFamily="34" charset="-120"/>
               </a:rPr>
-              <a:t>[[slug]] は tier で解決され、上の層が勝ちます</a:t>
+              <a:t>[[slug]] は tier で解決されて、上の層が勝ちます</a:t>
             </a:r>
             <a:endParaRPr lang="en-US" sz="1200" dirty="0"/>
           </a:p>
@@ -22610,7 +22610,7 @@
                 <a:ea typeface="Courier New" pitchFamily="34" charset="-122"/>
                 <a:cs typeface="Courier New" pitchFamily="34" charset="-120"/>
               </a:rPr>
-              <a:t>チームで共有する層（RIG_ORG_HOME）</a:t>
+              <a:t>チームでいっしょに使う層（RIG_ORG_HOME）</a:t>
             </a:r>
             <a:endParaRPr lang="en-US" sz="950" dirty="0"/>
           </a:p>
@@ -22894,7 +22894,7 @@
                 <a:ea typeface="Courier New" pitchFamily="34" charset="-122"/>
                 <a:cs typeface="Courier New" pitchFamily="34" charset="-120"/>
               </a:rPr>
-              <a:t>rig が最初から持っているページ</a:t>
+              <a:t>rig にはじめから入っているページ</a:t>
             </a:r>
             <a:endParaRPr lang="en-US" sz="950" dirty="0"/>
           </a:p>
@@ -22967,7 +22967,7 @@
                 <a:ea typeface="Arial" pitchFamily="34" charset="-122"/>
                 <a:cs typeface="Arial" pitchFamily="34" charset="-120"/>
               </a:rPr>
-              <a:t>pack の persona は、まず自分の pack を見ます</a:t>
+              <a:t>pack の persona は、まず自分の pack をのぞきます</a:t>
             </a:r>
             <a:endParaRPr lang="en-US" sz="1400" dirty="0"/>
           </a:p>
@@ -23009,7 +23009,7 @@
                 <a:ea typeface="Calibri" pitchFamily="34" charset="-122"/>
                 <a:cs typeface="Calibri" pitchFamily="34" charset="-120"/>
               </a:rPr>
-              <a:t>pack は自分の persona に必要なページを同梱して持ち歩きます。同じ slug をプロジェクト側に置けば、これまでどおり上書きできます。</a:t>
+              <a:t>pack は、自分の persona に要るページを一緒に持ち歩きます。同じ slug をプロジェクト側に置けば、これまでどおり上書きできます。</a:t>
             </a:r>
             <a:endParaRPr lang="en-US" sz="1100" dirty="0"/>
           </a:p>
@@ -23119,7 +23119,7 @@
                 <a:ea typeface="Arial" pitchFamily="34" charset="-122"/>
                 <a:cs typeface="Arial" pitchFamily="34" charset="-120"/>
               </a:rPr>
-              <a:t>pack の type が決めるのは権限です</a:t>
+              <a:t>pack の type が決めているのは、権限です</a:t>
             </a:r>
             <a:endParaRPr lang="en-US" sz="2700" dirty="0"/>
           </a:p>
@@ -24743,7 +24743,7 @@
                 <a:ea typeface="Arial" pitchFamily="34" charset="-122"/>
                 <a:cs typeface="Arial" pitchFamily="34" charset="-120"/>
               </a:rPr>
-              <a:t>右端の列が、この型モデルがある理由です</a:t>
+              <a:t>右端の列こそ、この型モデルがある理由です</a:t>
             </a:r>
             <a:endParaRPr lang="en-US" sz="1400" dirty="0"/>
           </a:p>
@@ -24785,7 +24785,7 @@
                 <a:ea typeface="Calibri" pitchFamily="34" charset="-122"/>
                 <a:cs typeface="Calibri" pitchFamily="34" charset="-120"/>
               </a:rPr>
-              <a:t>recipe に checks:（ホスト上で実行されるシェルコマンド）を書けるのは tool だけです。他の型が運ぶのは、プロバイダが読むテキストだけです。</a:t>
+              <a:t>recipe に checks:（手元のマシンで動くシェルコマンド）を書けるのは tool だけです。ほかの型が運ぶのは、プロバイダが読むテキストだけになります。</a:t>
             </a:r>
             <a:endParaRPr lang="en-US" sz="1100" dirty="0"/>
           </a:p>
@@ -24900,7 +24900,7 @@
                 <a:ea typeface="Calibri" pitchFamily="34" charset="-122"/>
                 <a:cs typeface="Calibri" pitchFamily="34" charset="-120"/>
               </a:rPr>
-              <a:t>kind（core / official / domain / project）は tier 順を決めるだけです。tier は権限ではありません。</a:t>
+              <a:t>kind（core / official / domain / project）は tier の順番を決めるだけです。tier は権限ではありません。</a:t>
             </a:r>
             <a:endParaRPr lang="en-US" sz="1100" dirty="0"/>
           </a:p>
@@ -24914,12 +24914,12 @@
         </p:nvSpPr>
         <p:spPr>
           <a:xfrm>
-            <a:off x="8092440" y="4800600"/>
-            <a:ext cx="3566160" cy="1097280"/>
+            <a:off x="8092440" y="4846320"/>
+            <a:ext cx="3566160" cy="1280160"/>
           </a:xfrm>
           <a:prstGeom prst="roundRect">
             <a:avLst>
-              <a:gd name="adj" fmla="val 5000"/>
+              <a:gd name="adj" fmla="val 4286"/>
             </a:avLst>
           </a:prstGeom>
           <a:solidFill>
@@ -24948,7 +24948,7 @@
         </p:nvSpPr>
         <p:spPr>
           <a:xfrm>
-            <a:off x="8348472" y="4983480"/>
+            <a:off x="8348472" y="5029200"/>
             <a:ext cx="3054096" cy="320040"/>
           </a:xfrm>
           <a:prstGeom prst="rect">
@@ -24973,7 +24973,7 @@
                 <a:ea typeface="Arial" pitchFamily="34" charset="-122"/>
                 <a:cs typeface="Arial" pitchFamily="34" charset="-120"/>
               </a:rPr>
-              <a:t>既定値を持たせていない理由</a:t>
+              <a:t>初期値を用意していない理由</a:t>
             </a:r>
             <a:endParaRPr lang="en-US" sz="1400" dirty="0"/>
           </a:p>
@@ -24987,8 +24987,8 @@
         </p:nvSpPr>
         <p:spPr>
           <a:xfrm>
-            <a:off x="8348472" y="5367528"/>
-            <a:ext cx="3054096" cy="365760"/>
+            <a:off x="8348472" y="5413248"/>
+            <a:ext cx="3054096" cy="548640"/>
           </a:xfrm>
           <a:prstGeom prst="rect">
             <a:avLst/>
@@ -25015,7 +25015,7 @@
                 <a:ea typeface="Calibri" pitchFamily="34" charset="-122"/>
                 <a:cs typeface="Calibri" pitchFamily="34" charset="-120"/>
               </a:rPr>
-              <a:t>既定値を置くと、その決定を「決めなかった人」に渡してしまうからです。</a:t>
+              <a:t>初期値を置くと、大事な判断を「何も決めなかった人」に押しつけてしまうからです。</a:t>
             </a:r>
             <a:endParaRPr lang="en-US" sz="1100" dirty="0"/>
           </a:p>
@@ -25029,8 +25029,8 @@
         </p:nvSpPr>
         <p:spPr>
           <a:xfrm>
-            <a:off x="502920" y="4434840"/>
-            <a:ext cx="7315200" cy="320040"/>
+            <a:off x="502920" y="4315968"/>
+            <a:ext cx="7315200" cy="457200"/>
           </a:xfrm>
           <a:prstGeom prst="rect">
             <a:avLst/>
@@ -25054,7 +25054,7 @@
                 <a:ea typeface="Arial" pitchFamily="34" charset="-122"/>
                 <a:cs typeface="Arial" pitchFamily="34" charset="-120"/>
               </a:rPr>
-              <a:t>チームのドメイン知識を足すことが、そのままコマンド実行権限を渡すことになってはいけません。ここが型モデルの引く線です。</a:t>
+              <a:t>チームの知識を足すことが、そのままコマンドを動かす権限を渡すことになってはいけません。ここが型モデルの引いている線です。</a:t>
             </a:r>
             <a:endParaRPr lang="en-US" sz="1300" dirty="0"/>
           </a:p>
@@ -25068,12 +25068,12 @@
         </p:nvSpPr>
         <p:spPr>
           <a:xfrm>
-            <a:off x="502920" y="4800600"/>
-            <a:ext cx="7315200" cy="1097280"/>
+            <a:off x="502920" y="4846320"/>
+            <a:ext cx="7315200" cy="1280160"/>
           </a:xfrm>
           <a:prstGeom prst="roundRect">
             <a:avLst>
-              <a:gd name="adj" fmla="val 5000"/>
+              <a:gd name="adj" fmla="val 4286"/>
             </a:avLst>
           </a:prstGeom>
           <a:solidFill>
@@ -25102,7 +25102,7 @@
         </p:nvSpPr>
         <p:spPr>
           <a:xfrm>
-            <a:off x="758952" y="4983480"/>
+            <a:off x="758952" y="5029200"/>
             <a:ext cx="6803136" cy="320040"/>
           </a:xfrm>
           <a:prstGeom prst="rect">
@@ -25127,7 +25127,7 @@
                 <a:ea typeface="Arial" pitchFamily="34" charset="-122"/>
                 <a:cs typeface="Arial" pitchFamily="34" charset="-120"/>
               </a:rPr>
-              <a:t>どの type を選ぶか</a:t>
+              <a:t>どの type を選べばいいか</a:t>
             </a:r>
             <a:endParaRPr lang="en-US" sz="1400" dirty="0"/>
           </a:p>
@@ -25141,8 +25141,8 @@
         </p:nvSpPr>
         <p:spPr>
           <a:xfrm>
-            <a:off x="758952" y="5367528"/>
-            <a:ext cx="6803136" cy="365760"/>
+            <a:off x="758952" y="5413248"/>
+            <a:ext cx="6803136" cy="548640"/>
           </a:xfrm>
           <a:prstGeom prst="rect">
             <a:avLst/>
@@ -25169,7 +25169,7 @@
                 <a:ea typeface="Calibri" pitchFamily="34" charset="-122"/>
                 <a:cs typeface="Calibri" pitchFamily="34" charset="-120"/>
               </a:rPr>
-              <a:t>知識層を配るだけなら knowledge を選びます。persona も一緒に配るなら reviewer、recipe やコマンドまで含むなら skill です。必要以上に強い型を選ばないことが、そのまま受け取る側への安全保証になります。</a:t>
+              <a:t>知識層を配るだけなら knowledge。persona も一緒に配るなら reviewer、recipe やコマンドまで入れるなら skill です。必要以上に強い型を選ばないでおくことが、そのまま受け取る側への安心につながります。</a:t>
             </a:r>
             <a:endParaRPr lang="en-US" sz="1150" dirty="0"/>
           </a:p>
@@ -25279,7 +25279,7 @@
                 <a:ea typeface="Arial" pitchFamily="34" charset="-122"/>
                 <a:cs typeface="Arial" pitchFamily="34" charset="-120"/>
               </a:rPr>
-              <a:t>pack を作る。init → sync → validate → doctor</a:t>
+              <a:t>pack を作ってみる。init → sync → validate → doctor</a:t>
             </a:r>
             <a:endParaRPr lang="en-US" sz="2700" dirty="0"/>
           </a:p>
@@ -25887,7 +25887,7 @@
                 <a:ea typeface="Arial" pitchFamily="34" charset="-122"/>
                 <a:cs typeface="Arial" pitchFamily="34" charset="-120"/>
               </a:rPr>
-              <a:t>pack.yaml は手で編集しません</a:t>
+              <a:t>pack.yaml は手で書きません</a:t>
             </a:r>
             <a:endParaRPr lang="en-US" sz="1400" dirty="0"/>
           </a:p>
@@ -25929,7 +25929,7 @@
                 <a:ea typeface="Calibri" pitchFamily="34" charset="-122"/>
                 <a:cs typeface="Calibri" pitchFamily="34" charset="-120"/>
               </a:rPr>
-              <a:t>全アセットをパスと sha256 で宣言し、検証のときに正準形とバイト単位で比較されます。つまり生成物であって、手書きするものではありません。</a:t>
+              <a:t>中身をぜんぶパスと sha256 で宣言していて、検証のときに一字一句くらべられます。つまり自動で作られるものなので、手で書く場所ではないんです。</a:t>
             </a:r>
             <a:endParaRPr lang="en-US" sz="1100" dirty="0"/>
           </a:p>
@@ -26002,7 +26002,7 @@
                 <a:ea typeface="Arial" pitchFamily="34" charset="-122"/>
                 <a:cs typeface="Arial" pitchFamily="34" charset="-120"/>
               </a:rPr>
-              <a:t>sync はディレクトリを鏡写しにします</a:t>
+              <a:t>sync はフォルダをそのまま写します</a:t>
             </a:r>
             <a:endParaRPr lang="en-US" sz="1400" dirty="0"/>
           </a:p>
@@ -26044,7 +26044,7 @@
                 <a:ea typeface="Calibri" pitchFamily="34" charset="-122"/>
                 <a:cs typeface="Calibri" pitchFamily="34" charset="-120"/>
               </a:rPr>
-              <a:t>消したファイルは宣言からも消えます。書き換わるのは assets と hashes だけで、version・description・entrypoints はあなたのものです。</a:t>
+              <a:t>消したファイルは、宣言のほうからも消えます。書き換わるのは assets と hashes だけ。version・description・entrypoints はあなたのものです。</a:t>
             </a:r>
             <a:endParaRPr lang="en-US" sz="1100" dirty="0"/>
           </a:p>
@@ -26117,7 +26117,7 @@
                 <a:ea typeface="Arial" pitchFamily="34" charset="-122"/>
                 <a:cs typeface="Arial" pitchFamily="34" charset="-120"/>
               </a:rPr>
-              <a:t>valid は「完成」という意味ではありません</a:t>
+              <a:t>valid は「できあがり」ではありません</a:t>
             </a:r>
             <a:endParaRPr lang="en-US" sz="1400" dirty="0"/>
           </a:p>
@@ -26159,7 +26159,7 @@
                 <a:ea typeface="Calibri" pitchFamily="34" charset="-122"/>
                 <a:cs typeface="Calibri" pitchFamily="34" charset="-120"/>
               </a:rPr>
-              <a:t>空の pack もスキーマは満たすので valid と出ます。その状態は doctor が名指ししてくれます。警告では exit 0 を返し、failed だけがエラーです。</a:t>
+              <a:t>中身が空の pack でもスキーマは満たすので、valid と出てしまいます。その状態は doctor が教えてくれます。警告なら exit 0、failed だけがエラーです。</a:t>
             </a:r>
             <a:endParaRPr lang="en-US" sz="1100" dirty="0"/>
           </a:p>
@@ -26269,7 +26269,7 @@
                 <a:ea typeface="Arial" pitchFamily="34" charset="-122"/>
                 <a:cs typeface="Arial" pitchFamily="34" charset="-120"/>
               </a:rPr>
-              <a:t>wiki を入れると、評価ゲートが立ちます</a:t>
+              <a:t>wiki を入れたとたん、評価ゲートが立ちます</a:t>
             </a:r>
             <a:endParaRPr lang="en-US" sz="2700" dirty="0"/>
           </a:p>
@@ -26420,7 +26420,7 @@
                 <a:ea typeface="Arial" pitchFamily="34" charset="-122"/>
                 <a:cs typeface="Arial" pitchFamily="34" charset="-120"/>
               </a:rPr>
-              <a:t>wiki はプロンプト素材です。プロバイダに見せるテキストだからです</a:t>
+              <a:t>wiki はプロンプト素材。プロバイダに見せるテキストだからです</a:t>
             </a:r>
             <a:endParaRPr lang="en-US" sz="1400" dirty="0"/>
           </a:p>
@@ -26462,7 +26462,7 @@
                 <a:ea typeface="Calibri" pitchFamily="34" charset="-122"/>
                 <a:cs typeface="Calibri" pitchFamily="34" charset="-120"/>
               </a:rPr>
-              <a:t>そのため wiki を持つ pack には、承認済みの評価ケースが最低一件必要です。会社の知識ページも、他のプロンプト面と同じ規律で扱われます。これは事故ではなく、意図された挙動です。</a:t>
+              <a:t>なので wiki を持つ pack には、承認ずみの評価ケースが最低ひとつ要ります。会社の知識ページも、ほかのプロンプト面とおなじルールで扱われるわけですね。うっかりそうなったのではなく、そう決めています。</a:t>
             </a:r>
             <a:endParaRPr lang="en-US" sz="1150" dirty="0"/>
           </a:p>
@@ -26840,7 +26840,7 @@
                 <a:ea typeface="Arial" pitchFamily="34" charset="-122"/>
                 <a:cs typeface="Arial" pitchFamily="34" charset="-120"/>
               </a:rPr>
-              <a:t>承認はフラグを立てることではありません</a:t>
+              <a:t>承認は、フラグを立てるだけでは済みません</a:t>
             </a:r>
             <a:endParaRPr lang="en-US" sz="1400" dirty="0"/>
           </a:p>
@@ -26882,7 +26882,7 @@
                 <a:ea typeface="Calibri" pitchFamily="34" charset="-122"/>
                 <a:cs typeface="Calibri" pitchFamily="34" charset="-120"/>
               </a:rPr>
-              <a:t>promote は、閾値を満たさない証拠も、意味的ルーブリックが未判定のケースも拒否します。結果には署名がつくので、編集された結果は閾値を見る前に落ちます。</a:t>
+              <a:t>promote は、しきい値に届かない証拠も、意味のほうを見ていないケースも受けつけません。結果には署名がつくので、手を入れた結果はしきい値を見るより先にはじかれます。</a:t>
             </a:r>
             <a:endParaRPr lang="en-US" sz="1100" dirty="0"/>
           </a:p>
@@ -26955,7 +26955,7 @@
                 <a:ea typeface="Arial" pitchFamily="34" charset="-122"/>
                 <a:cs typeface="Arial" pitchFamily="34" charset="-120"/>
               </a:rPr>
-              <a:t>draft を pack の中に置けない理由</a:t>
+              <a:t>draft を pack の中に置けないわけ</a:t>
             </a:r>
             <a:endParaRPr lang="en-US" sz="1400" dirty="0"/>
           </a:p>
@@ -26997,7 +26997,7 @@
                 <a:ea typeface="Calibri" pitchFamily="34" charset="-122"/>
                 <a:cs typeface="Calibri" pitchFamily="34" charset="-120"/>
               </a:rPr>
-              <a:t>pack は宣言していないものを一切持てないからです。--into が変えるのは行き先だけです。</a:t>
+              <a:t>pack は、宣言していないものを一つも持てないからです。--into が変えるのは行き先だけで、厳しさは変わりません。</a:t>
             </a:r>
             <a:endParaRPr lang="en-US" sz="1100" dirty="0"/>
           </a:p>
@@ -27011,12 +27011,12 @@
         </p:nvSpPr>
         <p:spPr>
           <a:xfrm>
-            <a:off x="502920" y="5029200"/>
-            <a:ext cx="11155680" cy="868680"/>
+            <a:off x="502920" y="4983480"/>
+            <a:ext cx="11155680" cy="1280160"/>
           </a:xfrm>
           <a:prstGeom prst="roundRect">
             <a:avLst>
-              <a:gd name="adj" fmla="val 6316"/>
+              <a:gd name="adj" fmla="val 4286"/>
             </a:avLst>
           </a:prstGeom>
           <a:solidFill>
@@ -27045,7 +27045,7 @@
         </p:nvSpPr>
         <p:spPr>
           <a:xfrm>
-            <a:off x="758952" y="5212080"/>
+            <a:off x="758952" y="5166360"/>
             <a:ext cx="10643616" cy="320040"/>
           </a:xfrm>
           <a:prstGeom prst="rect">
@@ -27070,7 +27070,7 @@
                 <a:ea typeface="Arial" pitchFamily="34" charset="-122"/>
                 <a:cs typeface="Arial" pitchFamily="34" charset="-120"/>
               </a:rPr>
-              <a:t>忘れやすい一手。entrypoint を書かないとケースは走りません</a:t>
+              <a:t>忘れがちな一手。entrypoint がないとケースは走りません</a:t>
             </a:r>
             <a:endParaRPr lang="en-US" sz="1400" dirty="0"/>
           </a:p>
@@ -27084,8 +27084,8 @@
         </p:nvSpPr>
         <p:spPr>
           <a:xfrm>
-            <a:off x="758952" y="5596128"/>
-            <a:ext cx="10643616" cy="137160"/>
+            <a:off x="758952" y="5550408"/>
+            <a:ext cx="10643616" cy="548640"/>
           </a:xfrm>
           <a:prstGeom prst="rect">
             <a:avLst/>
@@ -27112,7 +27112,7 @@
                 <a:ea typeface="Calibri" pitchFamily="34" charset="-122"/>
                 <a:cs typeface="Calibri" pitchFamily="34" charset="-120"/>
               </a:rPr>
-              <a:t>prompt_entrypoint は、マニフェストが宣言する entrypoint を名指しする必要があります（知識 pack では kind: wiki でページ自身）。書き忘れても pack validate は通ります。ただし pack test は structural_only と報告します。ケースは同梱され、ハッシュされ、それでも誰にも実行されません。</a:t>
+              <a:t>prompt_entrypoint には、マニフェストが宣言している entrypoint を書いておく必要があります（知識 pack なら kind: wiki でページ自身）。書き忘れても pack validate は通ってしまいます。でも pack test は structural_only と返します。ケースは同梱されて、ハッシュもされて、それでも誰にも動かされないままです。</a:t>
             </a:r>
             <a:endParaRPr lang="en-US" sz="1100" dirty="0"/>
           </a:p>
@@ -27222,7 +27222,7 @@
                 <a:ea typeface="Arial" pitchFamily="34" charset="-122"/>
                 <a:cs typeface="Arial" pitchFamily="34" charset="-120"/>
               </a:rPr>
-              <a:t>knowledge ブロックで「何についての pack か」を書きます</a:t>
+              <a:t>knowledge ブロックに「何についての pack か」を書きます</a:t>
             </a:r>
             <a:endParaRPr lang="en-US" sz="2700" dirty="0"/>
           </a:p>
@@ -27522,7 +27522,7 @@
                 <a:ea typeface="Calibri" pitchFamily="34" charset="-122"/>
                 <a:cs typeface="Calibri" pitchFamily="34" charset="-120"/>
               </a:rPr>
-              <a:t>ブロック自体は任意です。ただし置いたなら五つとも必須で、半分だけ書くことは許されません</a:t>
+              <a:t>ブロック自体は書かなくても大丈夫です。ただし置いたなら五つとも必須で、半分だけというのは通りません</a:t>
             </a:r>
             <a:endParaRPr lang="en-US" sz="1100" dirty="0"/>
           </a:p>
@@ -27546,7 +27546,7 @@
                 <a:ea typeface="Calibri" pitchFamily="34" charset="-122"/>
                 <a:cs typeface="Calibri" pitchFamily="34" charset="-120"/>
               </a:rPr>
-              <a:t>理由は reviewed_at です。見直し日のない知識宣言こそ、誰にも気づかれずに古びていきます</a:t>
+              <a:t>理由は reviewed_at にあります。見直した日が書いていない知識ほど、誰にも気づかれないまま古くなっていくからです</a:t>
             </a:r>
             <a:endParaRPr lang="en-US" sz="1100" dirty="0"/>
           </a:p>
@@ -27570,7 +27570,7 @@
                 <a:ea typeface="Calibri" pitchFamily="34" charset="-122"/>
                 <a:cs typeface="Calibri" pitchFamily="34" charset="-120"/>
               </a:rPr>
-              <a:t>どの type でも宣言できます。これは説明であって、権限ではありません</a:t>
+              <a:t>どの type でも書けます。これは説明であって、権限の話ではありません</a:t>
             </a:r>
             <a:endParaRPr lang="en-US" sz="1100" dirty="0"/>
           </a:p>
@@ -27594,7 +27594,7 @@
                 <a:ea typeface="Calibri" pitchFamily="34" charset="-122"/>
                 <a:cs typeface="Calibri" pitchFamily="34" charset="-120"/>
               </a:rPr>
-              <a:t>scope は company のような素の次元か、product:northwind-one のような値つきで書きます</a:t>
+              <a:t>scope は company のようにざっくりか、product:northwind-one のように値まで指定して書きます</a:t>
             </a:r>
             <a:endParaRPr lang="en-US" sz="1100" dirty="0"/>
           </a:p>
@@ -27608,12 +27608,12 @@
         </p:nvSpPr>
         <p:spPr>
           <a:xfrm>
-            <a:off x="502920" y="4937760"/>
-            <a:ext cx="5486400" cy="960120"/>
+            <a:off x="502920" y="4846320"/>
+            <a:ext cx="5486400" cy="1371600"/>
           </a:xfrm>
           <a:prstGeom prst="roundRect">
             <a:avLst>
-              <a:gd name="adj" fmla="val 5714"/>
+              <a:gd name="adj" fmla="val 4000"/>
             </a:avLst>
           </a:prstGeom>
           <a:solidFill>
@@ -27642,7 +27642,7 @@
         </p:nvSpPr>
         <p:spPr>
           <a:xfrm>
-            <a:off x="758952" y="5120640"/>
+            <a:off x="758952" y="5029200"/>
             <a:ext cx="4974336" cy="320040"/>
           </a:xfrm>
           <a:prstGeom prst="rect">
@@ -27667,7 +27667,7 @@
                 <a:ea typeface="Arial" pitchFamily="34" charset="-122"/>
                 <a:cs typeface="Arial" pitchFamily="34" charset="-120"/>
               </a:rPr>
-              <a:t>evidence だけはソートを求められません</a:t>
+              <a:t>evidence だけは、並べ替えなくて大丈夫です</a:t>
             </a:r>
             <a:endParaRPr lang="en-US" sz="1400" dirty="0"/>
           </a:p>
@@ -27681,8 +27681,8 @@
         </p:nvSpPr>
         <p:spPr>
           <a:xfrm>
-            <a:off x="758952" y="5504688"/>
-            <a:ext cx="4974336" cy="228600"/>
+            <a:off x="758952" y="5413248"/>
+            <a:ext cx="4974336" cy="640080"/>
           </a:xfrm>
           <a:prstGeom prst="rect">
             <a:avLst/>
@@ -27709,7 +27709,7 @@
                 <a:ea typeface="Calibri" pitchFamily="34" charset="-122"/>
                 <a:cs typeface="Calibri" pitchFamily="34" charset="-120"/>
               </a:rPr>
-              <a:t>人が書いた文書の題名を、書いた言語のまま並べるからです。順序そのものが「主に何に依拠しているか」を表します。重複だけは拒否されます。</a:t>
+              <a:t>人が書いた資料の題名を、その言語のまま並べるからです。順番そのものが「主にどれに寄りかかっているか」を表します。同じものを二度書くのだけは断られます。</a:t>
             </a:r>
             <a:endParaRPr lang="en-US" sz="1050" dirty="0"/>
           </a:p>
@@ -27748,7 +27748,7 @@
                 <a:ea typeface="Arial" pitchFamily="34" charset="-122"/>
                 <a:cs typeface="Arial" pitchFamily="34" charset="-120"/>
               </a:rPr>
-              <a:t>探す。選び出しますが、決めはしません</a:t>
+              <a:t>探す。選び出しはしますが、決めはしません</a:t>
             </a:r>
             <a:endParaRPr lang="en-US" sz="1200" dirty="0"/>
           </a:p>
@@ -28067,12 +28067,12 @@
         </p:nvSpPr>
         <p:spPr>
           <a:xfrm>
-            <a:off x="6355080" y="4480560"/>
-            <a:ext cx="5303520" cy="1554480"/>
+            <a:off x="6355080" y="4343400"/>
+            <a:ext cx="5303520" cy="1737360"/>
           </a:xfrm>
           <a:prstGeom prst="roundRect">
             <a:avLst>
-              <a:gd name="adj" fmla="val 3529"/>
+              <a:gd name="adj" fmla="val 3158"/>
             </a:avLst>
           </a:prstGeom>
           <a:solidFill>
@@ -28101,7 +28101,7 @@
         </p:nvSpPr>
         <p:spPr>
           <a:xfrm>
-            <a:off x="6611112" y="4663440"/>
+            <a:off x="6611112" y="4526280"/>
             <a:ext cx="4791456" cy="320040"/>
           </a:xfrm>
           <a:prstGeom prst="rect">
@@ -28126,7 +28126,7 @@
                 <a:ea typeface="Arial" pitchFamily="34" charset="-122"/>
                 <a:cs typeface="Arial" pitchFamily="34" charset="-120"/>
               </a:rPr>
-              <a:t>どちらのつもりだったかは、どの pack にも書かれていません</a:t>
+              <a:t>どっちのつもりだったかは、どの pack にも書いてありません</a:t>
             </a:r>
             <a:endParaRPr lang="en-US" sz="1400" dirty="0"/>
           </a:p>
@@ -28140,8 +28140,8 @@
         </p:nvSpPr>
         <p:spPr>
           <a:xfrm>
-            <a:off x="6611112" y="5047488"/>
-            <a:ext cx="4791456" cy="822960"/>
+            <a:off x="6611112" y="4910328"/>
+            <a:ext cx="4791456" cy="1005840"/>
           </a:xfrm>
           <a:prstGeom prst="rect">
             <a:avLst/>
@@ -28168,7 +28168,7 @@
                 <a:ea typeface="Calibri" pitchFamily="34" charset="-122"/>
                 <a:cs typeface="Calibri" pitchFamily="34" charset="-120"/>
               </a:rPr>
-              <a:t>それは質問した人についての事実だからです。rig は推測せず、問いが開いていることと、選択肢の正確な集合を返します。影に隠れたページも、隠さずラベルつきで並べます。</a:t>
+              <a:t>それは質問した人のなかにある事実だからです。だから rig は当てにいかず、「まだ決まっていませんよ」ということと、選べる候補をそのまま返します。影に隠れたページも、隠さずラベルをつけて並べます。</a:t>
             </a:r>
             <a:endParaRPr lang="en-US" sz="1050" dirty="0"/>
           </a:p>
@@ -28741,7 +28741,7 @@
                 <a:ea typeface="Arial" pitchFamily="34" charset="-122"/>
                 <a:cs typeface="Arial" pitchFamily="34" charset="-120"/>
               </a:rPr>
-              <a:t>rig は資格情報を一切持ちません</a:t>
+              <a:t>rig は資格情報をひとつも持ちません</a:t>
             </a:r>
             <a:endParaRPr lang="en-US" sz="1400" dirty="0"/>
           </a:p>
@@ -28783,7 +28783,7 @@
                 <a:ea typeface="Calibri" pitchFamily="34" charset="-122"/>
                 <a:cs typeface="Calibri" pitchFamily="34" charset="-120"/>
               </a:rPr>
-              <a:t>git を呼ぶだけで、認証は設定済みのもの（SSH agent・credential helper・CI secret）が答えます。lock が記録するのはソースの名前と commit で、URL は記録しません。</a:t>
+              <a:t>git を呼ぶだけなので、認証はもう設定してあるもの（SSH agent・credential helper・CI secret）が答えてくれます。lock に残るのはソースの名前と commit だけで、URL は書きません。</a:t>
             </a:r>
             <a:endParaRPr lang="en-US" sz="1100" dirty="0"/>
           </a:p>
@@ -29714,7 +29714,7 @@
                 <a:ea typeface="Arial" pitchFamily="34" charset="-122"/>
                 <a:cs typeface="Arial" pitchFamily="34" charset="-120"/>
               </a:rPr>
-              <a:t>「override したのに何も起きない」の正体です</a:t>
+              <a:t>「override したのに何も起きない」の正体</a:t>
             </a:r>
             <a:endParaRPr lang="en-US" sz="1400" dirty="0"/>
           </a:p>
@@ -29756,7 +29756,7 @@
                 <a:ea typeface="Calibri" pitchFamily="34" charset="-122"/>
                 <a:cs typeface="Calibri" pitchFamily="34" charset="-120"/>
               </a:rPr>
-              <a:t>pack はインストール済みで valid なのに、完全に影に隠れている状態です。info は身元しか答えないので、explain で tier 争いの勝敗を見てください。</a:t>
+              <a:t>入っていて valid なのに、まるごと影に隠れている状態です。info は身元しか答えてくれないので、explain で tier の勝ち負けを見てみてください。</a:t>
             </a:r>
             <a:endParaRPr lang="en-US" sz="1100" dirty="0"/>
           </a:p>
@@ -29829,7 +29829,7 @@
                 <a:ea typeface="Arial" pitchFamily="34" charset="-122"/>
                 <a:cs typeface="Arial" pitchFamily="34" charset="-120"/>
               </a:rPr>
-              <a:t>digest は「誰が」を答えません</a:t>
+              <a:t>digest は「誰が」までは答えません</a:t>
             </a:r>
             <a:endParaRPr lang="en-US" sz="1400" dirty="0"/>
           </a:p>
@@ -29871,7 +29871,7 @@
                 <a:ea typeface="Calibri" pitchFamily="34" charset="-122"/>
                 <a:cs typeface="Calibri" pitchFamily="34" charset="-120"/>
               </a:rPr>
-              <a:t>同じバイト列であることだけを保証します。出所を答えるのは署名と trust root です。</a:t>
+              <a:t>同じ中身であることだけを保証してくれます。誰が作ったかを答えるのは、署名と trust root のほうです。</a:t>
             </a:r>
             <a:endParaRPr lang="en-US" sz="1100" dirty="0"/>
           </a:p>
@@ -30132,7 +30132,7 @@
                 <a:ea typeface="Arial" pitchFamily="34" charset="-122"/>
                 <a:cs typeface="Arial" pitchFamily="34" charset="-120"/>
               </a:rPr>
-              <a:t>オーケストレータは「どう動かすか」を決めます。rig が決めるのは「その結果を受け入れてよいか」です。</a:t>
+              <a:t>オーケストレータが決めるのは「どう動かすか」。rig が決めるのは「出てきたものを受け入れていいか」です。</a:t>
             </a:r>
             <a:endParaRPr lang="en-US" sz="1600" dirty="0"/>
           </a:p>
@@ -30171,7 +30171,7 @@
                 <a:ea typeface="Calibri" pitchFamily="34" charset="-122"/>
                 <a:cs typeface="Calibri" pitchFamily="34" charset="-120"/>
               </a:rPr>
-              <a:t>docs/landscape.md より。rig に機能を足すかどうかは、この一行で判断しています。</a:t>
+              <a:t>docs/landscape.md にある一行です。rig に機能を足すかどうかは、いつもここに戻って決めています。</a:t>
             </a:r>
             <a:endParaRPr lang="en-US" sz="1100" dirty="0"/>
           </a:p>
@@ -30347,7 +30347,7 @@
                 <a:ea typeface="Arial" pitchFamily="34" charset="-122"/>
                 <a:cs typeface="Arial" pitchFamily="34" charset="-120"/>
               </a:rPr>
-              <a:t>書く速度だけが上がった</a:t>
+              <a:t>書く速さだけが上がった</a:t>
             </a:r>
             <a:endParaRPr lang="en-US" sz="1250" dirty="0"/>
           </a:p>
@@ -30389,7 +30389,7 @@
                 <a:ea typeface="Calibri" pitchFamily="34" charset="-122"/>
                 <a:cs typeface="Calibri" pitchFamily="34" charset="-120"/>
               </a:rPr>
-              <a:t>コードを書く速度は上がりました。でも、出てきたものを受け入れてよいか判定するのは、相変わらず人間の目視でした。</a:t>
+              <a:t>コードが出てくる速さは、たしかに上がりました。でも、それを受け入れていいかを見るのは、相変わらず人の目だけなんです。</a:t>
             </a:r>
             <a:endParaRPr lang="en-US" sz="1050" dirty="0"/>
           </a:p>
@@ -30526,7 +30526,7 @@
                 <a:ea typeface="Arial" pitchFamily="34" charset="-122"/>
                 <a:cs typeface="Arial" pitchFamily="34" charset="-120"/>
               </a:rPr>
-              <a:t>「できました」に根拠がない</a:t>
+              <a:t>「できました」の根拠がない</a:t>
             </a:r>
             <a:endParaRPr lang="en-US" sz="1250" dirty="0"/>
           </a:p>
@@ -30568,7 +30568,7 @@
                 <a:ea typeface="Calibri" pitchFamily="34" charset="-122"/>
                 <a:cs typeface="Calibri" pitchFamily="34" charset="-120"/>
               </a:rPr>
-              <a:t>モデルが「できました」と言っても、それは完了の根拠になりません。それなのに、他に判断材料がないのが普通でした。</a:t>
+              <a:t>モデルが「できました」と言っても、それだけでは終わった証拠になりません。なのに、ほかに手がかりがないことがほとんどでした。</a:t>
             </a:r>
             <a:endParaRPr lang="en-US" sz="1050" dirty="0"/>
           </a:p>
@@ -30747,7 +30747,7 @@
                 <a:ea typeface="Calibri" pitchFamily="34" charset="-122"/>
                 <a:cs typeface="Calibri" pitchFamily="34" charset="-120"/>
               </a:rPr>
-              <a:t>うまくいかなかった試行が、作業ツリーにそのまま混ざります。何を残して何を捨てるかを考えること自体が手間になります。</a:t>
+              <a:t>うまくいかなかった試しが、そのまま手元に残ってしまいます。どれを残してどれを捨てるか、その仕分けだけでもけっこうな手間です。</a:t>
             </a:r>
             <a:endParaRPr lang="en-US" sz="1050" dirty="0"/>
           </a:p>
@@ -30820,7 +30820,7 @@
                 <a:ea typeface="Arial" pitchFamily="34" charset="-122"/>
                 <a:cs typeface="Arial" pitchFamily="34" charset="-120"/>
               </a:rPr>
-              <a:t>rig が引き受けたのは一箇所だけです</a:t>
+              <a:t>rig が引き受けたのは、ここ一箇所だけ</a:t>
             </a:r>
             <a:endParaRPr lang="en-US" sz="1400" dirty="0"/>
           </a:p>
@@ -30862,7 +30862,7 @@
                 <a:ea typeface="Calibri" pitchFamily="34" charset="-122"/>
                 <a:cs typeface="Calibri" pitchFamily="34" charset="-120"/>
               </a:rPr>
-              <a:t>受け入れの判定を、人間の目視から機械の関門へ移すことです。速く書かせることでも、賢く書かせることでもありません。</a:t>
+              <a:t>受け入れるかどうかの判断を、人の目から機械のゲートへ移すこと。それだけです。速さや賢さを足す話ではありません。</a:t>
             </a:r>
             <a:endParaRPr lang="en-US" sz="1150" dirty="0"/>
           </a:p>
@@ -30935,7 +30935,7 @@
                 <a:ea typeface="Arial" pitchFamily="34" charset="-122"/>
                 <a:cs typeface="Arial" pitchFamily="34" charset="-120"/>
               </a:rPr>
-              <a:t>裏返して言うと</a:t>
+              <a:t>ここ、誤解されがちです</a:t>
             </a:r>
             <a:endParaRPr lang="en-US" sz="1400" dirty="0"/>
           </a:p>
@@ -30977,7 +30977,7 @@
                 <a:ea typeface="Calibri" pitchFamily="34" charset="-122"/>
                 <a:cs typeface="Calibri" pitchFamily="34" charset="-120"/>
               </a:rPr>
-              <a:t>rig は品質を自動的に生みません。あなたが決めた基準を AI に無視させない、それだけです。基準を作るのは人間の仕事のままです。</a:t>
+              <a:t>rig が品質そのものを生んでくれるわけではありません。あなたが決めたルールを AI に飛ばさせない、それだけなんです。ルールを決めるのは、これからも人の仕事です。</a:t>
             </a:r>
             <a:endParaRPr lang="en-US" sz="1150" dirty="0"/>
           </a:p>
@@ -31087,7 +31087,7 @@
                 <a:ea typeface="Arial" pitchFamily="34" charset="-122"/>
                 <a:cs typeface="Arial" pitchFamily="34" charset="-120"/>
               </a:rPr>
-              <a:t>引っかかりやすいところ</a:t>
+              <a:t>つまずきやすいところ</a:t>
             </a:r>
             <a:endParaRPr lang="en-US" sz="2700" dirty="0"/>
           </a:p>
@@ -31302,7 +31302,7 @@
                 <a:ea typeface="Arial" pitchFamily="34" charset="-122"/>
                 <a:cs typeface="Arial" pitchFamily="34" charset="-120"/>
               </a:rPr>
-              <a:t>valid は完成ではありません</a:t>
+              <a:t>valid はできあがりではありません</a:t>
             </a:r>
             <a:endParaRPr lang="en-US" sz="1150" dirty="0"/>
           </a:p>
@@ -31344,7 +31344,7 @@
                 <a:ea typeface="Calibri" pitchFamily="34" charset="-122"/>
                 <a:cs typeface="Calibri" pitchFamily="34" charset="-120"/>
               </a:rPr>
-              <a:t>空の pack も valid になります。doctor の empty_pack 警告を見てください</a:t>
+              <a:t>空の pack でも valid になります。doctor の empty_pack 警告を見てみてください</a:t>
             </a:r>
             <a:endParaRPr lang="en-US" sz="1050" dirty="0"/>
           </a:p>
@@ -31523,7 +31523,7 @@
                 <a:ea typeface="Calibri" pitchFamily="34" charset="-122"/>
                 <a:cs typeface="Calibri" pitchFamily="34" charset="-120"/>
               </a:rPr>
-              <a:t>「たまたま一致する」か「間違っている」かにしかなりません</a:t>
+              <a:t>「たまたま合っている」か「間違っている」かのどちらかにしかなりません</a:t>
             </a:r>
             <a:endParaRPr lang="en-US" sz="1050" dirty="0"/>
           </a:p>
@@ -31702,7 +31702,7 @@
                 <a:ea typeface="Calibri" pitchFamily="34" charset="-122"/>
                 <a:cs typeface="Calibri" pitchFamily="34" charset="-120"/>
               </a:rPr>
-              <a:t>署名を外し、sync してから、鍵で署名し直してください</a:t>
+              <a:t>いったん署名を外して、sync してから、鍵で署名し直してください</a:t>
             </a:r>
             <a:endParaRPr lang="en-US" sz="1050" dirty="0"/>
           </a:p>
@@ -31881,7 +31881,7 @@
                 <a:ea typeface="Calibri" pitchFamily="34" charset="-122"/>
                 <a:cs typeface="Calibri" pitchFamily="34" charset="-120"/>
               </a:rPr>
-              <a:t>command アセットは、明示登録を扱えるホスト向けの資料です</a:t>
+              <a:t>command アセットは、自分で登録できるホスト向けの資料です</a:t>
             </a:r>
             <a:endParaRPr lang="en-US" sz="1050" dirty="0"/>
           </a:p>
@@ -32018,7 +32018,7 @@
                 <a:ea typeface="Arial" pitchFamily="34" charset="-122"/>
                 <a:cs typeface="Arial" pitchFamily="34" charset="-120"/>
               </a:rPr>
-              <a:t>project pack は初回に同意が要ります</a:t>
+              <a:t>project pack は最初に同意が要ります</a:t>
             </a:r>
             <a:endParaRPr lang="en-US" sz="1150" dirty="0"/>
           </a:p>
@@ -32060,7 +32060,7 @@
                 <a:ea typeface="Calibri" pitchFamily="34" charset="-122"/>
                 <a:cs typeface="Calibri" pitchFamily="34" charset="-120"/>
               </a:rPr>
-              <a:t>RIG_ALLOW_PROJECT_PACKS=1 で同意します。同意は内容ハッシュに紐づきます</a:t>
+              <a:t>RIG_ALLOW_PROJECT_PACKS=1 で同意します。同意は中身のハッシュに結びつきます</a:t>
             </a:r>
             <a:endParaRPr lang="en-US" sz="1050" dirty="0"/>
           </a:p>
@@ -32197,7 +32197,7 @@
                 <a:ea typeface="Arial" pitchFamily="34" charset="-122"/>
                 <a:cs typeface="Arial" pitchFamily="34" charset="-120"/>
               </a:rPr>
-              <a:t>user / org は品質検証を回避できません</a:t>
+              <a:t>user / org では品質検証を飛ばせません</a:t>
             </a:r>
             <a:endParaRPr lang="en-US" sz="1150" dirty="0"/>
           </a:p>
@@ -32418,7 +32418,7 @@
                 <a:ea typeface="Calibri" pitchFamily="34" charset="-122"/>
                 <a:cs typeface="Calibri" pitchFamily="34" charset="-120"/>
               </a:rPr>
-              <a:t>結果は non_quality_mock と明示されます</a:t>
+              <a:t>結果に non_quality_mock とはっきり書かれます</a:t>
             </a:r>
             <a:endParaRPr lang="en-US" sz="1050" dirty="0"/>
           </a:p>
@@ -32597,7 +32597,7 @@
                 <a:ea typeface="Calibri" pitchFamily="34" charset="-122"/>
                 <a:cs typeface="Calibri" pitchFamily="34" charset="-120"/>
               </a:rPr>
-              <a:t>private リポジトリの pack も、同じ検証を全部通ります</a:t>
+              <a:t>private リポジトリの pack も、同じ検証をぜんぶ通ります</a:t>
             </a:r>
             <a:endParaRPr lang="en-US" sz="1050" dirty="0"/>
           </a:p>
@@ -32771,7 +32771,7 @@
                 <a:ea typeface="Arial" pitchFamily="34" charset="-122"/>
                 <a:cs typeface="Arial" pitchFamily="34" charset="-120"/>
               </a:rPr>
-              <a:t>まず /rig:go だけ使う</a:t>
+              <a:t>まずは /rig:go だけ使ってみる</a:t>
             </a:r>
             <a:endParaRPr lang="en-US" sz="1500" dirty="0"/>
           </a:p>
@@ -32813,7 +32813,7 @@
                 <a:ea typeface="Calibri" pitchFamily="34" charset="-122"/>
                 <a:cs typeface="Calibri" pitchFamily="34" charset="-120"/>
               </a:rPr>
-              <a:t>diff / accept / discard の四つで一週間やってみてください。ゲートに一度落ちて、なぜ落ちたかを読むところまで来れば、rig が何をする道具かは体で分かります。</a:t>
+              <a:t>diff / accept / discard の四つで、まず一週間やってみてください。ゲートに一度落ちて「なんで落ちたんだろう」と読むところまで来れば、rig がどういう道具かは自然と分かります。</a:t>
             </a:r>
             <a:endParaRPr lang="en-US" sz="1200" dirty="0"/>
           </a:p>
@@ -32916,7 +32916,7 @@
                 <a:ea typeface="Arial" pitchFamily="34" charset="-122"/>
                 <a:cs typeface="Arial" pitchFamily="34" charset="-120"/>
               </a:rPr>
-              <a:t>ページを一枚書く</a:t>
+              <a:t>ページを一枚だけ書いてみる</a:t>
             </a:r>
             <a:endParaRPr lang="en-US" sz="1500" dirty="0"/>
           </a:p>
@@ -32958,7 +32958,7 @@
                 <a:ea typeface="Calibri" pitchFamily="34" charset="-122"/>
                 <a:cs typeface="Calibri" pitchFamily="34" charset="-120"/>
               </a:rPr>
-              <a:t>/rig:knowledge で自分のドメインを一枚書き、persona の inject: から参照させます。効くかどうかは、ここで確かめられます。</a:t>
+              <a:t>/rig:knowledge で自分の領域を一枚書いて、persona の inject: から参照させてみます。効くかどうかは、ここで見えてきます。</a:t>
             </a:r>
             <a:endParaRPr lang="en-US" sz="1200" dirty="0"/>
           </a:p>
@@ -33061,7 +33061,7 @@
                 <a:ea typeface="Arial" pitchFamily="34" charset="-122"/>
                 <a:cs typeface="Arial" pitchFamily="34" charset="-120"/>
               </a:rPr>
-              <a:t>確信してから pack にする</a:t>
+              <a:t>効くと分かってから pack にする</a:t>
             </a:r>
             <a:endParaRPr lang="en-US" sz="1500" dirty="0"/>
           </a:p>
@@ -33103,7 +33103,7 @@
                 <a:ea typeface="Calibri" pitchFamily="34" charset="-122"/>
                 <a:cs typeface="Calibri" pitchFamily="34" charset="-120"/>
               </a:rPr>
-              <a:t>rig-wb pack init --type knowledge で配布物に格上げします。順番を逆にすると、まだ効くか分からないものに評価ケースを書くことになります。</a:t>
+              <a:t>rig-wb pack init --type knowledge で、ちゃんとした配布物にします。順番を逆にすると、まだ効くか分からないものに評価ケースを書くことになってしまいます。</a:t>
             </a:r>
             <a:endParaRPr lang="en-US" sz="1200" dirty="0"/>
           </a:p>
@@ -33142,7 +33142,7 @@
                 <a:ea typeface="Calibri" pitchFamily="34" charset="-122"/>
                 <a:cs typeface="Calibri" pitchFamily="34" charset="-120"/>
               </a:rPr>
-              <a:t>一次資料：README.ja.md（全体像）　／　docs/packs.md（pack の仕様）　／　skills/engine/SKILL.md（ブリック目録の正本）</a:t>
+              <a:t>もとの資料：README.ja.md（全体像）　／　docs/packs.md（pack の仕様）　／　skills/engine/SKILL.md（ブリック一覧の本家）</a:t>
             </a:r>
             <a:endParaRPr lang="en-US" sz="1100" dirty="0"/>
           </a:p>
@@ -33291,7 +33291,7 @@
                 <a:ea typeface="Arial" pitchFamily="34" charset="-122"/>
                 <a:cs typeface="Arial" pitchFamily="34" charset="-120"/>
               </a:rPr>
-              <a:t>よくある AI の使い方と、そこで起きること</a:t>
+              <a:t>よくある AI の使い方と、そこで起きがちなこと</a:t>
             </a:r>
             <a:endParaRPr lang="en-US" sz="2700" dirty="0"/>
           </a:p>
@@ -33548,7 +33548,7 @@
                 <a:ea typeface="Calibri" pitchFamily="34" charset="-122"/>
                 <a:cs typeface="Calibri" pitchFamily="34" charset="-120"/>
               </a:rPr>
-              <a:t>差分の出所が消えます。どこを変えたかは人間の記憶にしか残らず、無関係な変更が混ざっても検出する場所がありません。</a:t>
+              <a:t>どこから来た差分なのかが消えてしまいます。何を変えたかは自分の記憶だけが頼りで、関係ない変更が紛れこんでも気づく場所がありません。</a:t>
             </a:r>
             <a:endParaRPr lang="en-US" sz="1100" dirty="0"/>
           </a:p>
@@ -33727,7 +33727,7 @@
                 <a:ea typeface="Calibri" pitchFamily="34" charset="-122"/>
                 <a:cs typeface="Calibri" pitchFamily="34" charset="-120"/>
               </a:rPr>
-              <a:t>失敗した試行がそのまま手元に残ります。機械的なチェックを誰も配線していなければ、そのチェックは一度も走りません。</a:t>
+              <a:t>うまくいかなかった試しが、そのまま手元に残ります。機械のチェックをどこにもつないでいなければ、そのチェックは一度も動きません。</a:t>
             </a:r>
             <a:endParaRPr lang="en-US" sz="1100" dirty="0"/>
           </a:p>
@@ -33906,7 +33906,7 @@
                 <a:ea typeface="Calibri" pitchFamily="34" charset="-122"/>
                 <a:cs typeface="Calibri" pitchFamily="34" charset="-120"/>
               </a:rPr>
-              <a:t>文章でのお願いは守られないことがあります。「テストを実行して」と書くのと、hook で毎回強制するのとでは信頼性が違います。</a:t>
+              <a:t>文章でのお願いは、守られないことがあります。「テストを流してね」と書いておくのと、hook で毎回かならず動かすのとでは、当てにできる度合いがぜんぜん違います。</a:t>
             </a:r>
             <a:endParaRPr lang="en-US" sz="1100" dirty="0"/>
           </a:p>
@@ -34085,7 +34085,7 @@
                 <a:ea typeface="Calibri" pitchFamily="34" charset="-122"/>
                 <a:cs typeface="Calibri" pitchFamily="34" charset="-120"/>
               </a:rPr>
-              <a:t>書いた側と採点する側が同系統だと、自己評価が甘くなります。しかもそのレビュアーの検出率を、誰も測っていません。</a:t>
+              <a:t>書いた側と採点する側が似たもの同士だと、どうしても自分に甘くなります。しかも、そのレビュアーがどれくらい見つけられるのかを、誰も測っていません。</a:t>
             </a:r>
             <a:endParaRPr lang="en-US" sz="1100" dirty="0"/>
           </a:p>
@@ -34158,7 +34158,7 @@
                 <a:ea typeface="Arial" pitchFamily="34" charset="-122"/>
                 <a:cs typeface="Arial" pitchFamily="34" charset="-120"/>
               </a:rPr>
-              <a:t>四つに共通するのは、失敗したかどうかが分からないことです</a:t>
+              <a:t>四つに共通するのは、うまくいったのか分からないことです</a:t>
             </a:r>
             <a:endParaRPr lang="en-US" sz="1400" dirty="0"/>
           </a:p>
@@ -34200,7 +34200,7 @@
                 <a:ea typeface="Calibri" pitchFamily="34" charset="-122"/>
                 <a:cs typeface="Calibri" pitchFamily="34" charset="-120"/>
               </a:rPr>
-              <a:t>どれも普通に成果は出ます。困るのは失敗する確率ではなく、失敗しても誰も気づかないまま次へ進んでしまうことです。</a:t>
+              <a:t>どれもちゃんと成果は出ます。困るのは失敗する確率ではなくて、失敗しても誰も気づかないまま次へ進んでしまうところなんです。</a:t>
             </a:r>
             <a:endParaRPr lang="en-US" sz="1150" dirty="0"/>
           </a:p>
@@ -34310,7 +34310,7 @@
                 <a:ea typeface="Arial" pitchFamily="34" charset="-122"/>
                 <a:cs typeface="Arial" pitchFamily="34" charset="-120"/>
               </a:rPr>
-              <a:t>原因をたどると、いつも同じ四つの穴に行き着きます</a:t>
+              <a:t>たどっていくと、だいたい同じ四つの穴に行き着きます</a:t>
             </a:r>
             <a:endParaRPr lang="en-US" sz="2700" dirty="0"/>
           </a:p>
@@ -34525,7 +34525,7 @@
                 <a:ea typeface="Arial" pitchFamily="34" charset="-122"/>
                 <a:cs typeface="Arial" pitchFamily="34" charset="-120"/>
               </a:rPr>
-              <a:t>計算的センサーがループに入っていない</a:t>
+              <a:t>機械のチェックがループに入っていない</a:t>
             </a:r>
             <a:endParaRPr lang="en-US" sz="1300" dirty="0"/>
           </a:p>
@@ -34567,7 +34567,7 @@
                 <a:ea typeface="Calibri" pitchFamily="34" charset="-122"/>
                 <a:cs typeface="Calibri" pitchFamily="34" charset="-120"/>
               </a:rPr>
-              <a:t>テストや lint が「ある」だけで、エージェントの実行ループにバックプレッシャーとして入っていません。あることと、効いていることは別です。</a:t>
+              <a:t>テストや lint が「置いてある」だけで、エージェントが回るループの中に入っていません。あることと効いていることは、まったくの別ものです。</a:t>
             </a:r>
             <a:endParaRPr lang="en-US" sz="1100" dirty="0"/>
           </a:p>
@@ -34743,7 +34743,7 @@
                 <a:ea typeface="Arial" pitchFamily="34" charset="-122"/>
                 <a:cs typeface="Arial" pitchFamily="34" charset="-120"/>
               </a:rPr>
-              <a:t>検証ループそのものが無い</a:t>
+              <a:t>たしかめる仕組みがない</a:t>
             </a:r>
             <a:endParaRPr lang="en-US" sz="1300" dirty="0"/>
           </a:p>
@@ -34785,7 +34785,7 @@
                 <a:ea typeface="Calibri" pitchFamily="34" charset="-122"/>
                 <a:cs typeface="Calibri" pitchFamily="34" charset="-120"/>
               </a:rPr>
-              <a:t>モデルに自分の仕事を検証する手段を与えると、品質が 2〜3 倍になると言われています（Boris Cherny）。裏を返せば、手段が無いエージェントは自己評価が甘くなります。</a:t>
+              <a:t>自分の仕事をたしかめる手段をモデルに渡すと、品質が 2〜3 倍になると言われています（Boris Cherny）。裏を返すと、手段がないエージェントは自分に甘くなってしまうんです。</a:t>
             </a:r>
             <a:endParaRPr lang="en-US" sz="1100" dirty="0"/>
           </a:p>
@@ -34961,7 +34961,7 @@
                 <a:ea typeface="Arial" pitchFamily="34" charset="-122"/>
                 <a:cs typeface="Arial" pitchFamily="34" charset="-120"/>
               </a:rPr>
-              <a:t>評価と計測をしていない</a:t>
+              <a:t>効いているかを測っていない</a:t>
             </a:r>
             <a:endParaRPr lang="en-US" sz="1300" dirty="0"/>
           </a:p>
@@ -35003,7 +35003,7 @@
                 <a:ea typeface="Calibri" pitchFamily="34" charset="-122"/>
                 <a:cs typeface="Calibri" pitchFamily="34" charset="-120"/>
               </a:rPr>
-              <a:t>ルールは足したのに、効果を測っていません。よかれと思った追加が逆効果になることもあります（Context Rot。文脈が長いほど性能が落ちる現象です）。</a:t>
+              <a:t>ルールは足したのに、効いたかどうかを見ていません。よかれと思って足したものが、かえって足を引っぱることもあります（Context Rot。文脈が長くなるほど性能が落ちる現象です）。</a:t>
             </a:r>
             <a:endParaRPr lang="en-US" sz="1100" dirty="0"/>
           </a:p>
@@ -35179,7 +35179,7 @@
                 <a:ea typeface="Arial" pitchFamily="34" charset="-122"/>
                 <a:cs typeface="Arial" pitchFamily="34" charset="-120"/>
               </a:rPr>
-              <a:t>ハーネスが厚すぎる</a:t>
+              <a:t>ハーネスが分厚すぎる</a:t>
             </a:r>
             <a:endParaRPr lang="en-US" sz="1300" dirty="0"/>
           </a:p>
@@ -35221,7 +35221,7 @@
                 <a:ea typeface="Calibri" pitchFamily="34" charset="-122"/>
                 <a:cs typeface="Calibri" pitchFamily="34" charset="-120"/>
               </a:rPr>
-              <a:t>Thin Harness, Fat Skills（Garry Tan）という言い方があります。ループ管理は薄く、知能は Skills に、実行は決定論的ツールに委ねます。親ループが太ったら設計を疑ってください。</a:t>
+              <a:t>Thin Harness, Fat Skills（Garry Tan）という言い方があります。ループの管理は薄く、賢さは Skills に、実行は毎回おなじ結果になるツールにおまかせします。親ループが太ってきたら、設計を疑うサインです。</a:t>
             </a:r>
             <a:endParaRPr lang="en-US" sz="1100" dirty="0"/>
           </a:p>
@@ -35299,7 +35299,7 @@
                 <a:ea typeface="Calibri" pitchFamily="34" charset="-122"/>
                 <a:cs typeface="Calibri" pitchFamily="34" charset="-120"/>
               </a:rPr>
-              <a:t>典拠は skills/engine/facets/knowledge/harness-taxonomy.md です。rig 自身が /rig:harness で使っている観点カタログです。</a:t>
+              <a:t>出どころは skills/engine/facets/knowledge/harness-taxonomy.md。rig 自身が /rig:harness で使っている観点のカタログです。</a:t>
             </a:r>
             <a:endParaRPr lang="en-US" sz="1000" dirty="0"/>
           </a:p>
@@ -35409,7 +35409,7 @@
                 <a:ea typeface="Arial" pitchFamily="34" charset="-122"/>
                 <a:cs typeface="Arial" pitchFamily="34" charset="-120"/>
               </a:rPr>
-              <a:t>プロンプトの外側にコンテキスト、その外側にハーネス</a:t>
+              <a:t>プロンプトの外にコンテキスト、その外にハーネスがあります</a:t>
             </a:r>
             <a:endParaRPr lang="en-US" sz="2700" dirty="0"/>
           </a:p>
@@ -35526,7 +35526,7 @@
                 <a:ea typeface="Calibri" pitchFamily="34" charset="-122"/>
                 <a:cs typeface="Calibri" pitchFamily="34" charset="-120"/>
               </a:rPr>
-              <a:t>「〇〇エンジニアリング」は別々の流派ではなく、入れ子になっています。外側を設計しないまま内側だけ磨いても、効果は安定しません。</a:t>
+              <a:t>「〇〇エンジニアリング」は別々の流派ではなくて、入れ子になっています。外側を放っておいて内側だけ磨いても、効き目が安定しないんです。</a:t>
             </a:r>
             <a:endParaRPr lang="en-US" sz="1250" dirty="0"/>
           </a:p>
@@ -35638,7 +35638,7 @@
                 <a:ea typeface="Calibri" pitchFamily="34" charset="-122"/>
                 <a:cs typeface="Calibri" pitchFamily="34" charset="-120"/>
               </a:rPr>
-              <a:t>ループ・ツール・強制・検証・記録まで含めた仕組み全体</a:t>
+              <a:t>ループ・ツール・強制・検証・記録まで、ぜんぶ含めた仕組み</a:t>
             </a:r>
             <a:endParaRPr lang="en-US" sz="1050" dirty="0"/>
           </a:p>
@@ -35743,7 +35743,7 @@
                 <a:ea typeface="Calibri" pitchFamily="34" charset="-122"/>
                 <a:cs typeface="Calibri" pitchFamily="34" charset="-120"/>
               </a:rPr>
-              <a:t>何をどの順で見せるか。知識層・注入・圧縮への耐性</a:t>
+              <a:t>何をどの順で見せるか。知識層と注入、それに圧縮への強さ</a:t>
             </a:r>
             <a:endParaRPr lang="en-US" sz="1050" dirty="0"/>
           </a:p>
@@ -35871,7 +35871,7 @@
                 <a:ea typeface="Calibri" pitchFamily="34" charset="-122"/>
                 <a:cs typeface="Calibri" pitchFamily="34" charset="-120"/>
               </a:rPr>
-              <a:t>条件が変わると同じようには効きません。</a:t>
+              <a:t>条件が変わると、同じようには効いてくれません。</a:t>
             </a:r>
             <a:endParaRPr lang="en-US" sz="1050" dirty="0"/>
           </a:p>
@@ -35920,7 +35920,7 @@
                 <a:ea typeface="Calibri" pitchFamily="34" charset="-122"/>
                 <a:cs typeface="Calibri" pitchFamily="34" charset="-120"/>
               </a:rPr>
-              <a:t>「コンパイラが検査してくれない部分」として扱い、</a:t>
+              <a:t>「コンパイラが見てくれない場所」として扱います。</a:t>
             </a:r>
             <a:endParaRPr lang="en-US" sz="1050" dirty="0"/>
           </a:p>
@@ -35940,7 +35940,7 @@
                 <a:ea typeface="Calibri" pitchFamily="34" charset="-122"/>
                 <a:cs typeface="Calibri" pitchFamily="34" charset="-120"/>
               </a:rPr>
-              <a:t>変更するときは承認済みの評価ケースを求めます。</a:t>
+              <a:t>変えるときは、承認ずみの評価ケースをお願いしています。</a:t>
             </a:r>
             <a:endParaRPr lang="en-US" sz="1050" dirty="0"/>
           </a:p>
@@ -36013,7 +36013,7 @@
                 <a:ea typeface="Arial" pitchFamily="34" charset="-122"/>
                 <a:cs typeface="Arial" pitchFamily="34" charset="-120"/>
               </a:rPr>
-              <a:t>ハーネスは二層に分かれます</a:t>
+              <a:t>ハーネスは二つの層に分かれます</a:t>
             </a:r>
             <a:endParaRPr lang="en-US" sz="1400" dirty="0"/>
           </a:p>
@@ -36055,7 +36055,7 @@
                 <a:ea typeface="Calibri" pitchFamily="34" charset="-122"/>
                 <a:cs typeface="Calibri" pitchFamily="34" charset="-120"/>
               </a:rPr>
-              <a:t>一つはエージェントハーネスで、Claude Code や Codex に内蔵されたループ・ツール・メモリです。もう一つはユーザーハーネスで、使う側が組む CLAUDE.md・Skills・Hooks・MCP・テスト・lint・CI・recipe です。</a:t>
+              <a:t>一つめはエージェントハーネス。Claude Code や Codex に最初から入っているループ・ツール・メモリのことです。二つめはユーザーハーネスで、こちらは使う側が組みます。CLAUDE.md・Skills・Hooks・MCP・テスト・lint・CI・recipe あたりですね。</a:t>
             </a:r>
             <a:endParaRPr lang="en-US" sz="1150" dirty="0"/>
           </a:p>
@@ -36128,7 +36128,7 @@
                 <a:ea typeface="Arial" pitchFamily="34" charset="-122"/>
                 <a:cs typeface="Arial" pitchFamily="34" charset="-120"/>
               </a:rPr>
-              <a:t>rig が作るのは後者だけです</a:t>
+              <a:t>rig が作るのは、二つめだけ</a:t>
             </a:r>
             <a:endParaRPr lang="en-US" sz="1400" dirty="0"/>
           </a:p>
@@ -36170,7 +36170,7 @@
                 <a:ea typeface="Calibri" pitchFamily="34" charset="-122"/>
                 <a:cs typeface="Calibri" pitchFamily="34" charset="-120"/>
               </a:rPr>
-              <a:t>内蔵ループには手を入れません。その外側に、薄い品質・安全レイヤーとして乗ります。</a:t>
+              <a:t>内蔵のループには手を出しません。その外側に、薄い品質・安全の層としてそっと乗ります。</a:t>
             </a:r>
             <a:endParaRPr lang="en-US" sz="1150" dirty="0"/>
           </a:p>
@@ -36243,7 +36243,7 @@
                 <a:ea typeface="Arial" pitchFamily="34" charset="-122"/>
                 <a:cs typeface="Arial" pitchFamily="34" charset="-120"/>
               </a:rPr>
-              <a:t>だから engine は変えません</a:t>
+              <a:t>だから engine はさわりません</a:t>
             </a:r>
             <a:endParaRPr lang="en-US" sz="1400" dirty="0"/>
           </a:p>
@@ -36395,7 +36395,7 @@
                 <a:ea typeface="Arial" pitchFamily="34" charset="-122"/>
                 <a:cs typeface="Arial" pitchFamily="34" charset="-120"/>
               </a:rPr>
-              <a:t>ハーネスを 2×2 で棚卸しすると、足りない場所が見えます</a:t>
+              <a:t>2×2 で並べてみると、足りない場所が見えてきます</a:t>
             </a:r>
             <a:endParaRPr lang="en-US" sz="2700" dirty="0"/>
           </a:p>
@@ -36512,7 +36512,7 @@
                 <a:ea typeface="Calibri" pitchFamily="34" charset="-122"/>
                 <a:cs typeface="Calibri" pitchFamily="34" charset="-120"/>
               </a:rPr>
-              <a:t>軸は二つです。①コードで判定する計算的なものか、LLM が判断する推論的なものか。②先回りして方向づけるガイドか、あとから検知するセンサーか。</a:t>
+              <a:t>軸は二つだけです。①コードで判定する計算的なものか、LLM が判断する推論的なものか。②先回りして方向づけるガイドか、あとから気づかせるセンサーか。</a:t>
             </a:r>
             <a:endParaRPr lang="en-US" sz="1200" dirty="0"/>
           </a:p>
@@ -37349,7 +37349,7 @@
                 <a:ea typeface="Arial" pitchFamily="34" charset="-122"/>
                 <a:cs typeface="Arial" pitchFamily="34" charset="-120"/>
               </a:rPr>
-              <a:t>四象限が揃ってはじめて強くなります</a:t>
+              <a:t>四つそろって、はじめて効きます</a:t>
             </a:r>
             <a:endParaRPr lang="en-US" sz="1400" dirty="0"/>
           </a:p>
@@ -37391,7 +37391,7 @@
                 <a:ea typeface="Calibri" pitchFamily="34" charset="-122"/>
                 <a:cs typeface="Calibri" pitchFamily="34" charset="-120"/>
               </a:rPr>
-              <a:t>レビューはするがテストが無い状態も、テストは通るが設計の妥当性を誰も見ていない状態も、どちらも穴です。</a:t>
+              <a:t>レビューはするけどテストがない。テストは通るけど設計を誰も見ていない。どちらも同じくらい穴です。</a:t>
             </a:r>
             <a:endParaRPr lang="en-US" sz="1100" dirty="0"/>
           </a:p>
@@ -37464,7 +37464,7 @@
                 <a:ea typeface="Arial" pitchFamily="34" charset="-122"/>
                 <a:cs typeface="Arial" pitchFamily="34" charset="-120"/>
               </a:rPr>
-              <a:t>まず計算的センサーから</a:t>
+              <a:t>まずは機械のチェックから</a:t>
             </a:r>
             <a:endParaRPr lang="en-US" sz="1400" dirty="0"/>
           </a:p>
@@ -37506,7 +37506,7 @@
                 <a:ea typeface="Calibri" pitchFamily="34" charset="-122"/>
                 <a:cs typeface="Calibri" pitchFamily="34" charset="-120"/>
               </a:rPr>
-              <a:t>計算的センサーは口説き落とせません。だから一番強いバックプレッシャーになります。推論的センサーはその次に置きます。</a:t>
+              <a:t>機械のチェックは口説き落とせません。だからいちばん強い歯止めになります。AI のレビューは、その次に置くのがおすすめです。</a:t>
             </a:r>
             <a:endParaRPr lang="en-US" sz="1100" dirty="0"/>
           </a:p>
@@ -37579,7 +37579,7 @@
                 <a:ea typeface="Arial" pitchFamily="34" charset="-122"/>
                 <a:cs typeface="Arial" pitchFamily="34" charset="-120"/>
               </a:rPr>
-              <a:t>「存在する」≠「効いている」</a:t>
+              <a:t>「ある」と「効いている」は別もの</a:t>
             </a:r>
             <a:endParaRPr lang="en-US" sz="1400" dirty="0"/>
           </a:p>
@@ -37621,7 +37621,7 @@
                 <a:ea typeface="Calibri" pitchFamily="34" charset="-122"/>
                 <a:cs typeface="Calibri" pitchFamily="34" charset="-120"/>
               </a:rPr>
-              <a:t>どの hook にも acceptance gate にも繋がっていない lint は、ループに何の圧力もかけていません。</a:t>
+              <a:t>どの hook にも acceptance gate にもつながっていない lint は、ループに何の圧力もかけていません。</a:t>
             </a:r>
             <a:endParaRPr lang="en-US" sz="1100" dirty="0"/>
           </a:p>
@@ -37694,7 +37694,7 @@
                 <a:ea typeface="Arial" pitchFamily="34" charset="-122"/>
                 <a:cs typeface="Arial" pitchFamily="34" charset="-120"/>
               </a:rPr>
-              <a:t>この 2×2 は自分のプロジェクトにも当てられます</a:t>
+              <a:t>この 2×2 は、自分のプロジェクトにも当てられます</a:t>
             </a:r>
             <a:endParaRPr lang="en-US" sz="1400" dirty="0"/>
           </a:p>
@@ -37736,7 +37736,7 @@
                 <a:ea typeface="Calibri" pitchFamily="34" charset="-122"/>
                 <a:cs typeface="Calibri" pitchFamily="34" charset="-120"/>
               </a:rPr>
-              <a:t>/rig:harness が読み取り専用で棚卸しし、空いている象限と、あるのに効いていない資産を名指しします。処方は新しいルールを足すことではなく、接続する・強制する・減らすの三つです。</a:t>
+              <a:t>/rig:harness が読み取り専用でぐるっと見わたして、空いている象限と、あるのに効いていない資産を教えてくれます。やることは新しいルールを足すことではなく、つなぐ・効かせる・減らすの三つです。</a:t>
             </a:r>
             <a:endParaRPr lang="en-US" sz="1150" dirty="0"/>
           </a:p>
@@ -37846,7 +37846,7 @@
                 <a:ea typeface="Arial" pitchFamily="34" charset="-122"/>
                 <a:cs typeface="Arial" pitchFamily="34" charset="-120"/>
               </a:rPr>
-              <a:t>よく採られる対応と、それがどこで止まるか</a:t>
+              <a:t>よくある対応と、それがどこで止まってしまうか</a:t>
             </a:r>
             <a:endParaRPr lang="en-US" sz="2700" dirty="0"/>
           </a:p>
@@ -38180,7 +38180,7 @@
                           <a:ea typeface="Calibri" pitchFamily="34" charset="-122"/>
                           <a:cs typeface="Calibri" pitchFamily="34" charset="-120"/>
                         </a:rPr>
-                        <a:t>条件が変わると再現しません。効果を測っていないので、良くなったかどうかも分かりません</a:t>
+                        <a:t>条件が変わると同じようには効きません。測っていないので、良くなったのかどうかも分かりません</a:t>
                       </a:r>
                       <a:endParaRPr lang="en-US" sz="1050" dirty="0">
                         <a:latin typeface="Calibri" charset="0"/>
@@ -38318,7 +38318,7 @@
                           <a:ea typeface="Calibri" pitchFamily="34" charset="-122"/>
                           <a:cs typeface="Calibri" pitchFamily="34" charset="-120"/>
                         </a:rPr>
-                        <a:t>文章でのお願いは、守られないことがあります。足しすぎると文脈が濁って逆効果にもなります</a:t>
+                        <a:t>文章でのお願いは、守られないことがあります。足しすぎると文脈が濁って、かえって逆効果です</a:t>
                       </a:r>
                       <a:endParaRPr lang="en-US" sz="1050" dirty="0">
                         <a:latin typeface="Calibri" charset="0"/>
@@ -38456,7 +38456,7 @@
                           <a:ea typeface="Calibri" pitchFamily="34" charset="-122"/>
                           <a:cs typeface="Calibri" pitchFamily="34" charset="-120"/>
                         </a:rPr>
-                        <a:t>用意しただけでは、エージェントのループの外にあります。人間が CI を待つまで誰も見ません</a:t>
+                        <a:t>置いただけでは、エージェントのループの外にあります。人が CI を待つまで、誰も見ていません</a:t>
                       </a:r>
                       <a:endParaRPr lang="en-US" sz="1050" dirty="0">
                         <a:latin typeface="Calibri" charset="0"/>
@@ -38594,7 +38594,7 @@
                           <a:ea typeface="Calibri" pitchFamily="34" charset="-122"/>
                           <a:cs typeface="Calibri" pitchFamily="34" charset="-120"/>
                         </a:rPr>
-                        <a:t>書いた側と同系統のモデルだと甘くなります。検出率が分からないので、通っても意味があるか判断できません</a:t>
+                        <a:t>書いた側と似たモデルだと甘くなります。どれくらい見つけられるか分からないので、通っても安心できません</a:t>
                       </a:r>
                       <a:endParaRPr lang="en-US" sz="1050" dirty="0">
                         <a:latin typeface="Calibri" charset="0"/>
@@ -38664,7 +38664,7 @@
                           <a:ea typeface="Calibri" pitchFamily="34" charset="-122"/>
                           <a:cs typeface="Calibri" pitchFamily="34" charset="-120"/>
                         </a:rPr>
-                        <a:t>人間のレビューを増やす</a:t>
+                        <a:t>人のレビューを増やす</a:t>
                       </a:r>
                       <a:endParaRPr lang="en-US" sz="1050" dirty="0">
                         <a:latin typeface="Calibri" charset="0"/>
@@ -38732,7 +38732,7 @@
                           <a:ea typeface="Calibri" pitchFamily="34" charset="-122"/>
                           <a:cs typeface="Calibri" pitchFamily="34" charset="-120"/>
                         </a:rPr>
-                        <a:t>人手が足りません。形だけのレビューになっても、そうなったこと自体に気づけません</a:t>
+                        <a:t>人手が続きません。形だけになってしまっても、そうなったこと自体に気づけません</a:t>
                       </a:r>
                       <a:endParaRPr lang="en-US" sz="1050" dirty="0">
                         <a:latin typeface="Calibri" charset="0"/>
@@ -38821,7 +38821,7 @@
                 <a:ea typeface="Arial" pitchFamily="34" charset="-122"/>
                 <a:cs typeface="Arial" pitchFamily="34" charset="-120"/>
               </a:rPr>
-              <a:t>効く順序があります</a:t>
+              <a:t>効く順番があります</a:t>
             </a:r>
             <a:endParaRPr lang="en-US" sz="1200" dirty="0"/>
           </a:p>
@@ -38958,7 +38958,7 @@
                 <a:ea typeface="Arial" pitchFamily="34" charset="-122"/>
                 <a:cs typeface="Arial" pitchFamily="34" charset="-120"/>
               </a:rPr>
-              <a:t>接続する</a:t>
+              <a:t>つなぐ</a:t>
             </a:r>
             <a:endParaRPr lang="en-US" sz="1250" dirty="0"/>
           </a:p>
@@ -39000,7 +39000,7 @@
                 <a:ea typeface="Calibri" pitchFamily="34" charset="-122"/>
                 <a:cs typeface="Calibri" pitchFamily="34" charset="-120"/>
               </a:rPr>
-              <a:t>すでにある lint・型・テストを hook と acceptance gate に繋いで、ループの中へ入れます</a:t>
+              <a:t>すでにある lint・型・テストを hook と acceptance gate につないで、ループの中へ入れます</a:t>
             </a:r>
             <a:endParaRPr lang="en-US" sz="1050" dirty="0"/>
           </a:p>
@@ -39137,7 +39137,7 @@
                 <a:ea typeface="Arial" pitchFamily="34" charset="-122"/>
                 <a:cs typeface="Arial" pitchFamily="34" charset="-120"/>
               </a:rPr>
-              <a:t>強制する</a:t>
+              <a:t>効かせる</a:t>
             </a:r>
             <a:endParaRPr lang="en-US" sz="1250" dirty="0"/>
           </a:p>
@@ -39179,7 +39179,7 @@
                 <a:ea typeface="Calibri" pitchFamily="34" charset="-122"/>
                 <a:cs typeface="Calibri" pitchFamily="34" charset="-120"/>
               </a:rPr>
-              <a:t>大事なルールを、文章でのお願いから決定論的な強制へ移します</a:t>
+              <a:t>大事なルールを、文章でのお願いから、かならず動く仕組みへ移します</a:t>
             </a:r>
             <a:endParaRPr lang="en-US" sz="1050" dirty="0"/>
           </a:p>
@@ -39358,7 +39358,7 @@
                 <a:ea typeface="Calibri" pitchFamily="34" charset="-122"/>
                 <a:cs typeface="Calibri" pitchFamily="34" charset="-120"/>
               </a:rPr>
-              <a:t>効いていないルールを落とします。足したときは、減らす候補も一緒に考えます</a:t>
+              <a:t>効いていないルールは落とします。足すときは、減らす候補もセットで考えておきます</a:t>
             </a:r>
             <a:endParaRPr lang="en-US" sz="1050" dirty="0"/>
           </a:p>
@@ -39431,7 +39431,7 @@
                 <a:ea typeface="Arial" pitchFamily="34" charset="-122"/>
                 <a:cs typeface="Arial" pitchFamily="34" charset="-120"/>
               </a:rPr>
-              <a:t>新しいルールを書くのは最後です</a:t>
+              <a:t>新しいルールを書くのは、いちばん最後</a:t>
             </a:r>
             <a:endParaRPr lang="en-US" sz="1400" dirty="0"/>
           </a:p>
@@ -39473,7 +39473,7 @@
                 <a:ea typeface="Calibri" pitchFamily="34" charset="-122"/>
                 <a:cs typeface="Calibri" pitchFamily="34" charset="-120"/>
               </a:rPr>
-              <a:t>よかれと思って足したルールが、かえって邪魔をすることがあります。まず接続し、次に強制し、そのうえで減らしてください。</a:t>
+              <a:t>よかれと思って足したルールが、かえって邪魔をすることがあります。まずつないで、次に効かせて、そのうえで減らしてみてください。</a:t>
             </a:r>
             <a:endParaRPr lang="en-US" sz="1150" dirty="0"/>
           </a:p>
@@ -39546,7 +39546,7 @@
                 <a:ea typeface="Arial" pitchFamily="34" charset="-122"/>
                 <a:cs typeface="Arial" pitchFamily="34" charset="-120"/>
               </a:rPr>
-              <a:t>効果を測らないと回せません</a:t>
+              <a:t>測らないと、この順番も回せません</a:t>
             </a:r>
             <a:endParaRPr lang="en-US" sz="1400" dirty="0"/>
           </a:p>
@@ -39588,7 +39588,7 @@
                 <a:ea typeface="Calibri" pitchFamily="34" charset="-122"/>
                 <a:cs typeface="Calibri" pitchFamily="34" charset="-120"/>
               </a:rPr>
-              <a:t>何が効いたか分からないままだと、この三つの順序自体が回りません。</a:t>
+              <a:t>何が効いたのか分からないままだと、この三つをぐるぐる回すこと自体ができません。</a:t>
             </a:r>
             <a:endParaRPr lang="en-US" sz="1050" dirty="0"/>
           </a:p>
@@ -39698,7 +39698,7 @@
                 <a:ea typeface="Arial" pitchFamily="34" charset="-122"/>
                 <a:cs typeface="Arial" pitchFamily="34" charset="-120"/>
               </a:rPr>
-              <a:t>rig は四つの象限をこう埋めます</a:t>
+              <a:t>rig は、この四つをこうやって埋めます</a:t>
             </a:r>
             <a:endParaRPr lang="en-US" sz="2700" dirty="0"/>
           </a:p>
@@ -39891,7 +39891,7 @@
                 <a:ea typeface="Calibri" pitchFamily="34" charset="-122"/>
                 <a:cs typeface="Calibri" pitchFamily="34" charset="-120"/>
               </a:rPr>
-              <a:t>hook・manifest（.claude/rig.md）・recipe・scaffold です。作業を始める前に、走らせ方と既定値を決めておきます。</a:t>
+              <a:t>hook・manifest（.claude/rig.md）・recipe・scaffold です。走り出す前に、進め方と初期値を決めておきます。</a:t>
             </a:r>
             <a:endParaRPr lang="en-US" sz="1050" dirty="0"/>
           </a:p>
@@ -40006,7 +40006,7 @@
                 <a:ea typeface="Calibri" pitchFamily="34" charset="-122"/>
                 <a:cs typeface="Calibri" pitchFamily="34" charset="-120"/>
               </a:rPr>
-              <a:t>acceptance-gate の機械検証（build / lint / test / 型）と、決定論センサー（秘密情報・インジェクション・破壊的コマンド・ゲート改竄・schema-diff）です。</a:t>
+              <a:t>acceptance-gate の機械チェック（build / lint / test / 型）と、毎回おなじ結果になるセンサー（秘密情報・インジェクション・危ないコマンド・ゲートの書き換え・schema-diff）です。</a:t>
             </a:r>
             <a:endParaRPr lang="en-US" sz="1050" dirty="0"/>
           </a:p>
@@ -40121,7 +40121,7 @@
                 <a:ea typeface="Calibri" pitchFamily="34" charset="-122"/>
                 <a:cs typeface="Calibri" pitchFamily="34" charset="-120"/>
               </a:rPr>
-              <a:t>persona・instruction・知識層の wiki です。ドメインの前提を、判断する側に持たせます。</a:t>
+              <a:t>persona・instruction・知識層の wiki です。その領域の前提を、判断する側にちゃんと持たせます。</a:t>
             </a:r>
             <a:endParaRPr lang="en-US" sz="1050" dirty="0"/>
           </a:p>
@@ -40236,7 +40236,7 @@
                 <a:ea typeface="Calibri" pitchFamily="34" charset="-122"/>
                 <a:cs typeface="Calibri" pitchFamily="34" charset="-120"/>
               </a:rPr>
-              <a:t>reviewer persona による並列レビューです。読み取り専用をプロセスレベルで強制し、drill で検出率を実測します。</a:t>
+              <a:t>reviewer persona による同時レビューです。読み取り専用をプロセスの段階で固定して、drill でどれくらい見つけられるかを実際に測ります。</a:t>
             </a:r>
             <a:endParaRPr lang="en-US" sz="1050" dirty="0"/>
           </a:p>
@@ -40309,7 +40309,7 @@
                 <a:ea typeface="Arial" pitchFamily="34" charset="-122"/>
                 <a:cs typeface="Arial" pitchFamily="34" charset="-120"/>
               </a:rPr>
-              <a:t>2×2 の外にも、rig 固有のものが二つあります</a:t>
+              <a:t>この 2×2 の外にも、rig ならではのものが二つ</a:t>
             </a:r>
             <a:endParaRPr lang="en-US" sz="1400" dirty="0"/>
           </a:p>
@@ -40351,7 +40351,7 @@
                 <a:ea typeface="Calibri" pitchFamily="34" charset="-122"/>
                 <a:cs typeface="Calibri" pitchFamily="34" charset="-120"/>
               </a:rPr>
-              <a:t>一つは隔離です。判定が終わるまで、成果物は作業ツリーに触れません。もう一つは記録です。何を試して、どの基準で、なぜ受け入れた（あるいは拒否した）かが run log と監査証跡に残ります。</a:t>
+              <a:t>一つめは隔離。判定が終わるまで、できたものは作業ツリーに触れません。二つめは記録です。何を試して、どの基準で、なぜ受け入れた（あるいは断った）かが、run log と監査の記録に残ります。</a:t>
             </a:r>
             <a:endParaRPr lang="en-US" sz="1150" dirty="0"/>
           </a:p>
@@ -40424,7 +40424,7 @@
                 <a:ea typeface="Arial" pitchFamily="34" charset="-122"/>
                 <a:cs typeface="Arial" pitchFamily="34" charset="-120"/>
               </a:rPr>
-              <a:t>引き受けないこと</a:t>
+              <a:t>やらないと決めていること</a:t>
             </a:r>
             <a:endParaRPr lang="en-US" sz="1400" dirty="0"/>
           </a:p>
@@ -40466,7 +40466,7 @@
                 <a:ea typeface="Calibri" pitchFamily="34" charset="-122"/>
                 <a:cs typeface="Calibri" pitchFamily="34" charset="-120"/>
               </a:rPr>
-              <a:t>・IDE や GUI の提供</a:t>
+              <a:t>・IDE や GUI をつくること</a:t>
             </a:r>
             <a:endParaRPr lang="en-US" sz="1100" dirty="0"/>
           </a:p>
@@ -40506,7 +40506,7 @@
                 <a:ea typeface="Calibri" pitchFamily="34" charset="-122"/>
                 <a:cs typeface="Calibri" pitchFamily="34" charset="-120"/>
               </a:rPr>
-              <a:t>・複数モデルの回答を混ぜて一つにすること</a:t>
+              <a:t>・複数モデルの答えを混ぜて一つにすること</a:t>
             </a:r>
             <a:endParaRPr lang="en-US" sz="1100" dirty="0"/>
           </a:p>
@@ -40526,7 +40526,7 @@
                 <a:ea typeface="Calibri" pitchFamily="34" charset="-122"/>
                 <a:cs typeface="Calibri" pitchFamily="34" charset="-120"/>
               </a:rPr>
-              <a:t>・ワークフロー DSL の表現力競争</a:t>
+              <a:t>・ワークフロー DSL の表現力くらべ</a:t>
             </a:r>
             <a:endParaRPr lang="en-US" sz="1100" dirty="0"/>
           </a:p>
@@ -40555,7 +40555,7 @@
                 <a:ea typeface="Calibri" pitchFamily="34" charset="-122"/>
                 <a:cs typeface="Calibri" pitchFamily="34" charset="-120"/>
               </a:rPr>
-              <a:t>rig が複数モデルを使うのは、検証役を生成役から独立させるためです。答えを合成するためではありません。</a:t>
+              <a:t>複数のモデルを使うのは、検証役を書き手から切り離すためです。答えを混ぜ合わせるためではありません。</a:t>
             </a:r>
             <a:endParaRPr lang="en-US" sz="1100" dirty="0"/>
           </a:p>
@@ -40628,7 +40628,7 @@
                 <a:ea typeface="Arial" pitchFamily="34" charset="-122"/>
                 <a:cs typeface="Arial" pitchFamily="34" charset="-120"/>
               </a:rPr>
-              <a:t>はっきり目標にしていること</a:t>
+              <a:t>逆に、めざしていること</a:t>
             </a:r>
             <a:endParaRPr lang="en-US" sz="1400" dirty="0"/>
           </a:p>
@@ -40670,7 +40670,7 @@
                 <a:ea typeface="Calibri" pitchFamily="34" charset="-122"/>
                 <a:cs typeface="Calibri" pitchFamily="34" charset="-120"/>
               </a:rPr>
-              <a:t>他のオーケストレータが作った成果物にも、同じ受け入れ契約を当てます（workbench.py import）。</a:t>
+              <a:t>ほかのオーケストレータが作ったものにも、同じ受け入れの約束を当てられるようにすること（workbench.py import）。</a:t>
             </a:r>
             <a:endParaRPr lang="en-US" sz="1100" dirty="0"/>
           </a:p>

--- a/docs/onboarding/rig-intro.ja.pptx
+++ b/docs/onboarding/rig-intro.ja.pptx
@@ -4230,7 +4230,7 @@
         <p:spPr>
           <a:xfrm>
             <a:off x="1289304" y="2002536"/>
-            <a:ext cx="1078992" cy="320040"/>
+            <a:ext cx="1078992" cy="198438"/>
           </a:xfrm>
           <a:prstGeom prst="rect">
             <a:avLst/>
@@ -4429,7 +4429,7 @@
         <p:spPr>
           <a:xfrm>
             <a:off x="3557016" y="2002536"/>
-            <a:ext cx="1078992" cy="320040"/>
+            <a:ext cx="1078992" cy="198438"/>
           </a:xfrm>
           <a:prstGeom prst="rect">
             <a:avLst/>
@@ -4628,7 +4628,7 @@
         <p:spPr>
           <a:xfrm>
             <a:off x="5824728" y="2002536"/>
-            <a:ext cx="1078992" cy="320040"/>
+            <a:ext cx="1078992" cy="198438"/>
           </a:xfrm>
           <a:prstGeom prst="rect">
             <a:avLst/>
@@ -4827,7 +4827,7 @@
         <p:spPr>
           <a:xfrm>
             <a:off x="8092440" y="2002536"/>
-            <a:ext cx="1078992" cy="320040"/>
+            <a:ext cx="1078992" cy="396875"/>
           </a:xfrm>
           <a:prstGeom prst="rect">
             <a:avLst/>
@@ -5026,7 +5026,7 @@
         <p:spPr>
           <a:xfrm>
             <a:off x="10360152" y="2002536"/>
-            <a:ext cx="1078992" cy="320040"/>
+            <a:ext cx="1078992" cy="396875"/>
           </a:xfrm>
           <a:prstGeom prst="rect">
             <a:avLst/>
@@ -5200,7 +5200,7 @@
         <p:spPr>
           <a:xfrm>
             <a:off x="758952" y="4023360"/>
-            <a:ext cx="3081528" cy="320040"/>
+            <a:ext cx="3081528" cy="222250"/>
           </a:xfrm>
           <a:prstGeom prst="rect">
             <a:avLst/>
@@ -5238,8 +5238,8 @@
         </p:nvSpPr>
         <p:spPr>
           <a:xfrm>
-            <a:off x="758952" y="4407408"/>
-            <a:ext cx="3081528" cy="1005840"/>
+            <a:off x="758952" y="4309618"/>
+            <a:ext cx="3081528" cy="863600"/>
           </a:xfrm>
           <a:prstGeom prst="rect">
             <a:avLst/>
@@ -5315,7 +5315,7 @@
         <p:spPr>
           <a:xfrm>
             <a:off x="4535424" y="4023360"/>
-            <a:ext cx="3081528" cy="320040"/>
+            <a:ext cx="3081528" cy="222250"/>
           </a:xfrm>
           <a:prstGeom prst="rect">
             <a:avLst/>
@@ -5353,8 +5353,8 @@
         </p:nvSpPr>
         <p:spPr>
           <a:xfrm>
-            <a:off x="4535424" y="4407408"/>
-            <a:ext cx="3081528" cy="1005840"/>
+            <a:off x="4535424" y="4309618"/>
+            <a:ext cx="3081528" cy="863600"/>
           </a:xfrm>
           <a:prstGeom prst="rect">
             <a:avLst/>
@@ -5430,7 +5430,7 @@
         <p:spPr>
           <a:xfrm>
             <a:off x="8311896" y="4023360"/>
-            <a:ext cx="3090672" cy="320040"/>
+            <a:ext cx="3090672" cy="222250"/>
           </a:xfrm>
           <a:prstGeom prst="rect">
             <a:avLst/>
@@ -5468,8 +5468,8 @@
         </p:nvSpPr>
         <p:spPr>
           <a:xfrm>
-            <a:off x="8311896" y="4407408"/>
-            <a:ext cx="3090672" cy="1005840"/>
+            <a:off x="8311896" y="4309618"/>
+            <a:ext cx="3090672" cy="863600"/>
           </a:xfrm>
           <a:prstGeom prst="rect">
             <a:avLst/>
@@ -7172,11 +7172,11 @@
         <p:spPr>
           <a:xfrm>
             <a:off x="7726680" y="1371600"/>
-            <a:ext cx="3931920" cy="2194560"/>
+            <a:ext cx="3931920" cy="2331720"/>
           </a:xfrm>
           <a:prstGeom prst="roundRect">
             <a:avLst>
-              <a:gd name="adj" fmla="val 2500"/>
+              <a:gd name="adj" fmla="val 2353"/>
             </a:avLst>
           </a:prstGeom>
           <a:solidFill>
@@ -7206,7 +7206,7 @@
         <p:spPr>
           <a:xfrm>
             <a:off x="7982712" y="1554480"/>
-            <a:ext cx="3419856" cy="320040"/>
+            <a:ext cx="3419856" cy="222250"/>
           </a:xfrm>
           <a:prstGeom prst="rect">
             <a:avLst/>
@@ -7230,7 +7230,7 @@
                 <a:ea typeface="Arial" pitchFamily="34" charset="-122"/>
                 <a:cs typeface="Arial" pitchFamily="34" charset="-120"/>
               </a:rPr>
-              <a:t>rig の現在地</a:t>
+              <a:t>いま、どこまで動いているか</a:t>
             </a:r>
             <a:endParaRPr lang="en-US" sz="1400" dirty="0"/>
           </a:p>
@@ -7244,8 +7244,8 @@
         </p:nvSpPr>
         <p:spPr>
           <a:xfrm>
-            <a:off x="7982712" y="1938528"/>
-            <a:ext cx="3419856" cy="1463040"/>
+            <a:off x="7982712" y="1840738"/>
+            <a:ext cx="3419856" cy="1625600"/>
           </a:xfrm>
           <a:prstGeom prst="rect">
             <a:avLst/>
@@ -7315,12 +7315,12 @@
         </p:nvSpPr>
         <p:spPr>
           <a:xfrm>
-            <a:off x="7726680" y="3703320"/>
-            <a:ext cx="3931920" cy="1874520"/>
+            <a:off x="7726680" y="3840480"/>
+            <a:ext cx="3931920" cy="1737360"/>
           </a:xfrm>
           <a:prstGeom prst="roundRect">
             <a:avLst>
-              <a:gd name="adj" fmla="val 2927"/>
+              <a:gd name="adj" fmla="val 3158"/>
             </a:avLst>
           </a:prstGeom>
           <a:solidFill>
@@ -7349,8 +7349,8 @@
         </p:nvSpPr>
         <p:spPr>
           <a:xfrm>
-            <a:off x="7982712" y="3886200"/>
-            <a:ext cx="3419856" cy="320040"/>
+            <a:off x="7982712" y="4023360"/>
+            <a:ext cx="3419856" cy="222250"/>
           </a:xfrm>
           <a:prstGeom prst="rect">
             <a:avLst/>
@@ -7388,8 +7388,8 @@
         </p:nvSpPr>
         <p:spPr>
           <a:xfrm>
-            <a:off x="7982712" y="4270248"/>
-            <a:ext cx="3419856" cy="1143000"/>
+            <a:off x="7982712" y="4309618"/>
+            <a:ext cx="3419856" cy="609600"/>
           </a:xfrm>
           <a:prstGeom prst="rect">
             <a:avLst/>
@@ -7465,7 +7465,7 @@
         <p:spPr>
           <a:xfrm>
             <a:off x="758952" y="4434840"/>
-            <a:ext cx="6437376" cy="320040"/>
+            <a:ext cx="6437376" cy="222250"/>
           </a:xfrm>
           <a:prstGeom prst="rect">
             <a:avLst/>
@@ -7503,8 +7503,8 @@
         </p:nvSpPr>
         <p:spPr>
           <a:xfrm>
-            <a:off x="758952" y="4818888"/>
-            <a:ext cx="6437376" cy="868680"/>
+            <a:off x="758952" y="4721098"/>
+            <a:ext cx="6437376" cy="812800"/>
           </a:xfrm>
           <a:prstGeom prst="rect">
             <a:avLst/>
@@ -7832,7 +7832,7 @@
         <p:spPr>
           <a:xfrm>
             <a:off x="1289304" y="1545336"/>
-            <a:ext cx="4443984" cy="320040"/>
+            <a:ext cx="4443984" cy="222250"/>
           </a:xfrm>
           <a:prstGeom prst="rect">
             <a:avLst/>
@@ -7870,8 +7870,8 @@
         </p:nvSpPr>
         <p:spPr>
           <a:xfrm>
-            <a:off x="1289304" y="1892808"/>
-            <a:ext cx="4443984" cy="1417320"/>
+            <a:off x="1289304" y="1795018"/>
+            <a:ext cx="4443984" cy="431800"/>
           </a:xfrm>
           <a:prstGeom prst="rect">
             <a:avLst/>
@@ -8107,7 +8107,7 @@
         <p:spPr>
           <a:xfrm>
             <a:off x="7141464" y="1545336"/>
-            <a:ext cx="4443984" cy="320040"/>
+            <a:ext cx="4443984" cy="222250"/>
           </a:xfrm>
           <a:prstGeom prst="rect">
             <a:avLst/>
@@ -8145,8 +8145,8 @@
         </p:nvSpPr>
         <p:spPr>
           <a:xfrm>
-            <a:off x="7141464" y="1892808"/>
-            <a:ext cx="4443984" cy="1417320"/>
+            <a:off x="7141464" y="1795018"/>
+            <a:ext cx="4443984" cy="431800"/>
           </a:xfrm>
           <a:prstGeom prst="rect">
             <a:avLst/>
@@ -8361,12 +8361,12 @@
         </p:nvSpPr>
         <p:spPr>
           <a:xfrm>
-            <a:off x="502920" y="4261104"/>
-            <a:ext cx="5486400" cy="1572768"/>
+            <a:off x="502920" y="4206240"/>
+            <a:ext cx="5486400" cy="1737360"/>
           </a:xfrm>
           <a:prstGeom prst="roundRect">
             <a:avLst>
-              <a:gd name="adj" fmla="val 2907"/>
+              <a:gd name="adj" fmla="val 2632"/>
             </a:avLst>
           </a:prstGeom>
           <a:solidFill>
@@ -8395,8 +8395,8 @@
         </p:nvSpPr>
         <p:spPr>
           <a:xfrm>
-            <a:off x="704088" y="4407408"/>
-            <a:ext cx="5084064" cy="1280160"/>
+            <a:off x="704088" y="4352544"/>
+            <a:ext cx="5084064" cy="1444752"/>
           </a:xfrm>
           <a:prstGeom prst="rect">
             <a:avLst/>
@@ -8546,12 +8546,12 @@
         </p:nvSpPr>
         <p:spPr>
           <a:xfrm>
-            <a:off x="6355080" y="4261104"/>
-            <a:ext cx="5486400" cy="1572768"/>
+            <a:off x="6355080" y="4206240"/>
+            <a:ext cx="5486400" cy="1737360"/>
           </a:xfrm>
           <a:prstGeom prst="roundRect">
             <a:avLst>
-              <a:gd name="adj" fmla="val 2907"/>
+              <a:gd name="adj" fmla="val 2632"/>
             </a:avLst>
           </a:prstGeom>
           <a:solidFill>
@@ -8580,8 +8580,8 @@
         </p:nvSpPr>
         <p:spPr>
           <a:xfrm>
-            <a:off x="6556248" y="4407408"/>
-            <a:ext cx="5084064" cy="1280160"/>
+            <a:off x="6556248" y="4352544"/>
+            <a:ext cx="5084064" cy="1444752"/>
           </a:xfrm>
           <a:prstGeom prst="rect">
             <a:avLst/>
@@ -8722,7 +8722,7 @@
         </p:nvSpPr>
         <p:spPr>
           <a:xfrm>
-            <a:off x="502920" y="5907024"/>
+            <a:off x="502920" y="5998464"/>
             <a:ext cx="5486400" cy="274320"/>
           </a:xfrm>
           <a:prstGeom prst="rect">
@@ -8761,7 +8761,7 @@
         </p:nvSpPr>
         <p:spPr>
           <a:xfrm>
-            <a:off x="6355080" y="5907024"/>
+            <a:off x="6355080" y="5998464"/>
             <a:ext cx="5486400" cy="274320"/>
           </a:xfrm>
           <a:prstGeom prst="rect">
@@ -9126,7 +9126,7 @@
         <p:spPr>
           <a:xfrm>
             <a:off x="1289304" y="1911096"/>
-            <a:ext cx="4443984" cy="320040"/>
+            <a:ext cx="4443984" cy="222250"/>
           </a:xfrm>
           <a:prstGeom prst="rect">
             <a:avLst/>
@@ -9164,8 +9164,8 @@
         </p:nvSpPr>
         <p:spPr>
           <a:xfrm>
-            <a:off x="1289304" y="2258568"/>
-            <a:ext cx="4443984" cy="1143000"/>
+            <a:off x="1289304" y="2160778"/>
+            <a:ext cx="4443984" cy="812800"/>
           </a:xfrm>
           <a:prstGeom prst="rect">
             <a:avLst/>
@@ -9305,7 +9305,7 @@
         <p:spPr>
           <a:xfrm>
             <a:off x="7141464" y="1911096"/>
-            <a:ext cx="4443984" cy="320040"/>
+            <a:ext cx="4443984" cy="222250"/>
           </a:xfrm>
           <a:prstGeom prst="rect">
             <a:avLst/>
@@ -9343,8 +9343,8 @@
         </p:nvSpPr>
         <p:spPr>
           <a:xfrm>
-            <a:off x="7141464" y="2258568"/>
-            <a:ext cx="4443984" cy="1143000"/>
+            <a:off x="7141464" y="2160778"/>
+            <a:ext cx="4443984" cy="812800"/>
           </a:xfrm>
           <a:prstGeom prst="rect">
             <a:avLst/>
@@ -9484,7 +9484,7 @@
         <p:spPr>
           <a:xfrm>
             <a:off x="1289304" y="3968496"/>
-            <a:ext cx="4443984" cy="320040"/>
+            <a:ext cx="4443984" cy="222250"/>
           </a:xfrm>
           <a:prstGeom prst="rect">
             <a:avLst/>
@@ -9522,8 +9522,8 @@
         </p:nvSpPr>
         <p:spPr>
           <a:xfrm>
-            <a:off x="1289304" y="4315968"/>
-            <a:ext cx="4443984" cy="1143000"/>
+            <a:off x="1289304" y="4218178"/>
+            <a:ext cx="4443984" cy="812800"/>
           </a:xfrm>
           <a:prstGeom prst="rect">
             <a:avLst/>
@@ -9663,7 +9663,7 @@
         <p:spPr>
           <a:xfrm>
             <a:off x="7141464" y="3968496"/>
-            <a:ext cx="4443984" cy="320040"/>
+            <a:ext cx="4443984" cy="222250"/>
           </a:xfrm>
           <a:prstGeom prst="rect">
             <a:avLst/>
@@ -9701,8 +9701,8 @@
         </p:nvSpPr>
         <p:spPr>
           <a:xfrm>
-            <a:off x="7141464" y="4315968"/>
-            <a:ext cx="4443984" cy="1143000"/>
+            <a:off x="7141464" y="4218178"/>
+            <a:ext cx="4443984" cy="812800"/>
           </a:xfrm>
           <a:prstGeom prst="rect">
             <a:avLst/>
@@ -9839,7 +9839,7 @@
                 <a:ea typeface="Arial" pitchFamily="34" charset="-122"/>
                 <a:cs typeface="Arial" pitchFamily="34" charset="-120"/>
               </a:rPr>
-              <a:t>柱 ① 隔離された worktree</a:t>
+              <a:t>① 隔離された worktree</a:t>
             </a:r>
             <a:endParaRPr lang="en-US" sz="2700" dirty="0"/>
           </a:p>
@@ -10444,7 +10444,7 @@
         <p:spPr>
           <a:xfrm>
             <a:off x="7342632" y="4297680"/>
-            <a:ext cx="4242816" cy="320040"/>
+            <a:ext cx="4242816" cy="222250"/>
           </a:xfrm>
           <a:prstGeom prst="rect">
             <a:avLst/>
@@ -10482,8 +10482,8 @@
         </p:nvSpPr>
         <p:spPr>
           <a:xfrm>
-            <a:off x="7342632" y="4681728"/>
-            <a:ext cx="4242816" cy="731520"/>
+            <a:off x="7342632" y="4583938"/>
+            <a:ext cx="4242816" cy="812800"/>
           </a:xfrm>
           <a:prstGeom prst="rect">
             <a:avLst/>
@@ -10620,7 +10620,7 @@
                 <a:ea typeface="Arial" pitchFamily="34" charset="-122"/>
                 <a:cs typeface="Arial" pitchFamily="34" charset="-120"/>
               </a:rPr>
-              <a:t>柱 ② acceptance-gate は standard ＋ 種別プリセット</a:t>
+              <a:t>② acceptance-gate は standard ＋ 種別プリセット</a:t>
             </a:r>
             <a:endParaRPr lang="en-US" sz="2700" dirty="0"/>
           </a:p>
@@ -11869,7 +11869,7 @@
         <p:spPr>
           <a:xfrm>
             <a:off x="8622792" y="1481328"/>
-            <a:ext cx="2779776" cy="320040"/>
+            <a:ext cx="2779776" cy="222250"/>
           </a:xfrm>
           <a:prstGeom prst="rect">
             <a:avLst/>
@@ -11907,8 +11907,8 @@
         </p:nvSpPr>
         <p:spPr>
           <a:xfrm>
-            <a:off x="8622792" y="1865376"/>
-            <a:ext cx="2779776" cy="1234440"/>
+            <a:off x="8622792" y="1767586"/>
+            <a:ext cx="2779776" cy="952500"/>
           </a:xfrm>
           <a:prstGeom prst="rect">
             <a:avLst/>
@@ -11984,7 +11984,7 @@
         <p:spPr>
           <a:xfrm>
             <a:off x="8622792" y="3566160"/>
-            <a:ext cx="2779776" cy="320040"/>
+            <a:ext cx="2779776" cy="222250"/>
           </a:xfrm>
           <a:prstGeom prst="rect">
             <a:avLst/>
@@ -12022,8 +12022,8 @@
         </p:nvSpPr>
         <p:spPr>
           <a:xfrm>
-            <a:off x="8622792" y="3950208"/>
-            <a:ext cx="2779776" cy="1554480"/>
+            <a:off x="8622792" y="3852418"/>
+            <a:ext cx="2779776" cy="1143000"/>
           </a:xfrm>
           <a:prstGeom prst="rect">
             <a:avLst/>
@@ -12228,7 +12228,7 @@
                 <a:ea typeface="Arial" pitchFamily="34" charset="-122"/>
                 <a:cs typeface="Arial" pitchFamily="34" charset="-120"/>
               </a:rPr>
-              <a:t>基準は自己申告ではなく、機械が裏づけてくれます</a:t>
+              <a:t>基準は、機械が裏づけてくれます</a:t>
             </a:r>
             <a:endParaRPr lang="en-US" sz="2700" dirty="0"/>
           </a:p>
@@ -12355,7 +12355,7 @@
         <p:spPr>
           <a:xfrm>
             <a:off x="758952" y="1481328"/>
-            <a:ext cx="4974336" cy="320040"/>
+            <a:ext cx="4974336" cy="182563"/>
           </a:xfrm>
           <a:prstGeom prst="rect">
             <a:avLst/>
@@ -12393,8 +12393,8 @@
         </p:nvSpPr>
         <p:spPr>
           <a:xfrm>
-            <a:off x="758952" y="1865376"/>
-            <a:ext cx="4974336" cy="347472"/>
+            <a:off x="758952" y="1727898"/>
+            <a:ext cx="4974336" cy="355600"/>
           </a:xfrm>
           <a:prstGeom prst="rect">
             <a:avLst/>
@@ -12470,7 +12470,7 @@
         <p:spPr>
           <a:xfrm>
             <a:off x="6611112" y="1481328"/>
-            <a:ext cx="4974336" cy="320040"/>
+            <a:ext cx="4974336" cy="182563"/>
           </a:xfrm>
           <a:prstGeom prst="rect">
             <a:avLst/>
@@ -12508,8 +12508,8 @@
         </p:nvSpPr>
         <p:spPr>
           <a:xfrm>
-            <a:off x="6611112" y="1865376"/>
-            <a:ext cx="4974336" cy="347472"/>
+            <a:off x="6611112" y="1727898"/>
+            <a:ext cx="4974336" cy="355600"/>
           </a:xfrm>
           <a:prstGeom prst="rect">
             <a:avLst/>
@@ -12585,7 +12585,7 @@
         <p:spPr>
           <a:xfrm>
             <a:off x="758952" y="2715768"/>
-            <a:ext cx="4974336" cy="320040"/>
+            <a:ext cx="4974336" cy="182563"/>
           </a:xfrm>
           <a:prstGeom prst="rect">
             <a:avLst/>
@@ -12623,8 +12623,8 @@
         </p:nvSpPr>
         <p:spPr>
           <a:xfrm>
-            <a:off x="758952" y="3099816"/>
-            <a:ext cx="4974336" cy="347472"/>
+            <a:off x="758952" y="2962339"/>
+            <a:ext cx="4974336" cy="355600"/>
           </a:xfrm>
           <a:prstGeom prst="rect">
             <a:avLst/>
@@ -12700,7 +12700,7 @@
         <p:spPr>
           <a:xfrm>
             <a:off x="6611112" y="2715768"/>
-            <a:ext cx="4974336" cy="320040"/>
+            <a:ext cx="4974336" cy="182563"/>
           </a:xfrm>
           <a:prstGeom prst="rect">
             <a:avLst/>
@@ -12738,8 +12738,8 @@
         </p:nvSpPr>
         <p:spPr>
           <a:xfrm>
-            <a:off x="6611112" y="3099816"/>
-            <a:ext cx="4974336" cy="347472"/>
+            <a:off x="6611112" y="2962339"/>
+            <a:ext cx="4974336" cy="355600"/>
           </a:xfrm>
           <a:prstGeom prst="rect">
             <a:avLst/>
@@ -12815,7 +12815,7 @@
         <p:spPr>
           <a:xfrm>
             <a:off x="758952" y="3950208"/>
-            <a:ext cx="4974336" cy="320040"/>
+            <a:ext cx="4974336" cy="182563"/>
           </a:xfrm>
           <a:prstGeom prst="rect">
             <a:avLst/>
@@ -12853,8 +12853,8 @@
         </p:nvSpPr>
         <p:spPr>
           <a:xfrm>
-            <a:off x="758952" y="4334256"/>
-            <a:ext cx="4974336" cy="347472"/>
+            <a:off x="758952" y="4196779"/>
+            <a:ext cx="4974336" cy="355600"/>
           </a:xfrm>
           <a:prstGeom prst="rect">
             <a:avLst/>
@@ -12930,7 +12930,7 @@
         <p:spPr>
           <a:xfrm>
             <a:off x="6611112" y="3950208"/>
-            <a:ext cx="4974336" cy="320040"/>
+            <a:ext cx="4974336" cy="182563"/>
           </a:xfrm>
           <a:prstGeom prst="rect">
             <a:avLst/>
@@ -12968,8 +12968,8 @@
         </p:nvSpPr>
         <p:spPr>
           <a:xfrm>
-            <a:off x="6611112" y="4334256"/>
-            <a:ext cx="4974336" cy="347472"/>
+            <a:off x="6611112" y="4196779"/>
+            <a:ext cx="4974336" cy="355600"/>
           </a:xfrm>
           <a:prstGeom prst="rect">
             <a:avLst/>
@@ -13010,12 +13010,12 @@
         </p:nvSpPr>
         <p:spPr>
           <a:xfrm>
-            <a:off x="502920" y="5120640"/>
-            <a:ext cx="11155680" cy="868680"/>
+            <a:off x="502920" y="5029200"/>
+            <a:ext cx="11155680" cy="1051560"/>
           </a:xfrm>
           <a:prstGeom prst="roundRect">
             <a:avLst>
-              <a:gd name="adj" fmla="val 6316"/>
+              <a:gd name="adj" fmla="val 5217"/>
             </a:avLst>
           </a:prstGeom>
           <a:solidFill>
@@ -13044,8 +13044,8 @@
         </p:nvSpPr>
         <p:spPr>
           <a:xfrm>
-            <a:off x="758952" y="5303520"/>
-            <a:ext cx="10643616" cy="320040"/>
+            <a:off x="758952" y="5212080"/>
+            <a:ext cx="10643616" cy="222250"/>
           </a:xfrm>
           <a:prstGeom prst="rect">
             <a:avLst/>
@@ -13083,8 +13083,8 @@
         </p:nvSpPr>
         <p:spPr>
           <a:xfrm>
-            <a:off x="758952" y="5687568"/>
-            <a:ext cx="10643616" cy="137160"/>
+            <a:off x="758952" y="5498338"/>
+            <a:ext cx="10643616" cy="381000"/>
           </a:xfrm>
           <a:prstGeom prst="rect">
             <a:avLst/>
@@ -13221,7 +13221,7 @@
                 <a:ea typeface="Arial" pitchFamily="34" charset="-122"/>
                 <a:cs typeface="Arial" pitchFamily="34" charset="-120"/>
               </a:rPr>
-              <a:t>柱 ③ read-only な検証役　／　柱 ④ 明示的な accept</a:t>
+              <a:t>③ read-only な検証役　／　④ 明示的な accept</a:t>
             </a:r>
             <a:endParaRPr lang="en-US" sz="2700" dirty="0"/>
           </a:p>
@@ -13781,8 +13781,8 @@
         </p:nvSpPr>
         <p:spPr>
           <a:xfrm>
-            <a:off x="6355080" y="3154680"/>
-            <a:ext cx="5486400" cy="1828800"/>
+            <a:off x="6355080" y="3108960"/>
+            <a:ext cx="5486400" cy="1600200"/>
           </a:xfrm>
           <a:prstGeom prst="rect">
             <a:avLst/>
@@ -14054,12 +14054,12 @@
         </p:nvSpPr>
         <p:spPr>
           <a:xfrm>
-            <a:off x="6355080" y="4773168"/>
-            <a:ext cx="5486400" cy="868680"/>
+            <a:off x="6355080" y="4754880"/>
+            <a:ext cx="5486400" cy="1188720"/>
           </a:xfrm>
           <a:prstGeom prst="roundRect">
             <a:avLst>
-              <a:gd name="adj" fmla="val 6316"/>
+              <a:gd name="adj" fmla="val 4615"/>
             </a:avLst>
           </a:prstGeom>
           <a:solidFill>
@@ -14088,8 +14088,8 @@
         </p:nvSpPr>
         <p:spPr>
           <a:xfrm>
-            <a:off x="6611112" y="4956048"/>
-            <a:ext cx="4974336" cy="320040"/>
+            <a:off x="6611112" y="4937760"/>
+            <a:ext cx="4974336" cy="222250"/>
           </a:xfrm>
           <a:prstGeom prst="rect">
             <a:avLst/>
@@ -14127,8 +14127,8 @@
         </p:nvSpPr>
         <p:spPr>
           <a:xfrm>
-            <a:off x="6611112" y="5340096"/>
-            <a:ext cx="4974336" cy="137160"/>
+            <a:off x="6611112" y="5224018"/>
+            <a:ext cx="4974336" cy="533400"/>
           </a:xfrm>
           <a:prstGeom prst="rect">
             <a:avLst/>
@@ -14392,7 +14392,7 @@
         <p:spPr>
           <a:xfrm>
             <a:off x="758952" y="1481328"/>
-            <a:ext cx="2139696" cy="320040"/>
+            <a:ext cx="2139696" cy="238125"/>
           </a:xfrm>
           <a:prstGeom prst="rect">
             <a:avLst/>
@@ -14430,8 +14430,8 @@
         </p:nvSpPr>
         <p:spPr>
           <a:xfrm>
-            <a:off x="758952" y="1865376"/>
-            <a:ext cx="2139696" cy="1097280"/>
+            <a:off x="758952" y="1783461"/>
+            <a:ext cx="2139696" cy="762000"/>
           </a:xfrm>
           <a:prstGeom prst="rect">
             <a:avLst/>
@@ -14536,7 +14536,7 @@
         <p:spPr>
           <a:xfrm>
             <a:off x="3593592" y="1481328"/>
-            <a:ext cx="2139696" cy="320040"/>
+            <a:ext cx="2139696" cy="238125"/>
           </a:xfrm>
           <a:prstGeom prst="rect">
             <a:avLst/>
@@ -14574,8 +14574,8 @@
         </p:nvSpPr>
         <p:spPr>
           <a:xfrm>
-            <a:off x="3593592" y="1865376"/>
-            <a:ext cx="2139696" cy="1097280"/>
+            <a:off x="3593592" y="1783461"/>
+            <a:ext cx="2139696" cy="762000"/>
           </a:xfrm>
           <a:prstGeom prst="rect">
             <a:avLst/>
@@ -14680,7 +14680,7 @@
         <p:spPr>
           <a:xfrm>
             <a:off x="6428232" y="1481328"/>
-            <a:ext cx="2139696" cy="320040"/>
+            <a:ext cx="2139696" cy="238125"/>
           </a:xfrm>
           <a:prstGeom prst="rect">
             <a:avLst/>
@@ -14718,8 +14718,8 @@
         </p:nvSpPr>
         <p:spPr>
           <a:xfrm>
-            <a:off x="6428232" y="1865376"/>
-            <a:ext cx="2139696" cy="1097280"/>
+            <a:off x="6428232" y="1783461"/>
+            <a:ext cx="2139696" cy="762000"/>
           </a:xfrm>
           <a:prstGeom prst="rect">
             <a:avLst/>
@@ -14824,7 +14824,7 @@
         <p:spPr>
           <a:xfrm>
             <a:off x="9262872" y="1481328"/>
-            <a:ext cx="2139696" cy="320040"/>
+            <a:ext cx="2139696" cy="238125"/>
           </a:xfrm>
           <a:prstGeom prst="rect">
             <a:avLst/>
@@ -14862,8 +14862,8 @@
         </p:nvSpPr>
         <p:spPr>
           <a:xfrm>
-            <a:off x="9262872" y="1865376"/>
-            <a:ext cx="2139696" cy="1097280"/>
+            <a:off x="9262872" y="1783461"/>
+            <a:ext cx="2139696" cy="762000"/>
           </a:xfrm>
           <a:prstGeom prst="rect">
             <a:avLst/>
@@ -15963,7 +15963,7 @@
                 <a:ea typeface="Arial" pitchFamily="34" charset="-122"/>
                 <a:cs typeface="Arial" pitchFamily="34" charset="-120"/>
               </a:rPr>
-              <a:t>この資料の地図</a:t>
+              <a:t>今日の流れ</a:t>
             </a:r>
             <a:endParaRPr lang="en-US" sz="2700" dirty="0"/>
           </a:p>
@@ -17822,7 +17822,7 @@
         <p:spPr>
           <a:xfrm>
             <a:off x="758952" y="3337560"/>
-            <a:ext cx="4974336" cy="320040"/>
+            <a:ext cx="4974336" cy="222250"/>
           </a:xfrm>
           <a:prstGeom prst="rect">
             <a:avLst/>
@@ -17860,8 +17860,8 @@
         </p:nvSpPr>
         <p:spPr>
           <a:xfrm>
-            <a:off x="758952" y="3721608"/>
-            <a:ext cx="4974336" cy="1645920"/>
+            <a:off x="758952" y="3623818"/>
+            <a:ext cx="4974336" cy="1422400"/>
           </a:xfrm>
           <a:prstGeom prst="rect">
             <a:avLst/>
@@ -18251,7 +18251,7 @@
                 <a:ea typeface="Arial" pitchFamily="34" charset="-122"/>
                 <a:cs typeface="Arial" pitchFamily="34" charset="-120"/>
               </a:rPr>
-              <a:t>コマンドの地図。上から順に、必要になったら覚えれば大丈夫</a:t>
+              <a:t>コマンド一覧。上から順に、必要になったら覚えれば大丈夫</a:t>
             </a:r>
             <a:endParaRPr lang="en-US" sz="2700" dirty="0"/>
           </a:p>
@@ -19374,7 +19374,7 @@
         <p:spPr>
           <a:xfrm>
             <a:off x="758952" y="4983480"/>
-            <a:ext cx="4974336" cy="320040"/>
+            <a:ext cx="4974336" cy="222250"/>
           </a:xfrm>
           <a:prstGeom prst="rect">
             <a:avLst/>
@@ -19412,8 +19412,8 @@
         </p:nvSpPr>
         <p:spPr>
           <a:xfrm>
-            <a:off x="758952" y="5367528"/>
-            <a:ext cx="4974336" cy="365760"/>
+            <a:off x="758952" y="5269738"/>
+            <a:ext cx="4974336" cy="215900"/>
           </a:xfrm>
           <a:prstGeom prst="rect">
             <a:avLst/>
@@ -19489,7 +19489,7 @@
         <p:spPr>
           <a:xfrm>
             <a:off x="6611112" y="4983480"/>
-            <a:ext cx="4791456" cy="320040"/>
+            <a:ext cx="4791456" cy="222250"/>
           </a:xfrm>
           <a:prstGeom prst="rect">
             <a:avLst/>
@@ -19527,8 +19527,8 @@
         </p:nvSpPr>
         <p:spPr>
           <a:xfrm>
-            <a:off x="6611112" y="5367528"/>
-            <a:ext cx="4791456" cy="365760"/>
+            <a:off x="6611112" y="5269738"/>
+            <a:ext cx="4791456" cy="431800"/>
           </a:xfrm>
           <a:prstGeom prst="rect">
             <a:avLst/>
@@ -19837,7 +19837,7 @@
                 <a:ea typeface="Arial" pitchFamily="34" charset="-122"/>
                 <a:cs typeface="Arial" pitchFamily="34" charset="-120"/>
               </a:rPr>
-              <a:t>知識層って何でしょう。そして、なぜ二種類あるのか</a:t>
+              <a:t>知識層って何でしょう。なぜ二種類あるのか</a:t>
             </a:r>
             <a:endParaRPr lang="en-US" sz="2700" dirty="0"/>
           </a:p>
@@ -19930,11 +19930,11 @@
         <p:spPr>
           <a:xfrm>
             <a:off x="502920" y="1298448"/>
-            <a:ext cx="11155680" cy="868680"/>
+            <a:ext cx="11155680" cy="1051560"/>
           </a:xfrm>
           <a:prstGeom prst="roundRect">
             <a:avLst>
-              <a:gd name="adj" fmla="val 6316"/>
+              <a:gd name="adj" fmla="val 5217"/>
             </a:avLst>
           </a:prstGeom>
           <a:solidFill>
@@ -19964,7 +19964,7 @@
         <p:spPr>
           <a:xfrm>
             <a:off x="758952" y="1481328"/>
-            <a:ext cx="10643616" cy="320040"/>
+            <a:ext cx="10643616" cy="222250"/>
           </a:xfrm>
           <a:prstGeom prst="rect">
             <a:avLst/>
@@ -20002,8 +20002,8 @@
         </p:nvSpPr>
         <p:spPr>
           <a:xfrm>
-            <a:off x="758952" y="1865376"/>
-            <a:ext cx="10643616" cy="137160"/>
+            <a:off x="758952" y="1767586"/>
+            <a:ext cx="10643616" cy="381000"/>
           </a:xfrm>
           <a:prstGeom prst="rect">
             <a:avLst/>
@@ -20051,7 +20051,7 @@
           </p:nvPr>
         </p:nvGraphicFramePr>
         <p:xfrm>
-          <a:off x="502920" y="2377440"/>
+          <a:off x="502920" y="2468880"/>
           <a:ext cx="7680960" cy="914400"/>
         </p:xfrm>
         <a:graphic>
@@ -21527,7 +21527,7 @@
         </p:nvSpPr>
         <p:spPr>
           <a:xfrm>
-            <a:off x="8458200" y="2377440"/>
+            <a:off x="8458200" y="2468880"/>
             <a:ext cx="3200400" cy="1600200"/>
           </a:xfrm>
           <a:prstGeom prst="roundRect">
@@ -21561,8 +21561,8 @@
         </p:nvSpPr>
         <p:spPr>
           <a:xfrm>
-            <a:off x="8714232" y="2560320"/>
-            <a:ext cx="2688336" cy="320040"/>
+            <a:off x="8714232" y="2651760"/>
+            <a:ext cx="2688336" cy="444500"/>
           </a:xfrm>
           <a:prstGeom prst="rect">
             <a:avLst/>
@@ -21600,8 +21600,8 @@
         </p:nvSpPr>
         <p:spPr>
           <a:xfrm>
-            <a:off x="8714232" y="2944368"/>
-            <a:ext cx="2688336" cy="868680"/>
+            <a:off x="8714232" y="3160268"/>
+            <a:ext cx="2688336" cy="381000"/>
           </a:xfrm>
           <a:prstGeom prst="rect">
             <a:avLst/>
@@ -21677,7 +21677,7 @@
         <p:spPr>
           <a:xfrm>
             <a:off x="8714232" y="4297680"/>
-            <a:ext cx="2688336" cy="320040"/>
+            <a:ext cx="2688336" cy="222250"/>
           </a:xfrm>
           <a:prstGeom prst="rect">
             <a:avLst/>
@@ -21715,8 +21715,8 @@
         </p:nvSpPr>
         <p:spPr>
           <a:xfrm>
-            <a:off x="8714232" y="4681728"/>
-            <a:ext cx="2688336" cy="1097280"/>
+            <a:off x="8714232" y="4583938"/>
+            <a:ext cx="2688336" cy="762000"/>
           </a:xfrm>
           <a:prstGeom prst="rect">
             <a:avLst/>
@@ -22041,8 +22041,8 @@
         </p:nvSpPr>
         <p:spPr>
           <a:xfrm>
-            <a:off x="502920" y="2240280"/>
-            <a:ext cx="5394960" cy="1920240"/>
+            <a:off x="502920" y="2194560"/>
+            <a:ext cx="5394960" cy="2057400"/>
           </a:xfrm>
           <a:prstGeom prst="rect">
             <a:avLst/>
@@ -22943,7 +22943,7 @@
         <p:spPr>
           <a:xfrm>
             <a:off x="758952" y="4617720"/>
-            <a:ext cx="4882896" cy="320040"/>
+            <a:ext cx="4882896" cy="222250"/>
           </a:xfrm>
           <a:prstGeom prst="rect">
             <a:avLst/>
@@ -22981,8 +22981,8 @@
         </p:nvSpPr>
         <p:spPr>
           <a:xfrm>
-            <a:off x="758952" y="5001768"/>
-            <a:ext cx="4882896" cy="640080"/>
+            <a:off x="758952" y="4903978"/>
+            <a:ext cx="4882896" cy="381000"/>
           </a:xfrm>
           <a:prstGeom prst="rect">
             <a:avLst/>
@@ -24719,7 +24719,7 @@
         <p:spPr>
           <a:xfrm>
             <a:off x="8348472" y="1481328"/>
-            <a:ext cx="3054096" cy="320040"/>
+            <a:ext cx="3054096" cy="444500"/>
           </a:xfrm>
           <a:prstGeom prst="rect">
             <a:avLst/>
@@ -24757,8 +24757,8 @@
         </p:nvSpPr>
         <p:spPr>
           <a:xfrm>
-            <a:off x="8348472" y="1865376"/>
-            <a:ext cx="3054096" cy="1280160"/>
+            <a:off x="8348472" y="1989836"/>
+            <a:ext cx="3054096" cy="762000"/>
           </a:xfrm>
           <a:prstGeom prst="rect">
             <a:avLst/>
@@ -24834,7 +24834,7 @@
         <p:spPr>
           <a:xfrm>
             <a:off x="8348472" y="3611880"/>
-            <a:ext cx="3054096" cy="320040"/>
+            <a:ext cx="3054096" cy="222250"/>
           </a:xfrm>
           <a:prstGeom prst="rect">
             <a:avLst/>
@@ -24872,8 +24872,8 @@
         </p:nvSpPr>
         <p:spPr>
           <a:xfrm>
-            <a:off x="8348472" y="3995928"/>
-            <a:ext cx="3054096" cy="502920"/>
+            <a:off x="8348472" y="3898138"/>
+            <a:ext cx="3054096" cy="571500"/>
           </a:xfrm>
           <a:prstGeom prst="rect">
             <a:avLst/>
@@ -24949,7 +24949,7 @@
         <p:spPr>
           <a:xfrm>
             <a:off x="8348472" y="5029200"/>
-            <a:ext cx="3054096" cy="320040"/>
+            <a:ext cx="3054096" cy="222250"/>
           </a:xfrm>
           <a:prstGeom prst="rect">
             <a:avLst/>
@@ -24987,8 +24987,8 @@
         </p:nvSpPr>
         <p:spPr>
           <a:xfrm>
-            <a:off x="8348472" y="5413248"/>
-            <a:ext cx="3054096" cy="548640"/>
+            <a:off x="8348472" y="5315458"/>
+            <a:ext cx="3054096" cy="381000"/>
           </a:xfrm>
           <a:prstGeom prst="rect">
             <a:avLst/>
@@ -25103,7 +25103,7 @@
         <p:spPr>
           <a:xfrm>
             <a:off x="758952" y="5029200"/>
-            <a:ext cx="6803136" cy="320040"/>
+            <a:ext cx="6803136" cy="222250"/>
           </a:xfrm>
           <a:prstGeom prst="rect">
             <a:avLst/>
@@ -25141,8 +25141,8 @@
         </p:nvSpPr>
         <p:spPr>
           <a:xfrm>
-            <a:off x="758952" y="5413248"/>
-            <a:ext cx="6803136" cy="548640"/>
+            <a:off x="758952" y="5315458"/>
+            <a:ext cx="6803136" cy="571500"/>
           </a:xfrm>
           <a:prstGeom prst="rect">
             <a:avLst/>
@@ -25863,7 +25863,7 @@
         <p:spPr>
           <a:xfrm>
             <a:off x="7525512" y="1481328"/>
-            <a:ext cx="3877056" cy="320040"/>
+            <a:ext cx="3877056" cy="222250"/>
           </a:xfrm>
           <a:prstGeom prst="rect">
             <a:avLst/>
@@ -25901,8 +25901,8 @@
         </p:nvSpPr>
         <p:spPr>
           <a:xfrm>
-            <a:off x="7525512" y="1865376"/>
-            <a:ext cx="3877056" cy="777240"/>
+            <a:off x="7525512" y="1767586"/>
+            <a:ext cx="3877056" cy="571500"/>
           </a:xfrm>
           <a:prstGeom prst="rect">
             <a:avLst/>
@@ -25978,7 +25978,7 @@
         <p:spPr>
           <a:xfrm>
             <a:off x="7525512" y="3108960"/>
-            <a:ext cx="3877056" cy="320040"/>
+            <a:ext cx="3877056" cy="222250"/>
           </a:xfrm>
           <a:prstGeom prst="rect">
             <a:avLst/>
@@ -26016,8 +26016,8 @@
         </p:nvSpPr>
         <p:spPr>
           <a:xfrm>
-            <a:off x="7525512" y="3493008"/>
-            <a:ext cx="3877056" cy="777240"/>
+            <a:off x="7525512" y="3395218"/>
+            <a:ext cx="3877056" cy="571500"/>
           </a:xfrm>
           <a:prstGeom prst="rect">
             <a:avLst/>
@@ -26093,7 +26093,7 @@
         <p:spPr>
           <a:xfrm>
             <a:off x="7525512" y="4736592"/>
-            <a:ext cx="3877056" cy="320040"/>
+            <a:ext cx="3877056" cy="222250"/>
           </a:xfrm>
           <a:prstGeom prst="rect">
             <a:avLst/>
@@ -26131,8 +26131,8 @@
         </p:nvSpPr>
         <p:spPr>
           <a:xfrm>
-            <a:off x="7525512" y="5120640"/>
-            <a:ext cx="3877056" cy="612648"/>
+            <a:off x="7525512" y="5022850"/>
+            <a:ext cx="3877056" cy="571500"/>
           </a:xfrm>
           <a:prstGeom prst="rect">
             <a:avLst/>
@@ -26362,11 +26362,11 @@
         <p:spPr>
           <a:xfrm>
             <a:off x="502920" y="1298448"/>
-            <a:ext cx="11155680" cy="777240"/>
+            <a:ext cx="11155680" cy="1051560"/>
           </a:xfrm>
           <a:prstGeom prst="roundRect">
             <a:avLst>
-              <a:gd name="adj" fmla="val 7059"/>
+              <a:gd name="adj" fmla="val 5217"/>
             </a:avLst>
           </a:prstGeom>
           <a:solidFill>
@@ -26396,7 +26396,7 @@
         <p:spPr>
           <a:xfrm>
             <a:off x="758952" y="1481328"/>
-            <a:ext cx="10643616" cy="320040"/>
+            <a:ext cx="10643616" cy="222250"/>
           </a:xfrm>
           <a:prstGeom prst="rect">
             <a:avLst/>
@@ -26434,8 +26434,8 @@
         </p:nvSpPr>
         <p:spPr>
           <a:xfrm>
-            <a:off x="758952" y="1865376"/>
-            <a:ext cx="10643616" cy="45720"/>
+            <a:off x="758952" y="1767586"/>
+            <a:ext cx="10643616" cy="381000"/>
           </a:xfrm>
           <a:prstGeom prst="rect">
             <a:avLst/>
@@ -26476,12 +26476,12 @@
         </p:nvSpPr>
         <p:spPr>
           <a:xfrm>
-            <a:off x="502920" y="2286000"/>
-            <a:ext cx="6766560" cy="2606040"/>
+            <a:off x="502920" y="2450592"/>
+            <a:ext cx="6766560" cy="2468880"/>
           </a:xfrm>
           <a:prstGeom prst="roundRect">
             <a:avLst>
-              <a:gd name="adj" fmla="val 1754"/>
+              <a:gd name="adj" fmla="val 1852"/>
             </a:avLst>
           </a:prstGeom>
           <a:solidFill>
@@ -26510,8 +26510,8 @@
         </p:nvSpPr>
         <p:spPr>
           <a:xfrm>
-            <a:off x="704088" y="2432304"/>
-            <a:ext cx="6364224" cy="2313432"/>
+            <a:off x="704088" y="2596896"/>
+            <a:ext cx="6364224" cy="2176272"/>
           </a:xfrm>
           <a:prstGeom prst="rect">
             <a:avLst/>
@@ -26781,7 +26781,7 @@
         </p:nvSpPr>
         <p:spPr>
           <a:xfrm>
-            <a:off x="7543800" y="2286000"/>
+            <a:off x="7543800" y="2450592"/>
             <a:ext cx="4114800" cy="1371600"/>
           </a:xfrm>
           <a:prstGeom prst="roundRect">
@@ -26815,8 +26815,8 @@
         </p:nvSpPr>
         <p:spPr>
           <a:xfrm>
-            <a:off x="7799832" y="2468880"/>
-            <a:ext cx="3602736" cy="320040"/>
+            <a:off x="7799832" y="2633472"/>
+            <a:ext cx="3602736" cy="222250"/>
           </a:xfrm>
           <a:prstGeom prst="rect">
             <a:avLst/>
@@ -26854,8 +26854,8 @@
         </p:nvSpPr>
         <p:spPr>
           <a:xfrm>
-            <a:off x="7799832" y="2852928"/>
-            <a:ext cx="3602736" cy="640080"/>
+            <a:off x="7799832" y="2919730"/>
+            <a:ext cx="3602736" cy="762000"/>
           </a:xfrm>
           <a:prstGeom prst="rect">
             <a:avLst/>
@@ -26896,12 +26896,12 @@
         </p:nvSpPr>
         <p:spPr>
           <a:xfrm>
-            <a:off x="7543800" y="3767328"/>
-            <a:ext cx="4114800" cy="1124712"/>
+            <a:off x="7543800" y="3931920"/>
+            <a:ext cx="4114800" cy="1051560"/>
           </a:xfrm>
           <a:prstGeom prst="roundRect">
             <a:avLst>
-              <a:gd name="adj" fmla="val 4878"/>
+              <a:gd name="adj" fmla="val 5217"/>
             </a:avLst>
           </a:prstGeom>
           <a:solidFill>
@@ -26930,8 +26930,8 @@
         </p:nvSpPr>
         <p:spPr>
           <a:xfrm>
-            <a:off x="7799832" y="3950208"/>
-            <a:ext cx="3602736" cy="320040"/>
+            <a:off x="7799832" y="4114800"/>
+            <a:ext cx="3602736" cy="222250"/>
           </a:xfrm>
           <a:prstGeom prst="rect">
             <a:avLst/>
@@ -26969,8 +26969,8 @@
         </p:nvSpPr>
         <p:spPr>
           <a:xfrm>
-            <a:off x="7799832" y="4334256"/>
-            <a:ext cx="3602736" cy="393192"/>
+            <a:off x="7799832" y="4401058"/>
+            <a:ext cx="3602736" cy="381000"/>
           </a:xfrm>
           <a:prstGeom prst="rect">
             <a:avLst/>
@@ -26997,7 +26997,7 @@
                 <a:ea typeface="Calibri" pitchFamily="34" charset="-122"/>
                 <a:cs typeface="Calibri" pitchFamily="34" charset="-120"/>
               </a:rPr>
-              <a:t>pack は、宣言していないものを一つも持てないからです。--into が変えるのは行き先だけで、厳しさは変わりません。</a:t>
+              <a:t>pack は宣言していないものを持てないからです。--into が変えるのは行き先だけです。</a:t>
             </a:r>
             <a:endParaRPr lang="en-US" sz="1100" dirty="0"/>
           </a:p>
@@ -27011,12 +27011,12 @@
         </p:nvSpPr>
         <p:spPr>
           <a:xfrm>
-            <a:off x="502920" y="4983480"/>
-            <a:ext cx="11155680" cy="1280160"/>
+            <a:off x="502920" y="5029200"/>
+            <a:ext cx="11155680" cy="1234440"/>
           </a:xfrm>
           <a:prstGeom prst="roundRect">
             <a:avLst>
-              <a:gd name="adj" fmla="val 4286"/>
+              <a:gd name="adj" fmla="val 4444"/>
             </a:avLst>
           </a:prstGeom>
           <a:solidFill>
@@ -27045,8 +27045,8 @@
         </p:nvSpPr>
         <p:spPr>
           <a:xfrm>
-            <a:off x="758952" y="5166360"/>
-            <a:ext cx="10643616" cy="320040"/>
+            <a:off x="758952" y="5212080"/>
+            <a:ext cx="10643616" cy="222250"/>
           </a:xfrm>
           <a:prstGeom prst="rect">
             <a:avLst/>
@@ -27070,7 +27070,7 @@
                 <a:ea typeface="Arial" pitchFamily="34" charset="-122"/>
                 <a:cs typeface="Arial" pitchFamily="34" charset="-120"/>
               </a:rPr>
-              <a:t>忘れがちな一手。entrypoint がないとケースは走りません</a:t>
+              <a:t>entrypoint を書き忘れると、ケースは走りません</a:t>
             </a:r>
             <a:endParaRPr lang="en-US" sz="1400" dirty="0"/>
           </a:p>
@@ -27084,8 +27084,8 @@
         </p:nvSpPr>
         <p:spPr>
           <a:xfrm>
-            <a:off x="758952" y="5550408"/>
-            <a:ext cx="10643616" cy="548640"/>
+            <a:off x="758952" y="5498338"/>
+            <a:ext cx="10643616" cy="381000"/>
           </a:xfrm>
           <a:prstGeom prst="rect">
             <a:avLst/>
@@ -27490,8 +27490,8 @@
         </p:nvSpPr>
         <p:spPr>
           <a:xfrm>
-            <a:off x="502920" y="3035808"/>
-            <a:ext cx="5486400" cy="1737360"/>
+            <a:off x="502920" y="3017520"/>
+            <a:ext cx="5486400" cy="1828800"/>
           </a:xfrm>
           <a:prstGeom prst="rect">
             <a:avLst/>
@@ -27643,7 +27643,7 @@
         <p:spPr>
           <a:xfrm>
             <a:off x="758952" y="5029200"/>
-            <a:ext cx="4974336" cy="320040"/>
+            <a:ext cx="4974336" cy="222250"/>
           </a:xfrm>
           <a:prstGeom prst="rect">
             <a:avLst/>
@@ -27681,8 +27681,8 @@
         </p:nvSpPr>
         <p:spPr>
           <a:xfrm>
-            <a:off x="758952" y="5413248"/>
-            <a:ext cx="4974336" cy="640080"/>
+            <a:off x="758952" y="5315458"/>
+            <a:ext cx="4974336" cy="533400"/>
           </a:xfrm>
           <a:prstGeom prst="rect">
             <a:avLst/>
@@ -28067,7 +28067,7 @@
         </p:nvSpPr>
         <p:spPr>
           <a:xfrm>
-            <a:off x="6355080" y="4343400"/>
+            <a:off x="6355080" y="4480560"/>
             <a:ext cx="5303520" cy="1737360"/>
           </a:xfrm>
           <a:prstGeom prst="roundRect">
@@ -28101,8 +28101,8 @@
         </p:nvSpPr>
         <p:spPr>
           <a:xfrm>
-            <a:off x="6611112" y="4526280"/>
-            <a:ext cx="4791456" cy="320040"/>
+            <a:off x="6611112" y="4663440"/>
+            <a:ext cx="4791456" cy="444500"/>
           </a:xfrm>
           <a:prstGeom prst="rect">
             <a:avLst/>
@@ -28140,8 +28140,8 @@
         </p:nvSpPr>
         <p:spPr>
           <a:xfrm>
-            <a:off x="6611112" y="4910328"/>
-            <a:ext cx="4791456" cy="1005840"/>
+            <a:off x="6611112" y="5171948"/>
+            <a:ext cx="4791456" cy="533400"/>
           </a:xfrm>
           <a:prstGeom prst="rect">
             <a:avLst/>
@@ -28717,7 +28717,7 @@
         <p:spPr>
           <a:xfrm>
             <a:off x="758952" y="4645152"/>
-            <a:ext cx="5157216" cy="320040"/>
+            <a:ext cx="5157216" cy="222250"/>
           </a:xfrm>
           <a:prstGeom prst="rect">
             <a:avLst/>
@@ -28755,8 +28755,8 @@
         </p:nvSpPr>
         <p:spPr>
           <a:xfrm>
-            <a:off x="758952" y="5029200"/>
-            <a:ext cx="5157216" cy="685800"/>
+            <a:off x="758952" y="4931410"/>
+            <a:ext cx="5157216" cy="571500"/>
           </a:xfrm>
           <a:prstGeom prst="rect">
             <a:avLst/>
@@ -29690,7 +29690,7 @@
         <p:spPr>
           <a:xfrm>
             <a:off x="6793992" y="3611880"/>
-            <a:ext cx="4608576" cy="320040"/>
+            <a:ext cx="4608576" cy="222250"/>
           </a:xfrm>
           <a:prstGeom prst="rect">
             <a:avLst/>
@@ -29728,8 +29728,8 @@
         </p:nvSpPr>
         <p:spPr>
           <a:xfrm>
-            <a:off x="6793992" y="3995928"/>
-            <a:ext cx="4608576" cy="685800"/>
+            <a:off x="6793992" y="3898138"/>
+            <a:ext cx="4608576" cy="571500"/>
           </a:xfrm>
           <a:prstGeom prst="rect">
             <a:avLst/>
@@ -29770,12 +29770,12 @@
         </p:nvSpPr>
         <p:spPr>
           <a:xfrm>
-            <a:off x="6537960" y="4983480"/>
-            <a:ext cx="5120640" cy="896112"/>
+            <a:off x="6537960" y="4846320"/>
+            <a:ext cx="5120640" cy="1051560"/>
           </a:xfrm>
           <a:prstGeom prst="roundRect">
             <a:avLst>
-              <a:gd name="adj" fmla="val 6122"/>
+              <a:gd name="adj" fmla="val 5217"/>
             </a:avLst>
           </a:prstGeom>
           <a:solidFill>
@@ -29804,8 +29804,8 @@
         </p:nvSpPr>
         <p:spPr>
           <a:xfrm>
-            <a:off x="6793992" y="5166360"/>
-            <a:ext cx="4608576" cy="320040"/>
+            <a:off x="6793992" y="5029200"/>
+            <a:ext cx="4608576" cy="222250"/>
           </a:xfrm>
           <a:prstGeom prst="rect">
             <a:avLst/>
@@ -29843,8 +29843,8 @@
         </p:nvSpPr>
         <p:spPr>
           <a:xfrm>
-            <a:off x="6793992" y="5550408"/>
-            <a:ext cx="4608576" cy="164592"/>
+            <a:off x="6793992" y="5315458"/>
+            <a:ext cx="4608576" cy="381000"/>
           </a:xfrm>
           <a:prstGeom prst="rect">
             <a:avLst/>
@@ -30323,7 +30323,7 @@
         <p:spPr>
           <a:xfrm>
             <a:off x="1289304" y="2980944"/>
-            <a:ext cx="4443984" cy="320040"/>
+            <a:ext cx="4443984" cy="198438"/>
           </a:xfrm>
           <a:prstGeom prst="rect">
             <a:avLst/>
@@ -30361,8 +30361,8 @@
         </p:nvSpPr>
         <p:spPr>
           <a:xfrm>
-            <a:off x="1289304" y="3328416"/>
-            <a:ext cx="4443984" cy="182880"/>
+            <a:off x="1289304" y="3206814"/>
+            <a:ext cx="4443984" cy="330200"/>
           </a:xfrm>
           <a:prstGeom prst="rect">
             <a:avLst/>
@@ -30502,7 +30502,7 @@
         <p:spPr>
           <a:xfrm>
             <a:off x="1289304" y="4014216"/>
-            <a:ext cx="4443984" cy="320040"/>
+            <a:ext cx="4443984" cy="198438"/>
           </a:xfrm>
           <a:prstGeom prst="rect">
             <a:avLst/>
@@ -30540,8 +30540,8 @@
         </p:nvSpPr>
         <p:spPr>
           <a:xfrm>
-            <a:off x="1289304" y="4361688"/>
-            <a:ext cx="4443984" cy="182880"/>
+            <a:off x="1289304" y="4240086"/>
+            <a:ext cx="4443984" cy="330200"/>
           </a:xfrm>
           <a:prstGeom prst="rect">
             <a:avLst/>
@@ -30681,7 +30681,7 @@
         <p:spPr>
           <a:xfrm>
             <a:off x="1289304" y="5047488"/>
-            <a:ext cx="4443984" cy="320040"/>
+            <a:ext cx="4443984" cy="198438"/>
           </a:xfrm>
           <a:prstGeom prst="rect">
             <a:avLst/>
@@ -30719,8 +30719,8 @@
         </p:nvSpPr>
         <p:spPr>
           <a:xfrm>
-            <a:off x="1289304" y="5394960"/>
-            <a:ext cx="4443984" cy="182880"/>
+            <a:off x="1289304" y="5273357"/>
+            <a:ext cx="4443984" cy="330200"/>
           </a:xfrm>
           <a:prstGeom prst="rect">
             <a:avLst/>
@@ -30796,7 +30796,7 @@
         <p:spPr>
           <a:xfrm>
             <a:off x="6611112" y="2944368"/>
-            <a:ext cx="4974336" cy="320040"/>
+            <a:ext cx="4974336" cy="222250"/>
           </a:xfrm>
           <a:prstGeom prst="rect">
             <a:avLst/>
@@ -30834,8 +30834,8 @@
         </p:nvSpPr>
         <p:spPr>
           <a:xfrm>
-            <a:off x="6611112" y="3328416"/>
-            <a:ext cx="4974336" cy="822960"/>
+            <a:off x="6611112" y="3230626"/>
+            <a:ext cx="4974336" cy="406400"/>
           </a:xfrm>
           <a:prstGeom prst="rect">
             <a:avLst/>
@@ -30911,7 +30911,7 @@
         <p:spPr>
           <a:xfrm>
             <a:off x="6611112" y="4663440"/>
-            <a:ext cx="4974336" cy="320040"/>
+            <a:ext cx="4974336" cy="222250"/>
           </a:xfrm>
           <a:prstGeom prst="rect">
             <a:avLst/>
@@ -30949,8 +30949,8 @@
         </p:nvSpPr>
         <p:spPr>
           <a:xfrm>
-            <a:off x="6611112" y="5047488"/>
-            <a:ext cx="4974336" cy="594360"/>
+            <a:off x="6611112" y="4949698"/>
+            <a:ext cx="4974336" cy="609600"/>
           </a:xfrm>
           <a:prstGeom prst="rect">
             <a:avLst/>
@@ -31278,7 +31278,7 @@
         <p:spPr>
           <a:xfrm>
             <a:off x="1289304" y="1517904"/>
-            <a:ext cx="4443984" cy="320040"/>
+            <a:ext cx="4443984" cy="182563"/>
           </a:xfrm>
           <a:prstGeom prst="rect">
             <a:avLst/>
@@ -31316,8 +31316,8 @@
         </p:nvSpPr>
         <p:spPr>
           <a:xfrm>
-            <a:off x="1289304" y="1865376"/>
-            <a:ext cx="4443984" cy="438912"/>
+            <a:off x="1289304" y="1727898"/>
+            <a:ext cx="4443984" cy="355600"/>
           </a:xfrm>
           <a:prstGeom prst="rect">
             <a:avLst/>
@@ -31457,7 +31457,7 @@
         <p:spPr>
           <a:xfrm>
             <a:off x="7141464" y="1517904"/>
-            <a:ext cx="4443984" cy="320040"/>
+            <a:ext cx="4443984" cy="182563"/>
           </a:xfrm>
           <a:prstGeom prst="rect">
             <a:avLst/>
@@ -31495,8 +31495,8 @@
         </p:nvSpPr>
         <p:spPr>
           <a:xfrm>
-            <a:off x="7141464" y="1865376"/>
-            <a:ext cx="4443984" cy="438912"/>
+            <a:off x="7141464" y="1727898"/>
+            <a:ext cx="4443984" cy="355600"/>
           </a:xfrm>
           <a:prstGeom prst="rect">
             <a:avLst/>
@@ -31636,7 +31636,7 @@
         <p:spPr>
           <a:xfrm>
             <a:off x="1289304" y="2706624"/>
-            <a:ext cx="4443984" cy="320040"/>
+            <a:ext cx="4443984" cy="182563"/>
           </a:xfrm>
           <a:prstGeom prst="rect">
             <a:avLst/>
@@ -31674,8 +31674,8 @@
         </p:nvSpPr>
         <p:spPr>
           <a:xfrm>
-            <a:off x="1289304" y="3054096"/>
-            <a:ext cx="4443984" cy="438912"/>
+            <a:off x="1289304" y="2916619"/>
+            <a:ext cx="4443984" cy="177800"/>
           </a:xfrm>
           <a:prstGeom prst="rect">
             <a:avLst/>
@@ -31815,7 +31815,7 @@
         <p:spPr>
           <a:xfrm>
             <a:off x="7141464" y="2706624"/>
-            <a:ext cx="4443984" cy="320040"/>
+            <a:ext cx="4443984" cy="182563"/>
           </a:xfrm>
           <a:prstGeom prst="rect">
             <a:avLst/>
@@ -31853,8 +31853,8 @@
         </p:nvSpPr>
         <p:spPr>
           <a:xfrm>
-            <a:off x="7141464" y="3054096"/>
-            <a:ext cx="4443984" cy="438912"/>
+            <a:off x="7141464" y="2916619"/>
+            <a:ext cx="4443984" cy="177800"/>
           </a:xfrm>
           <a:prstGeom prst="rect">
             <a:avLst/>
@@ -31994,7 +31994,7 @@
         <p:spPr>
           <a:xfrm>
             <a:off x="1289304" y="3895344"/>
-            <a:ext cx="4443984" cy="320040"/>
+            <a:ext cx="4443984" cy="182563"/>
           </a:xfrm>
           <a:prstGeom prst="rect">
             <a:avLst/>
@@ -32032,8 +32032,8 @@
         </p:nvSpPr>
         <p:spPr>
           <a:xfrm>
-            <a:off x="1289304" y="4242816"/>
-            <a:ext cx="4443984" cy="438912"/>
+            <a:off x="1289304" y="4105339"/>
+            <a:ext cx="4443984" cy="355600"/>
           </a:xfrm>
           <a:prstGeom prst="rect">
             <a:avLst/>
@@ -32173,7 +32173,7 @@
         <p:spPr>
           <a:xfrm>
             <a:off x="7141464" y="3895344"/>
-            <a:ext cx="4443984" cy="320040"/>
+            <a:ext cx="4443984" cy="182563"/>
           </a:xfrm>
           <a:prstGeom prst="rect">
             <a:avLst/>
@@ -32211,8 +32211,8 @@
         </p:nvSpPr>
         <p:spPr>
           <a:xfrm>
-            <a:off x="7141464" y="4242816"/>
-            <a:ext cx="4443984" cy="438912"/>
+            <a:off x="7141464" y="4105339"/>
+            <a:ext cx="4443984" cy="177800"/>
           </a:xfrm>
           <a:prstGeom prst="rect">
             <a:avLst/>
@@ -32352,7 +32352,7 @@
         <p:spPr>
           <a:xfrm>
             <a:off x="1289304" y="5084064"/>
-            <a:ext cx="4443984" cy="320040"/>
+            <a:ext cx="4443984" cy="182563"/>
           </a:xfrm>
           <a:prstGeom prst="rect">
             <a:avLst/>
@@ -32390,8 +32390,8 @@
         </p:nvSpPr>
         <p:spPr>
           <a:xfrm>
-            <a:off x="1289304" y="5431536"/>
-            <a:ext cx="4443984" cy="438912"/>
+            <a:off x="1289304" y="5294059"/>
+            <a:ext cx="4443984" cy="177800"/>
           </a:xfrm>
           <a:prstGeom prst="rect">
             <a:avLst/>
@@ -32531,7 +32531,7 @@
         <p:spPr>
           <a:xfrm>
             <a:off x="7141464" y="5084064"/>
-            <a:ext cx="4443984" cy="320040"/>
+            <a:ext cx="4443984" cy="182563"/>
           </a:xfrm>
           <a:prstGeom prst="rect">
             <a:avLst/>
@@ -32569,8 +32569,8 @@
         </p:nvSpPr>
         <p:spPr>
           <a:xfrm>
-            <a:off x="7141464" y="5431536"/>
-            <a:ext cx="4443984" cy="438912"/>
+            <a:off x="7141464" y="5294059"/>
+            <a:ext cx="4443984" cy="177800"/>
           </a:xfrm>
           <a:prstGeom prst="rect">
             <a:avLst/>
@@ -32668,7 +32668,7 @@
                 <a:ea typeface="Arial" pitchFamily="34" charset="-122"/>
                 <a:cs typeface="Arial" pitchFamily="34" charset="-120"/>
               </a:rPr>
-              <a:t>明日からの順番</a:t>
+              <a:t>まずは、ここから</a:t>
             </a:r>
             <a:endParaRPr lang="en-US" sz="3800" dirty="0"/>
           </a:p>
@@ -33142,7 +33142,7 @@
                 <a:ea typeface="Calibri" pitchFamily="34" charset="-122"/>
                 <a:cs typeface="Calibri" pitchFamily="34" charset="-120"/>
               </a:rPr>
-              <a:t>もとの資料：README.ja.md（全体像）　／　docs/packs.md（pack の仕様）　／　skills/engine/SKILL.md（ブリック一覧の本家）</a:t>
+              <a:t>もとの資料：README.ja.md（全体像）　／　docs/packs.md（pack の仕様）　／　skills/engine/SKILL.md（ブリック一覧）</a:t>
             </a:r>
             <a:endParaRPr lang="en-US" sz="1100" dirty="0"/>
           </a:p>
@@ -33482,7 +33482,7 @@
         <p:spPr>
           <a:xfrm>
             <a:off x="1289304" y="1517904"/>
-            <a:ext cx="4443984" cy="320040"/>
+            <a:ext cx="4443984" cy="198438"/>
           </a:xfrm>
           <a:prstGeom prst="rect">
             <a:avLst/>
@@ -33520,8 +33520,8 @@
         </p:nvSpPr>
         <p:spPr>
           <a:xfrm>
-            <a:off x="1289304" y="1865376"/>
-            <a:ext cx="4443984" cy="868680"/>
+            <a:off x="1289304" y="1743774"/>
+            <a:ext cx="4443984" cy="571500"/>
           </a:xfrm>
           <a:prstGeom prst="rect">
             <a:avLst/>
@@ -33661,7 +33661,7 @@
         <p:spPr>
           <a:xfrm>
             <a:off x="7141464" y="1517904"/>
-            <a:ext cx="4443984" cy="320040"/>
+            <a:ext cx="4443984" cy="198438"/>
           </a:xfrm>
           <a:prstGeom prst="rect">
             <a:avLst/>
@@ -33699,8 +33699,8 @@
         </p:nvSpPr>
         <p:spPr>
           <a:xfrm>
-            <a:off x="7141464" y="1865376"/>
-            <a:ext cx="4443984" cy="868680"/>
+            <a:off x="7141464" y="1743774"/>
+            <a:ext cx="4443984" cy="571500"/>
           </a:xfrm>
           <a:prstGeom prst="rect">
             <a:avLst/>
@@ -33840,7 +33840,7 @@
         <p:spPr>
           <a:xfrm>
             <a:off x="1289304" y="3300984"/>
-            <a:ext cx="4443984" cy="320040"/>
+            <a:ext cx="4443984" cy="198438"/>
           </a:xfrm>
           <a:prstGeom prst="rect">
             <a:avLst/>
@@ -33878,8 +33878,8 @@
         </p:nvSpPr>
         <p:spPr>
           <a:xfrm>
-            <a:off x="1289304" y="3648456"/>
-            <a:ext cx="4443984" cy="868680"/>
+            <a:off x="1289304" y="3526854"/>
+            <a:ext cx="4443984" cy="571500"/>
           </a:xfrm>
           <a:prstGeom prst="rect">
             <a:avLst/>
@@ -34019,7 +34019,7 @@
         <p:spPr>
           <a:xfrm>
             <a:off x="7141464" y="3300984"/>
-            <a:ext cx="4443984" cy="320040"/>
+            <a:ext cx="4443984" cy="198438"/>
           </a:xfrm>
           <a:prstGeom prst="rect">
             <a:avLst/>
@@ -34057,8 +34057,8 @@
         </p:nvSpPr>
         <p:spPr>
           <a:xfrm>
-            <a:off x="7141464" y="3648456"/>
-            <a:ext cx="4443984" cy="868680"/>
+            <a:off x="7141464" y="3526854"/>
+            <a:ext cx="4443984" cy="571500"/>
           </a:xfrm>
           <a:prstGeom prst="rect">
             <a:avLst/>
@@ -34134,7 +34134,7 @@
         <p:spPr>
           <a:xfrm>
             <a:off x="758952" y="5074920"/>
-            <a:ext cx="10643616" cy="320040"/>
+            <a:ext cx="10643616" cy="222250"/>
           </a:xfrm>
           <a:prstGeom prst="rect">
             <a:avLst/>
@@ -34172,8 +34172,8 @@
         </p:nvSpPr>
         <p:spPr>
           <a:xfrm>
-            <a:off x="758952" y="5458968"/>
-            <a:ext cx="10643616" cy="228600"/>
+            <a:off x="758952" y="5361178"/>
+            <a:ext cx="10643616" cy="190500"/>
           </a:xfrm>
           <a:prstGeom prst="rect">
             <a:avLst/>
@@ -34501,7 +34501,7 @@
         <p:spPr>
           <a:xfrm>
             <a:off x="1289304" y="1517904"/>
-            <a:ext cx="10113264" cy="320040"/>
+            <a:ext cx="10113264" cy="206375"/>
           </a:xfrm>
           <a:prstGeom prst="rect">
             <a:avLst/>
@@ -34539,8 +34539,8 @@
         </p:nvSpPr>
         <p:spPr>
           <a:xfrm>
-            <a:off x="1289304" y="1865376"/>
-            <a:ext cx="10113264" cy="292608"/>
+            <a:off x="1289304" y="1751711"/>
+            <a:ext cx="10113264" cy="190500"/>
           </a:xfrm>
           <a:prstGeom prst="rect">
             <a:avLst/>
@@ -34719,7 +34719,7 @@
         <p:spPr>
           <a:xfrm>
             <a:off x="1289304" y="2688336"/>
-            <a:ext cx="10113264" cy="320040"/>
+            <a:ext cx="10113264" cy="206375"/>
           </a:xfrm>
           <a:prstGeom prst="rect">
             <a:avLst/>
@@ -34757,8 +34757,8 @@
         </p:nvSpPr>
         <p:spPr>
           <a:xfrm>
-            <a:off x="1289304" y="3035808"/>
-            <a:ext cx="10113264" cy="292608"/>
+            <a:off x="1289304" y="2922143"/>
+            <a:ext cx="10113264" cy="381000"/>
           </a:xfrm>
           <a:prstGeom prst="rect">
             <a:avLst/>
@@ -34937,7 +34937,7 @@
         <p:spPr>
           <a:xfrm>
             <a:off x="1289304" y="3858768"/>
-            <a:ext cx="10113264" cy="320040"/>
+            <a:ext cx="10113264" cy="206375"/>
           </a:xfrm>
           <a:prstGeom prst="rect">
             <a:avLst/>
@@ -34975,8 +34975,8 @@
         </p:nvSpPr>
         <p:spPr>
           <a:xfrm>
-            <a:off x="1289304" y="4206240"/>
-            <a:ext cx="10113264" cy="292608"/>
+            <a:off x="1289304" y="4092575"/>
+            <a:ext cx="10113264" cy="381000"/>
           </a:xfrm>
           <a:prstGeom prst="rect">
             <a:avLst/>
@@ -35155,7 +35155,7 @@
         <p:spPr>
           <a:xfrm>
             <a:off x="1289304" y="5029200"/>
-            <a:ext cx="10113264" cy="320040"/>
+            <a:ext cx="10113264" cy="206375"/>
           </a:xfrm>
           <a:prstGeom prst="rect">
             <a:avLst/>
@@ -35193,8 +35193,8 @@
         </p:nvSpPr>
         <p:spPr>
           <a:xfrm>
-            <a:off x="1289304" y="5376672"/>
-            <a:ext cx="10113264" cy="292608"/>
+            <a:off x="1289304" y="5263007"/>
+            <a:ext cx="10113264" cy="381000"/>
           </a:xfrm>
           <a:prstGeom prst="rect">
             <a:avLst/>
@@ -35989,7 +35989,7 @@
         <p:spPr>
           <a:xfrm>
             <a:off x="7159752" y="1874520"/>
-            <a:ext cx="4242816" cy="320040"/>
+            <a:ext cx="4242816" cy="222250"/>
           </a:xfrm>
           <a:prstGeom prst="rect">
             <a:avLst/>
@@ -36027,8 +36027,8 @@
         </p:nvSpPr>
         <p:spPr>
           <a:xfrm>
-            <a:off x="7159752" y="2258568"/>
-            <a:ext cx="4242816" cy="1234440"/>
+            <a:off x="7159752" y="2160778"/>
+            <a:ext cx="4242816" cy="1016000"/>
           </a:xfrm>
           <a:prstGeom prst="rect">
             <a:avLst/>
@@ -36104,7 +36104,7 @@
         <p:spPr>
           <a:xfrm>
             <a:off x="7159752" y="3977640"/>
-            <a:ext cx="4242816" cy="320040"/>
+            <a:ext cx="4242816" cy="222250"/>
           </a:xfrm>
           <a:prstGeom prst="rect">
             <a:avLst/>
@@ -36142,8 +36142,8 @@
         </p:nvSpPr>
         <p:spPr>
           <a:xfrm>
-            <a:off x="7159752" y="4361688"/>
-            <a:ext cx="4242816" cy="411480"/>
+            <a:off x="7159752" y="4263898"/>
+            <a:ext cx="4242816" cy="406400"/>
           </a:xfrm>
           <a:prstGeom prst="rect">
             <a:avLst/>
@@ -36219,7 +36219,7 @@
         <p:spPr>
           <a:xfrm>
             <a:off x="7159752" y="5257800"/>
-            <a:ext cx="4242816" cy="320040"/>
+            <a:ext cx="4242816" cy="222250"/>
           </a:xfrm>
           <a:prstGeom prst="rect">
             <a:avLst/>
@@ -36257,8 +36257,8 @@
         </p:nvSpPr>
         <p:spPr>
           <a:xfrm>
-            <a:off x="7159752" y="5641848"/>
-            <a:ext cx="4242816" cy="228600"/>
+            <a:off x="7159752" y="5544058"/>
+            <a:ext cx="4242816" cy="203200"/>
           </a:xfrm>
           <a:prstGeom prst="rect">
             <a:avLst/>
@@ -37325,7 +37325,7 @@
         <p:spPr>
           <a:xfrm>
             <a:off x="8622792" y="1874520"/>
-            <a:ext cx="2779776" cy="320040"/>
+            <a:ext cx="2779776" cy="222250"/>
           </a:xfrm>
           <a:prstGeom prst="rect">
             <a:avLst/>
@@ -37363,8 +37363,8 @@
         </p:nvSpPr>
         <p:spPr>
           <a:xfrm>
-            <a:off x="8622792" y="2258568"/>
-            <a:ext cx="2779776" cy="685800"/>
+            <a:off x="8622792" y="2160778"/>
+            <a:ext cx="2779776" cy="571500"/>
           </a:xfrm>
           <a:prstGeom prst="rect">
             <a:avLst/>
@@ -37440,7 +37440,7 @@
         <p:spPr>
           <a:xfrm>
             <a:off x="8622792" y="3383280"/>
-            <a:ext cx="2779776" cy="320040"/>
+            <a:ext cx="2779776" cy="222250"/>
           </a:xfrm>
           <a:prstGeom prst="rect">
             <a:avLst/>
@@ -37478,8 +37478,8 @@
         </p:nvSpPr>
         <p:spPr>
           <a:xfrm>
-            <a:off x="8622792" y="3767328"/>
-            <a:ext cx="2779776" cy="685800"/>
+            <a:off x="8622792" y="3669538"/>
+            <a:ext cx="2779776" cy="762000"/>
           </a:xfrm>
           <a:prstGeom prst="rect">
             <a:avLst/>
@@ -37520,12 +37520,12 @@
         </p:nvSpPr>
         <p:spPr>
           <a:xfrm>
-            <a:off x="8366760" y="4709160"/>
-            <a:ext cx="3291840" cy="1325880"/>
+            <a:off x="8366760" y="4617720"/>
+            <a:ext cx="3291840" cy="1463040"/>
           </a:xfrm>
           <a:prstGeom prst="roundRect">
             <a:avLst>
-              <a:gd name="adj" fmla="val 4138"/>
+              <a:gd name="adj" fmla="val 3750"/>
             </a:avLst>
           </a:prstGeom>
           <a:solidFill>
@@ -37554,8 +37554,8 @@
         </p:nvSpPr>
         <p:spPr>
           <a:xfrm>
-            <a:off x="8622792" y="4892040"/>
-            <a:ext cx="2779776" cy="320040"/>
+            <a:off x="8622792" y="4800600"/>
+            <a:ext cx="2779776" cy="444500"/>
           </a:xfrm>
           <a:prstGeom prst="rect">
             <a:avLst/>
@@ -37593,8 +37593,8 @@
         </p:nvSpPr>
         <p:spPr>
           <a:xfrm>
-            <a:off x="8622792" y="5276088"/>
-            <a:ext cx="2779776" cy="594360"/>
+            <a:off x="8622792" y="5309108"/>
+            <a:ext cx="2779776" cy="571500"/>
           </a:xfrm>
           <a:prstGeom prst="rect">
             <a:avLst/>
@@ -37670,7 +37670,7 @@
         <p:spPr>
           <a:xfrm>
             <a:off x="758952" y="4892040"/>
-            <a:ext cx="7077456" cy="320040"/>
+            <a:ext cx="7077456" cy="222250"/>
           </a:xfrm>
           <a:prstGeom prst="rect">
             <a:avLst/>
@@ -37708,8 +37708,8 @@
         </p:nvSpPr>
         <p:spPr>
           <a:xfrm>
-            <a:off x="758952" y="5276088"/>
-            <a:ext cx="7077456" cy="594360"/>
+            <a:off x="758952" y="5178298"/>
+            <a:ext cx="7077456" cy="406400"/>
           </a:xfrm>
           <a:prstGeom prst="rect">
             <a:avLst/>
@@ -38934,7 +38934,7 @@
         <p:spPr>
           <a:xfrm>
             <a:off x="8513064" y="1847088"/>
-            <a:ext cx="3392424" cy="320040"/>
+            <a:ext cx="3392424" cy="198438"/>
           </a:xfrm>
           <a:prstGeom prst="rect">
             <a:avLst/>
@@ -38972,8 +38972,8 @@
         </p:nvSpPr>
         <p:spPr>
           <a:xfrm>
-            <a:off x="8513064" y="2194560"/>
-            <a:ext cx="3392424" cy="320040"/>
+            <a:off x="8513064" y="2072958"/>
+            <a:ext cx="3392424" cy="330200"/>
           </a:xfrm>
           <a:prstGeom prst="rect">
             <a:avLst/>
@@ -39113,7 +39113,7 @@
         <p:spPr>
           <a:xfrm>
             <a:off x="8513064" y="3017520"/>
-            <a:ext cx="3392424" cy="320040"/>
+            <a:ext cx="3392424" cy="198438"/>
           </a:xfrm>
           <a:prstGeom prst="rect">
             <a:avLst/>
@@ -39151,8 +39151,8 @@
         </p:nvSpPr>
         <p:spPr>
           <a:xfrm>
-            <a:off x="8513064" y="3364992"/>
-            <a:ext cx="3392424" cy="320040"/>
+            <a:off x="8513064" y="3243390"/>
+            <a:ext cx="3392424" cy="330200"/>
           </a:xfrm>
           <a:prstGeom prst="rect">
             <a:avLst/>
@@ -39292,7 +39292,7 @@
         <p:spPr>
           <a:xfrm>
             <a:off x="8513064" y="4187952"/>
-            <a:ext cx="3392424" cy="320040"/>
+            <a:ext cx="3392424" cy="198438"/>
           </a:xfrm>
           <a:prstGeom prst="rect">
             <a:avLst/>
@@ -39330,8 +39330,8 @@
         </p:nvSpPr>
         <p:spPr>
           <a:xfrm>
-            <a:off x="8513064" y="4535424"/>
-            <a:ext cx="3392424" cy="320040"/>
+            <a:off x="8513064" y="4413822"/>
+            <a:ext cx="3392424" cy="330200"/>
           </a:xfrm>
           <a:prstGeom prst="rect">
             <a:avLst/>
@@ -39372,12 +39372,12 @@
         </p:nvSpPr>
         <p:spPr>
           <a:xfrm>
-            <a:off x="502920" y="5029200"/>
-            <a:ext cx="6949440" cy="868680"/>
+            <a:off x="502920" y="4937760"/>
+            <a:ext cx="6949440" cy="1051560"/>
           </a:xfrm>
           <a:prstGeom prst="roundRect">
             <a:avLst>
-              <a:gd name="adj" fmla="val 6316"/>
+              <a:gd name="adj" fmla="val 5217"/>
             </a:avLst>
           </a:prstGeom>
           <a:solidFill>
@@ -39406,8 +39406,8 @@
         </p:nvSpPr>
         <p:spPr>
           <a:xfrm>
-            <a:off x="758952" y="5212080"/>
-            <a:ext cx="6437376" cy="320040"/>
+            <a:off x="758952" y="5120640"/>
+            <a:ext cx="6437376" cy="222250"/>
           </a:xfrm>
           <a:prstGeom prst="rect">
             <a:avLst/>
@@ -39445,8 +39445,8 @@
         </p:nvSpPr>
         <p:spPr>
           <a:xfrm>
-            <a:off x="758952" y="5596128"/>
-            <a:ext cx="6437376" cy="137160"/>
+            <a:off x="758952" y="5406898"/>
+            <a:ext cx="6437376" cy="381000"/>
           </a:xfrm>
           <a:prstGeom prst="rect">
             <a:avLst/>
@@ -39487,12 +39487,12 @@
         </p:nvSpPr>
         <p:spPr>
           <a:xfrm>
-            <a:off x="7726680" y="5166360"/>
-            <a:ext cx="4434840" cy="731520"/>
+            <a:off x="7726680" y="5074920"/>
+            <a:ext cx="4434840" cy="960120"/>
           </a:xfrm>
           <a:prstGeom prst="roundRect">
             <a:avLst>
-              <a:gd name="adj" fmla="val 7500"/>
+              <a:gd name="adj" fmla="val 5714"/>
             </a:avLst>
           </a:prstGeom>
           <a:solidFill>
@@ -39521,8 +39521,8 @@
         </p:nvSpPr>
         <p:spPr>
           <a:xfrm>
-            <a:off x="7982712" y="5349240"/>
-            <a:ext cx="3922776" cy="320040"/>
+            <a:off x="7982712" y="5257800"/>
+            <a:ext cx="3922776" cy="222250"/>
           </a:xfrm>
           <a:prstGeom prst="rect">
             <a:avLst/>
@@ -39560,8 +39560,8 @@
         </p:nvSpPr>
         <p:spPr>
           <a:xfrm>
-            <a:off x="7982712" y="5733288"/>
-            <a:ext cx="3922776" cy="0"/>
+            <a:off x="7982712" y="5544058"/>
+            <a:ext cx="3922776" cy="330200"/>
           </a:xfrm>
           <a:prstGeom prst="rect">
             <a:avLst/>
@@ -39825,7 +39825,7 @@
         <p:spPr>
           <a:xfrm>
             <a:off x="758952" y="1481328"/>
-            <a:ext cx="3191256" cy="320040"/>
+            <a:ext cx="3191256" cy="206375"/>
           </a:xfrm>
           <a:prstGeom prst="rect">
             <a:avLst/>
@@ -39863,8 +39863,8 @@
         </p:nvSpPr>
         <p:spPr>
           <a:xfrm>
-            <a:off x="758952" y="1865376"/>
-            <a:ext cx="3191256" cy="731520"/>
+            <a:off x="758952" y="1751711"/>
+            <a:ext cx="3191256" cy="533400"/>
           </a:xfrm>
           <a:prstGeom prst="rect">
             <a:avLst/>
@@ -39940,7 +39940,7 @@
         <p:spPr>
           <a:xfrm>
             <a:off x="4645152" y="1481328"/>
-            <a:ext cx="3191256" cy="320040"/>
+            <a:ext cx="3191256" cy="206375"/>
           </a:xfrm>
           <a:prstGeom prst="rect">
             <a:avLst/>
@@ -39978,8 +39978,8 @@
         </p:nvSpPr>
         <p:spPr>
           <a:xfrm>
-            <a:off x="4645152" y="1865376"/>
-            <a:ext cx="3191256" cy="731520"/>
+            <a:off x="4645152" y="1751711"/>
+            <a:ext cx="3191256" cy="711200"/>
           </a:xfrm>
           <a:prstGeom prst="rect">
             <a:avLst/>
@@ -40055,7 +40055,7 @@
         <p:spPr>
           <a:xfrm>
             <a:off x="758952" y="3081528"/>
-            <a:ext cx="3191256" cy="320040"/>
+            <a:ext cx="3191256" cy="206375"/>
           </a:xfrm>
           <a:prstGeom prst="rect">
             <a:avLst/>
@@ -40093,8 +40093,8 @@
         </p:nvSpPr>
         <p:spPr>
           <a:xfrm>
-            <a:off x="758952" y="3465576"/>
-            <a:ext cx="3191256" cy="731520"/>
+            <a:off x="758952" y="3351911"/>
+            <a:ext cx="3191256" cy="355600"/>
           </a:xfrm>
           <a:prstGeom prst="rect">
             <a:avLst/>
@@ -40170,7 +40170,7 @@
         <p:spPr>
           <a:xfrm>
             <a:off x="4645152" y="3081528"/>
-            <a:ext cx="3191256" cy="320040"/>
+            <a:ext cx="3191256" cy="206375"/>
           </a:xfrm>
           <a:prstGeom prst="rect">
             <a:avLst/>
@@ -40208,8 +40208,8 @@
         </p:nvSpPr>
         <p:spPr>
           <a:xfrm>
-            <a:off x="4645152" y="3465576"/>
-            <a:ext cx="3191256" cy="731520"/>
+            <a:off x="4645152" y="3351911"/>
+            <a:ext cx="3191256" cy="533400"/>
           </a:xfrm>
           <a:prstGeom prst="rect">
             <a:avLst/>
@@ -40285,7 +40285,7 @@
         <p:spPr>
           <a:xfrm>
             <a:off x="758952" y="4709160"/>
-            <a:ext cx="7077456" cy="320040"/>
+            <a:ext cx="7077456" cy="222250"/>
           </a:xfrm>
           <a:prstGeom prst="rect">
             <a:avLst/>
@@ -40323,8 +40323,8 @@
         </p:nvSpPr>
         <p:spPr>
           <a:xfrm>
-            <a:off x="758952" y="5093208"/>
-            <a:ext cx="7077456" cy="594360"/>
+            <a:off x="758952" y="4995418"/>
+            <a:ext cx="7077456" cy="406400"/>
           </a:xfrm>
           <a:prstGeom prst="rect">
             <a:avLst/>
@@ -40400,7 +40400,7 @@
         <p:spPr>
           <a:xfrm>
             <a:off x="8622792" y="1481328"/>
-            <a:ext cx="2779776" cy="320040"/>
+            <a:ext cx="2779776" cy="222250"/>
           </a:xfrm>
           <a:prstGeom prst="rect">
             <a:avLst/>
@@ -40438,8 +40438,8 @@
         </p:nvSpPr>
         <p:spPr>
           <a:xfrm>
-            <a:off x="8622792" y="1865376"/>
-            <a:ext cx="2779776" cy="2514600"/>
+            <a:off x="8622792" y="1767586"/>
+            <a:ext cx="2779776" cy="1828800"/>
           </a:xfrm>
           <a:prstGeom prst="rect">
             <a:avLst/>
@@ -40569,12 +40569,12 @@
         </p:nvSpPr>
         <p:spPr>
           <a:xfrm>
-            <a:off x="8366760" y="4709160"/>
-            <a:ext cx="3291840" cy="1143000"/>
+            <a:off x="8366760" y="4617720"/>
+            <a:ext cx="3291840" cy="1280160"/>
           </a:xfrm>
           <a:prstGeom prst="roundRect">
             <a:avLst>
-              <a:gd name="adj" fmla="val 4800"/>
+              <a:gd name="adj" fmla="val 4286"/>
             </a:avLst>
           </a:prstGeom>
           <a:solidFill>
@@ -40603,8 +40603,8 @@
         </p:nvSpPr>
         <p:spPr>
           <a:xfrm>
-            <a:off x="8622792" y="4892040"/>
-            <a:ext cx="2779776" cy="320040"/>
+            <a:off x="8622792" y="4800600"/>
+            <a:ext cx="2779776" cy="222250"/>
           </a:xfrm>
           <a:prstGeom prst="rect">
             <a:avLst/>
@@ -40642,8 +40642,8 @@
         </p:nvSpPr>
         <p:spPr>
           <a:xfrm>
-            <a:off x="8622792" y="5276088"/>
-            <a:ext cx="2779776" cy="411480"/>
+            <a:off x="8622792" y="5086858"/>
+            <a:ext cx="2779776" cy="571500"/>
           </a:xfrm>
           <a:prstGeom prst="rect">
             <a:avLst/>

--- a/docs/onboarding/rig-intro.ja.pptx
+++ b/docs/onboarding/rig-intro.ja.pptx
@@ -31675,7 +31675,7 @@
         <p:spPr>
           <a:xfrm>
             <a:off x="1289304" y="2916619"/>
-            <a:ext cx="4443984" cy="177800"/>
+            <a:ext cx="4443984" cy="355600"/>
           </a:xfrm>
           <a:prstGeom prst="rect">
             <a:avLst/>
@@ -31702,7 +31702,7 @@
                 <a:ea typeface="Calibri" pitchFamily="34" charset="-122"/>
                 <a:cs typeface="Calibri" pitchFamily="34" charset="-120"/>
               </a:rPr>
-              <a:t>いったん署名を外して、sync してから、鍵で署名し直してください</a:t>
+              <a:t>いったん署名を外してから sync してください。rig は署名を読みますが、もう作りません</a:t>
             </a:r>
             <a:endParaRPr lang="en-US" sz="1050" dirty="0"/>
           </a:p>
@@ -32197,7 +32197,7 @@
                 <a:ea typeface="Arial" pitchFamily="34" charset="-122"/>
                 <a:cs typeface="Arial" pitchFamily="34" charset="-120"/>
               </a:rPr>
-              <a:t>user / org では品質検証を飛ばせません</a:t>
+              <a:t>install は署名を要求しません</a:t>
             </a:r>
             <a:endParaRPr lang="en-US" sz="1150" dirty="0"/>
           </a:p>
@@ -32239,7 +32239,7 @@
                 <a:ea typeface="Calibri" pitchFamily="34" charset="-122"/>
                 <a:cs typeface="Calibri" pitchFamily="34" charset="-120"/>
               </a:rPr>
-              <a:t>--allow-unverified が使えるのは project スコープだけです</a:t>
+              <a:t>検証はします。結果は lock に verification_status として残ります</a:t>
             </a:r>
             <a:endParaRPr lang="en-US" sz="1050" dirty="0"/>
           </a:p>
